--- a/Other/Курсовой_проект_АрхРеестр_Маратканов_А.А.pptx
+++ b/Other/Курсовой_проект_АрхРеестр_Маратканов_А.А.pptx
@@ -5,19 +5,17 @@
     <p:sldMasterId id="2147483648" r:id="rId1"/>
   </p:sldMasterIdLst>
   <p:notesMasterIdLst>
-    <p:notesMasterId r:id="rId12"/>
+    <p:notesMasterId r:id="rId10"/>
   </p:notesMasterIdLst>
   <p:sldIdLst>
     <p:sldId id="256" r:id="rId2"/>
     <p:sldId id="257" r:id="rId3"/>
     <p:sldId id="259" r:id="rId4"/>
-    <p:sldId id="258" r:id="rId5"/>
-    <p:sldId id="260" r:id="rId6"/>
-    <p:sldId id="261" r:id="rId7"/>
-    <p:sldId id="262" r:id="rId8"/>
-    <p:sldId id="263" r:id="rId9"/>
-    <p:sldId id="264" r:id="rId10"/>
-    <p:sldId id="266" r:id="rId11"/>
+    <p:sldId id="260" r:id="rId5"/>
+    <p:sldId id="261" r:id="rId6"/>
+    <p:sldId id="262" r:id="rId7"/>
+    <p:sldId id="264" r:id="rId8"/>
+    <p:sldId id="267" r:id="rId9"/>
   </p:sldIdLst>
   <p:sldSz cx="9144000" cy="5143500" type="screen16x9"/>
   <p:notesSz cx="5143500" cy="9144000"/>
@@ -332,114 +330,6 @@
     <p:extLst>
       <p:ext uri="{BB962C8B-B14F-4D97-AF65-F5344CB8AC3E}">
         <p14:creationId xmlns:p14="http://schemas.microsoft.com/office/powerpoint/2010/main" val="1024086991"/>
-      </p:ext>
-    </p:extLst>
-  </p:cSld>
-  <p:clrMapOvr>
-    <a:masterClrMapping/>
-  </p:clrMapOvr>
-</p:notes>
-</file>
-
-<file path=ppt/notesSlides/notesSlide10.xml><?xml version="1.0" encoding="utf-8"?>
-<p:notes xmlns:a="http://schemas.openxmlformats.org/drawingml/2006/main" xmlns:r="http://schemas.openxmlformats.org/officeDocument/2006/relationships" xmlns:p="http://schemas.openxmlformats.org/presentationml/2006/main">
-  <p:cSld>
-    <p:spTree>
-      <p:nvGrpSpPr>
-        <p:cNvPr id="1" name="">
-          <a:extLst>
-            <a:ext uri="{FF2B5EF4-FFF2-40B4-BE49-F238E27FC236}">
-              <a16:creationId xmlns:a16="http://schemas.microsoft.com/office/drawing/2014/main" id="{6D033539-56B1-EEC0-6B2A-53AA0E5DC2C5}"/>
-            </a:ext>
-          </a:extLst>
-        </p:cNvPr>
-        <p:cNvGrpSpPr/>
-        <p:nvPr/>
-      </p:nvGrpSpPr>
-      <p:grpSpPr>
-        <a:xfrm>
-          <a:off x="0" y="0"/>
-          <a:ext cx="0" cy="0"/>
-          <a:chOff x="0" y="0"/>
-          <a:chExt cx="0" cy="0"/>
-        </a:xfrm>
-      </p:grpSpPr>
-      <p:sp>
-        <p:nvSpPr>
-          <p:cNvPr id="2" name="Slide Image Placeholder 1">
-            <a:extLst>
-              <a:ext uri="{FF2B5EF4-FFF2-40B4-BE49-F238E27FC236}">
-                <a16:creationId xmlns:a16="http://schemas.microsoft.com/office/drawing/2014/main" id="{2D8A2F16-AC61-A078-7EAB-2918CA35572F}"/>
-              </a:ext>
-            </a:extLst>
-          </p:cNvPr>
-          <p:cNvSpPr>
-            <a:spLocks noGrp="1" noRot="1" noChangeAspect="1"/>
-          </p:cNvSpPr>
-          <p:nvPr>
-            <p:ph type="sldImg"/>
-          </p:nvPr>
-        </p:nvSpPr>
-        <p:spPr/>
-      </p:sp>
-      <p:sp>
-        <p:nvSpPr>
-          <p:cNvPr id="3" name="Notes Placeholder 2">
-            <a:extLst>
-              <a:ext uri="{FF2B5EF4-FFF2-40B4-BE49-F238E27FC236}">
-                <a16:creationId xmlns:a16="http://schemas.microsoft.com/office/drawing/2014/main" id="{8EA5E9FC-BCC5-871A-838F-B26E1E708D92}"/>
-              </a:ext>
-            </a:extLst>
-          </p:cNvPr>
-          <p:cNvSpPr>
-            <a:spLocks noGrp="1"/>
-          </p:cNvSpPr>
-          <p:nvPr>
-            <p:ph type="body" idx="1"/>
-          </p:nvPr>
-        </p:nvSpPr>
-        <p:spPr/>
-        <p:txBody>
-          <a:bodyPr/>
-          <a:lstStyle/>
-          <a:p>
-            <a:endParaRPr lang="en-US" dirty="0"/>
-          </a:p>
-        </p:txBody>
-      </p:sp>
-      <p:sp>
-        <p:nvSpPr>
-          <p:cNvPr id="4" name="Slide Number Placeholder 3">
-            <a:extLst>
-              <a:ext uri="{FF2B5EF4-FFF2-40B4-BE49-F238E27FC236}">
-                <a16:creationId xmlns:a16="http://schemas.microsoft.com/office/drawing/2014/main" id="{D87E97CE-D32C-BF0B-76A2-0CAE8634254A}"/>
-              </a:ext>
-            </a:extLst>
-          </p:cNvPr>
-          <p:cNvSpPr>
-            <a:spLocks noGrp="1"/>
-          </p:cNvSpPr>
-          <p:nvPr>
-            <p:ph type="sldNum" sz="quarter" idx="10"/>
-          </p:nvPr>
-        </p:nvSpPr>
-        <p:spPr/>
-        <p:txBody>
-          <a:bodyPr/>
-          <a:lstStyle/>
-          <a:p>
-            <a:fld id="{F7021451-1387-4CA6-816F-3879F97B5CBC}" type="slidenum">
-              <a:rPr lang="en-US"/>
-              <a:t>10</a:t>
-            </a:fld>
-            <a:endParaRPr lang="en-US"/>
-          </a:p>
-        </p:txBody>
-      </p:sp>
-    </p:spTree>
-    <p:extLst>
-      <p:ext uri="{BB962C8B-B14F-4D97-AF65-F5344CB8AC3E}">
-        <p14:creationId xmlns:p14="http://schemas.microsoft.com/office/powerpoint/2010/main" val="2209399924"/>
       </p:ext>
     </p:extLst>
   </p:cSld>
@@ -1027,91 +917,7 @@
     </p:spTree>
     <p:extLst>
       <p:ext uri="{BB962C8B-B14F-4D97-AF65-F5344CB8AC3E}">
-        <p14:creationId xmlns:p14="http://schemas.microsoft.com/office/powerpoint/2010/main" val="1024086991"/>
-      </p:ext>
-    </p:extLst>
-  </p:cSld>
-  <p:clrMapOvr>
-    <a:masterClrMapping/>
-  </p:clrMapOvr>
-</p:notes>
-</file>
-
-<file path=ppt/notesSlides/notesSlide9.xml><?xml version="1.0" encoding="utf-8"?>
-<p:notes xmlns:a="http://schemas.openxmlformats.org/drawingml/2006/main" xmlns:r="http://schemas.openxmlformats.org/officeDocument/2006/relationships" xmlns:p="http://schemas.openxmlformats.org/presentationml/2006/main">
-  <p:cSld>
-    <p:spTree>
-      <p:nvGrpSpPr>
-        <p:cNvPr id="1" name=""/>
-        <p:cNvGrpSpPr/>
-        <p:nvPr/>
-      </p:nvGrpSpPr>
-      <p:grpSpPr>
-        <a:xfrm>
-          <a:off x="0" y="0"/>
-          <a:ext cx="0" cy="0"/>
-          <a:chOff x="0" y="0"/>
-          <a:chExt cx="0" cy="0"/>
-        </a:xfrm>
-      </p:grpSpPr>
-      <p:sp>
-        <p:nvSpPr>
-          <p:cNvPr id="2" name="Slide Image Placeholder 1"/>
-          <p:cNvSpPr>
-            <a:spLocks noGrp="1" noRot="1" noChangeAspect="1"/>
-          </p:cNvSpPr>
-          <p:nvPr>
-            <p:ph type="sldImg"/>
-          </p:nvPr>
-        </p:nvSpPr>
-        <p:spPr/>
-      </p:sp>
-      <p:sp>
-        <p:nvSpPr>
-          <p:cNvPr id="3" name="Notes Placeholder 2"/>
-          <p:cNvSpPr>
-            <a:spLocks noGrp="1"/>
-          </p:cNvSpPr>
-          <p:nvPr>
-            <p:ph type="body" idx="1"/>
-          </p:nvPr>
-        </p:nvSpPr>
-        <p:spPr/>
-        <p:txBody>
-          <a:bodyPr/>
-          <a:lstStyle/>
-          <a:p>
-            <a:endParaRPr lang="en-US" dirty="0"/>
-          </a:p>
-        </p:txBody>
-      </p:sp>
-      <p:sp>
-        <p:nvSpPr>
-          <p:cNvPr id="4" name="Slide Number Placeholder 3"/>
-          <p:cNvSpPr>
-            <a:spLocks noGrp="1"/>
-          </p:cNvSpPr>
-          <p:nvPr>
-            <p:ph type="sldNum" sz="quarter" idx="10"/>
-          </p:nvPr>
-        </p:nvSpPr>
-        <p:spPr/>
-        <p:txBody>
-          <a:bodyPr/>
-          <a:lstStyle/>
-          <a:p>
-            <a:fld id="{F7021451-1387-4CA6-816F-3879F97B5CBC}" type="slidenum">
-              <a:rPr lang="en-US"/>
-              <a:t>9</a:t>
-            </a:fld>
-            <a:endParaRPr lang="en-US"/>
-          </a:p>
-        </p:txBody>
-      </p:sp>
-    </p:spTree>
-    <p:extLst>
-      <p:ext uri="{BB962C8B-B14F-4D97-AF65-F5344CB8AC3E}">
-        <p14:creationId xmlns:p14="http://schemas.microsoft.com/office/powerpoint/2010/main" val="1024086991"/>
+        <p14:creationId xmlns:p14="http://schemas.microsoft.com/office/powerpoint/2010/main" val="1540715970"/>
       </p:ext>
     </p:extLst>
   </p:cSld>
@@ -1624,12 +1430,28 @@
               <a:buNone/>
             </a:pPr>
             <a:r>
+              <a:rPr lang="ru-RU" sz="2400" b="1" dirty="0" smtClean="0">
+                <a:solidFill>
+                  <a:srgbClr val="006064"/>
+                </a:solidFill>
+              </a:rPr>
+              <a:t>Дипломный</a:t>
+            </a:r>
+            <a:r>
+              <a:rPr lang="en-US" sz="2400" b="1" dirty="0" smtClean="0">
+                <a:solidFill>
+                  <a:srgbClr val="006064"/>
+                </a:solidFill>
+              </a:rPr>
+              <a:t> </a:t>
+            </a:r>
+            <a:r>
               <a:rPr lang="en-US" sz="2400" b="1" dirty="0">
                 <a:solidFill>
                   <a:srgbClr val="006064"/>
                 </a:solidFill>
               </a:rPr>
-              <a:t>Курсовой проект</a:t>
+              <a:t>проект</a:t>
             </a:r>
             <a:endParaRPr lang="en-US" sz="2400" dirty="0"/>
           </a:p>
@@ -1665,7 +1487,23 @@
                   <a:srgbClr val="00ACC1"/>
                 </a:solidFill>
               </a:rPr>
-              <a:t>РАЗРАБОТКА ПОДСИСТЕМЫ</a:t>
+              <a:t>РАЗРАБОТКА </a:t>
+            </a:r>
+            <a:r>
+              <a:rPr lang="ru-RU" sz="2000" b="1" dirty="0" smtClean="0">
+                <a:solidFill>
+                  <a:srgbClr val="00ACC1"/>
+                </a:solidFill>
+              </a:rPr>
+              <a:t>ИНФОРМАЦИОННОЙ </a:t>
+            </a:r>
+            <a:r>
+              <a:rPr lang="en-US" sz="2000" b="1" dirty="0" smtClean="0">
+                <a:solidFill>
+                  <a:srgbClr val="00ACC1"/>
+                </a:solidFill>
+              </a:rPr>
+              <a:t>СИСТЕМЫ</a:t>
             </a:r>
             <a:endParaRPr lang="en-US" sz="2000" dirty="0"/>
           </a:p>
@@ -1746,12 +1584,28 @@
               <a:buNone/>
             </a:pPr>
             <a:r>
-              <a:rPr lang="en-US" sz="1400" dirty="0">
+              <a:rPr lang="en-US" sz="1400" dirty="0" err="1">
                 <a:solidFill>
                   <a:srgbClr val="000000"/>
                 </a:solidFill>
               </a:rPr>
-              <a:t>Руководитель: Маломан Юлия Сергеевна</a:t>
+              <a:t>Руководитель</a:t>
+            </a:r>
+            <a:r>
+              <a:rPr lang="en-US" sz="1400" dirty="0" smtClean="0">
+                <a:solidFill>
+                  <a:srgbClr val="000000"/>
+                </a:solidFill>
+              </a:rPr>
+              <a:t>: </a:t>
+            </a:r>
+            <a:r>
+              <a:rPr lang="ru-RU" sz="1400" dirty="0" smtClean="0">
+                <a:solidFill>
+                  <a:srgbClr val="000000"/>
+                </a:solidFill>
+              </a:rPr>
+              <a:t>Садовский Роман Викторович</a:t>
             </a:r>
             <a:endParaRPr lang="en-US" sz="1400" dirty="0"/>
           </a:p>
@@ -1787,7 +1641,23 @@
                   <a:srgbClr val="666666"/>
                 </a:solidFill>
               </a:rPr>
-              <a:t>Архангельск, 2025</a:t>
+              <a:t>Архангельск, </a:t>
+            </a:r>
+            <a:r>
+              <a:rPr lang="en-US" sz="1200" dirty="0" smtClean="0">
+                <a:solidFill>
+                  <a:srgbClr val="666666"/>
+                </a:solidFill>
+              </a:rPr>
+              <a:t>202</a:t>
+            </a:r>
+            <a:r>
+              <a:rPr lang="ru-RU" sz="1200" dirty="0" smtClean="0">
+                <a:solidFill>
+                  <a:srgbClr val="666666"/>
+                </a:solidFill>
+              </a:rPr>
+              <a:t>6</a:t>
             </a:r>
             <a:endParaRPr lang="en-US" sz="1200" dirty="0"/>
           </a:p>
@@ -1824,406 +1694,6 @@
         </p:spPr>
       </p:pic>
     </p:spTree>
-  </p:cSld>
-  <p:clrMapOvr>
-    <a:masterClrMapping/>
-  </p:clrMapOvr>
-</p:sld>
-</file>
-
-<file path=ppt/slides/slide10.xml><?xml version="1.0" encoding="utf-8"?>
-<p:sld xmlns:a="http://schemas.openxmlformats.org/drawingml/2006/main" xmlns:r="http://schemas.openxmlformats.org/officeDocument/2006/relationships" xmlns:p="http://schemas.openxmlformats.org/presentationml/2006/main">
-  <p:cSld>
-    <p:spTree>
-      <p:nvGrpSpPr>
-        <p:cNvPr id="1" name="">
-          <a:extLst>
-            <a:ext uri="{FF2B5EF4-FFF2-40B4-BE49-F238E27FC236}">
-              <a16:creationId xmlns:a16="http://schemas.microsoft.com/office/drawing/2014/main" id="{F875069C-4990-00E4-5198-CB599FA346EF}"/>
-            </a:ext>
-          </a:extLst>
-        </p:cNvPr>
-        <p:cNvGrpSpPr/>
-        <p:nvPr/>
-      </p:nvGrpSpPr>
-      <p:grpSpPr>
-        <a:xfrm>
-          <a:off x="0" y="0"/>
-          <a:ext cx="0" cy="0"/>
-          <a:chOff x="0" y="0"/>
-          <a:chExt cx="0" cy="0"/>
-        </a:xfrm>
-      </p:grpSpPr>
-      <p:sp>
-        <p:nvSpPr>
-          <p:cNvPr id="2" name="Text 0">
-            <a:extLst>
-              <a:ext uri="{FF2B5EF4-FFF2-40B4-BE49-F238E27FC236}">
-                <a16:creationId xmlns:a16="http://schemas.microsoft.com/office/drawing/2014/main" id="{39E77813-4F87-4A04-2CBB-FA5D70D14C8B}"/>
-              </a:ext>
-            </a:extLst>
-          </p:cNvPr>
-          <p:cNvSpPr/>
-          <p:nvPr/>
-        </p:nvSpPr>
-        <p:spPr>
-          <a:xfrm>
-            <a:off x="-914400" y="182880"/>
-            <a:ext cx="10972800" cy="1371600"/>
-          </a:xfrm>
-          <a:prstGeom prst="rect">
-            <a:avLst/>
-          </a:prstGeom>
-          <a:noFill/>
-          <a:ln/>
-        </p:spPr>
-        <p:txBody>
-          <a:bodyPr wrap="square" rtlCol="0" anchor="t"/>
-          <a:lstStyle/>
-          <a:p>
-            <a:pPr marL="0" indent="0" algn="ctr">
-              <a:buNone/>
-            </a:pPr>
-            <a:r>
-              <a:rPr lang="en-US" sz="1000" b="1" dirty="0">
-                <a:solidFill>
-                  <a:srgbClr val="000000"/>
-                </a:solidFill>
-              </a:rPr>
-              <a:t>ФЕДЕРАЛЬНОЕ ГОСУДАРСТВЕННОЕ БЮДЖЕТНОЕ ОБРАЗОВАТЕЛЬНОЕ</a:t>
-            </a:r>
-            <a:endParaRPr lang="en-US" sz="1000" dirty="0"/>
-          </a:p>
-          <a:p>
-            <a:pPr marL="0" indent="0" algn="ctr">
-              <a:buNone/>
-            </a:pPr>
-            <a:r>
-              <a:rPr lang="en-US" sz="1000" b="1" dirty="0">
-                <a:solidFill>
-                  <a:srgbClr val="000000"/>
-                </a:solidFill>
-              </a:rPr>
-              <a:t>УЧРЕЖДЕНИЕ ВЫСШЕГО ОБРАЗОВАНИЯ</a:t>
-            </a:r>
-            <a:endParaRPr lang="en-US" sz="1000" dirty="0"/>
-          </a:p>
-          <a:p>
-            <a:pPr marL="0" indent="0" algn="ctr">
-              <a:buNone/>
-            </a:pPr>
-            <a:r>
-              <a:rPr lang="en-US" sz="1000" b="1" dirty="0">
-                <a:solidFill>
-                  <a:srgbClr val="000000"/>
-                </a:solidFill>
-              </a:rPr>
-              <a:t>«САНКТ-ПЕТЕРБУРГСКИЙ ГОСУДАРСТВЕННЫЙ УНИВЕРСИТЕТ</a:t>
-            </a:r>
-            <a:endParaRPr lang="en-US" sz="1000" dirty="0"/>
-          </a:p>
-          <a:p>
-            <a:pPr marL="0" indent="0" algn="ctr">
-              <a:buNone/>
-            </a:pPr>
-            <a:r>
-              <a:rPr lang="en-US" sz="1000" b="1" dirty="0">
-                <a:solidFill>
-                  <a:srgbClr val="000000"/>
-                </a:solidFill>
-              </a:rPr>
-              <a:t>ТЕЛЕКОММУНИКАЦИЙ ИМ. ПРОФ. М.А. БОНЧ-БРУЕВИЧА»</a:t>
-            </a:r>
-            <a:endParaRPr lang="en-US" sz="1000" dirty="0"/>
-          </a:p>
-          <a:p>
-            <a:pPr marL="0" indent="0" algn="ctr">
-              <a:buNone/>
-            </a:pPr>
-            <a:r>
-              <a:rPr lang="en-US" sz="1000" b="1" dirty="0">
-                <a:solidFill>
-                  <a:srgbClr val="000000"/>
-                </a:solidFill>
-              </a:rPr>
-              <a:t>(СПбГУТ)</a:t>
-            </a:r>
-            <a:endParaRPr lang="en-US" sz="1000" dirty="0"/>
-          </a:p>
-          <a:p>
-            <a:pPr marL="0" indent="0" algn="ctr">
-              <a:buNone/>
-            </a:pPr>
-            <a:r>
-              <a:rPr lang="en-US" sz="1000" b="1" dirty="0">
-                <a:solidFill>
-                  <a:srgbClr val="000000"/>
-                </a:solidFill>
-              </a:rPr>
-              <a:t>АРХАНГЕЛЬСКИЙ КОЛЛЕДЖ ТЕЛЕКОММУНИКАЦИЙ</a:t>
-            </a:r>
-            <a:endParaRPr lang="en-US" sz="1000" dirty="0"/>
-          </a:p>
-          <a:p>
-            <a:pPr marL="0" indent="0" algn="ctr">
-              <a:buNone/>
-            </a:pPr>
-            <a:r>
-              <a:rPr lang="en-US" sz="1000" b="1" dirty="0">
-                <a:solidFill>
-                  <a:srgbClr val="000000"/>
-                </a:solidFill>
-              </a:rPr>
-              <a:t>ИМ. Б.Л. РОЗИНГА (ФИЛИАЛ) СПбГУТ</a:t>
-            </a:r>
-            <a:endParaRPr lang="en-US" sz="1000" dirty="0"/>
-          </a:p>
-          <a:p>
-            <a:pPr marL="0" indent="0" algn="ctr">
-              <a:buNone/>
-            </a:pPr>
-            <a:r>
-              <a:rPr lang="en-US" sz="1000" b="1" dirty="0">
-                <a:solidFill>
-                  <a:srgbClr val="000000"/>
-                </a:solidFill>
-              </a:rPr>
-              <a:t>(АКТ (ф) СПбГУТ)</a:t>
-            </a:r>
-            <a:endParaRPr lang="en-US" sz="1000" dirty="0"/>
-          </a:p>
-        </p:txBody>
-      </p:sp>
-      <p:sp>
-        <p:nvSpPr>
-          <p:cNvPr id="3" name="Text 1">
-            <a:extLst>
-              <a:ext uri="{FF2B5EF4-FFF2-40B4-BE49-F238E27FC236}">
-                <a16:creationId xmlns:a16="http://schemas.microsoft.com/office/drawing/2014/main" id="{D6A38A52-74FE-B69D-60BC-9B16779886E9}"/>
-              </a:ext>
-            </a:extLst>
-          </p:cNvPr>
-          <p:cNvSpPr/>
-          <p:nvPr/>
-        </p:nvSpPr>
-        <p:spPr>
-          <a:xfrm>
-            <a:off x="68400" y="1828800"/>
-            <a:ext cx="9144000" cy="457200"/>
-          </a:xfrm>
-          <a:prstGeom prst="rect">
-            <a:avLst/>
-          </a:prstGeom>
-          <a:noFill/>
-          <a:ln/>
-        </p:spPr>
-        <p:txBody>
-          <a:bodyPr wrap="square" rtlCol="0" anchor="ctr"/>
-          <a:lstStyle/>
-          <a:p>
-            <a:pPr marL="0" indent="0" algn="ctr">
-              <a:buNone/>
-            </a:pPr>
-            <a:r>
-              <a:rPr lang="en-US" sz="2400" b="1" dirty="0">
-                <a:solidFill>
-                  <a:srgbClr val="006064"/>
-                </a:solidFill>
-              </a:rPr>
-              <a:t>Курсовой проект</a:t>
-            </a:r>
-            <a:endParaRPr lang="en-US" sz="2400" dirty="0"/>
-          </a:p>
-        </p:txBody>
-      </p:sp>
-      <p:sp>
-        <p:nvSpPr>
-          <p:cNvPr id="4" name="Text 2">
-            <a:extLst>
-              <a:ext uri="{FF2B5EF4-FFF2-40B4-BE49-F238E27FC236}">
-                <a16:creationId xmlns:a16="http://schemas.microsoft.com/office/drawing/2014/main" id="{C112C1EE-56C8-0A28-A5EE-FAAAE077C3E8}"/>
-              </a:ext>
-            </a:extLst>
-          </p:cNvPr>
-          <p:cNvSpPr/>
-          <p:nvPr/>
-        </p:nvSpPr>
-        <p:spPr>
-          <a:xfrm>
-            <a:off x="-846000" y="2460960"/>
-            <a:ext cx="10972800" cy="914400"/>
-          </a:xfrm>
-          <a:prstGeom prst="rect">
-            <a:avLst/>
-          </a:prstGeom>
-          <a:noFill/>
-          <a:ln/>
-        </p:spPr>
-        <p:txBody>
-          <a:bodyPr wrap="square" rtlCol="0" anchor="ctr"/>
-          <a:lstStyle/>
-          <a:p>
-            <a:pPr marL="0" indent="0" algn="ctr">
-              <a:buNone/>
-            </a:pPr>
-            <a:r>
-              <a:rPr lang="en-US" sz="2000" b="1" dirty="0">
-                <a:solidFill>
-                  <a:srgbClr val="00ACC1"/>
-                </a:solidFill>
-              </a:rPr>
-              <a:t>РАЗРАБОТКА ПОДСИСТЕМЫ</a:t>
-            </a:r>
-            <a:endParaRPr lang="en-US" sz="2000" dirty="0"/>
-          </a:p>
-          <a:p>
-            <a:pPr marL="0" indent="0" algn="ctr">
-              <a:buNone/>
-            </a:pPr>
-            <a:r>
-              <a:rPr lang="en-US" sz="2000" b="1" dirty="0">
-                <a:solidFill>
-                  <a:srgbClr val="00ACC1"/>
-                </a:solidFill>
-              </a:rPr>
-              <a:t>АРХРЕЕСТР. ПОИСК НЕДВИЖИМОСТИ</a:t>
-            </a:r>
-            <a:endParaRPr lang="en-US" sz="2000" dirty="0"/>
-          </a:p>
-        </p:txBody>
-      </p:sp>
-      <p:sp>
-        <p:nvSpPr>
-          <p:cNvPr id="5" name="Text 3">
-            <a:extLst>
-              <a:ext uri="{FF2B5EF4-FFF2-40B4-BE49-F238E27FC236}">
-                <a16:creationId xmlns:a16="http://schemas.microsoft.com/office/drawing/2014/main" id="{621CE68C-3664-5B97-E1C7-2C32BD95858B}"/>
-              </a:ext>
-            </a:extLst>
-          </p:cNvPr>
-          <p:cNvSpPr/>
-          <p:nvPr/>
-        </p:nvSpPr>
-        <p:spPr>
-          <a:xfrm>
-            <a:off x="0" y="3463200"/>
-            <a:ext cx="9144000" cy="365760"/>
-          </a:xfrm>
-          <a:prstGeom prst="rect">
-            <a:avLst/>
-          </a:prstGeom>
-          <a:noFill/>
-          <a:ln/>
-        </p:spPr>
-        <p:txBody>
-          <a:bodyPr wrap="square" rtlCol="0" anchor="ctr"/>
-          <a:lstStyle/>
-          <a:p>
-            <a:pPr marL="0" indent="0" algn="ctr">
-              <a:buNone/>
-            </a:pPr>
-            <a:r>
-              <a:rPr lang="en-US" sz="1400" dirty="0">
-                <a:solidFill>
-                  <a:srgbClr val="000000"/>
-                </a:solidFill>
-              </a:rPr>
-              <a:t>Студент группы ИСПП-21: Маратканов Андрей Алексеевич</a:t>
-            </a:r>
-            <a:endParaRPr lang="en-US" sz="1400" dirty="0"/>
-          </a:p>
-        </p:txBody>
-      </p:sp>
-      <p:sp>
-        <p:nvSpPr>
-          <p:cNvPr id="6" name="Text 4">
-            <a:extLst>
-              <a:ext uri="{FF2B5EF4-FFF2-40B4-BE49-F238E27FC236}">
-                <a16:creationId xmlns:a16="http://schemas.microsoft.com/office/drawing/2014/main" id="{6CF65C25-1950-1E20-C8DA-D4E15BC48FBB}"/>
-              </a:ext>
-            </a:extLst>
-          </p:cNvPr>
-          <p:cNvSpPr/>
-          <p:nvPr/>
-        </p:nvSpPr>
-        <p:spPr>
-          <a:xfrm>
-            <a:off x="0" y="3916080"/>
-            <a:ext cx="9144000" cy="365760"/>
-          </a:xfrm>
-          <a:prstGeom prst="rect">
-            <a:avLst/>
-          </a:prstGeom>
-          <a:noFill/>
-          <a:ln/>
-        </p:spPr>
-        <p:txBody>
-          <a:bodyPr wrap="square" rtlCol="0" anchor="ctr"/>
-          <a:lstStyle/>
-          <a:p>
-            <a:pPr marL="0" indent="0" algn="ctr">
-              <a:buNone/>
-            </a:pPr>
-            <a:r>
-              <a:rPr lang="en-US" sz="1400" dirty="0">
-                <a:solidFill>
-                  <a:srgbClr val="000000"/>
-                </a:solidFill>
-              </a:rPr>
-              <a:t>Руководитель: Маломан Юлия Сергеевна</a:t>
-            </a:r>
-            <a:endParaRPr lang="en-US" sz="1400" dirty="0"/>
-          </a:p>
-        </p:txBody>
-      </p:sp>
-      <p:sp>
-        <p:nvSpPr>
-          <p:cNvPr id="7" name="Text 5">
-            <a:extLst>
-              <a:ext uri="{FF2B5EF4-FFF2-40B4-BE49-F238E27FC236}">
-                <a16:creationId xmlns:a16="http://schemas.microsoft.com/office/drawing/2014/main" id="{5CAE470F-D9EC-439D-EE8D-DA357B6374B8}"/>
-              </a:ext>
-            </a:extLst>
-          </p:cNvPr>
-          <p:cNvSpPr/>
-          <p:nvPr/>
-        </p:nvSpPr>
-        <p:spPr>
-          <a:xfrm>
-            <a:off x="0" y="4604400"/>
-            <a:ext cx="9144000" cy="274320"/>
-          </a:xfrm>
-          <a:prstGeom prst="rect">
-            <a:avLst/>
-          </a:prstGeom>
-          <a:noFill/>
-          <a:ln/>
-        </p:spPr>
-        <p:txBody>
-          <a:bodyPr wrap="square" rtlCol="0" anchor="ctr"/>
-          <a:lstStyle/>
-          <a:p>
-            <a:pPr marL="0" indent="0" algn="ctr">
-              <a:buNone/>
-            </a:pPr>
-            <a:r>
-              <a:rPr lang="en-US" sz="1200" dirty="0">
-                <a:solidFill>
-                  <a:srgbClr val="666666"/>
-                </a:solidFill>
-              </a:rPr>
-              <a:t>Архангельск, 2025</a:t>
-            </a:r>
-            <a:endParaRPr lang="en-US" sz="1200" dirty="0"/>
-          </a:p>
-        </p:txBody>
-      </p:sp>
-    </p:spTree>
-    <p:extLst>
-      <p:ext uri="{BB962C8B-B14F-4D97-AF65-F5344CB8AC3E}">
-        <p14:creationId xmlns:p14="http://schemas.microsoft.com/office/powerpoint/2010/main" val="1672933893"/>
-      </p:ext>
-    </p:extLst>
   </p:cSld>
   <p:clrMapOvr>
     <a:masterClrMapping/>
@@ -2342,12 +1812,20 @@
               <a:buNone/>
             </a:pPr>
             <a:r>
-              <a:rPr lang="en-US" sz="1400" dirty="0">
+              <a:rPr lang="en-US" sz="1400" dirty="0" smtClean="0">
                 <a:solidFill>
                   <a:srgbClr val="666666"/>
                 </a:solidFill>
               </a:rPr>
-              <a:t>1/8</a:t>
+              <a:t>1/</a:t>
+            </a:r>
+            <a:r>
+              <a:rPr lang="ru-RU" sz="1400" dirty="0" smtClean="0">
+                <a:solidFill>
+                  <a:srgbClr val="666666"/>
+                </a:solidFill>
+              </a:rPr>
+              <a:t>6</a:t>
             </a:r>
             <a:endParaRPr lang="en-US" sz="1400" dirty="0"/>
           </a:p>
@@ -2932,7 +2410,7 @@
               <a:prstDash val="solid"/>
               <a:extLst>
                 <a:ext uri="{C807C97D-BFC1-408E-A445-0C87EB9F89A2}">
-                  <ask:lineSketchStyleProps xmlns:ask="http://schemas.microsoft.com/office/drawing/2018/sketchyshapes" sd="1219033472">
+                  <ask:lineSketchStyleProps xmlns:ask="http://schemas.microsoft.com/office/drawing/2018/sketchyshapes" xmlns="" sd="1219033472">
                     <a:prstGeom prst="rect">
                       <a:avLst/>
                     </a:prstGeom>
@@ -3434,7 +2912,7 @@
             <a:prstDash val="solid"/>
             <a:extLst>
               <a:ext uri="{C807C97D-BFC1-408E-A445-0C87EB9F89A2}">
-                <ask:lineSketchStyleProps xmlns:ask="http://schemas.microsoft.com/office/drawing/2018/sketchyshapes" sd="1219033472">
+                <ask:lineSketchStyleProps xmlns:ask="http://schemas.microsoft.com/office/drawing/2018/sketchyshapes" xmlns="" sd="1219033472">
                   <a:prstGeom prst="rect">
                     <a:avLst/>
                   </a:prstGeom>
@@ -3897,7 +3375,7 @@
             <a:prstDash val="solid"/>
             <a:extLst>
               <a:ext uri="{C807C97D-BFC1-408E-A445-0C87EB9F89A2}">
-                <ask:lineSketchStyleProps xmlns:ask="http://schemas.microsoft.com/office/drawing/2018/sketchyshapes" sd="1219033472">
+                <ask:lineSketchStyleProps xmlns:ask="http://schemas.microsoft.com/office/drawing/2018/sketchyshapes" xmlns="" sd="1219033472">
                   <a:prstGeom prst="rect">
                     <a:avLst/>
                   </a:prstGeom>
@@ -4643,7 +4121,7 @@
               <a:prstDash val="solid"/>
               <a:extLst>
                 <a:ext uri="{C807C97D-BFC1-408E-A445-0C87EB9F89A2}">
-                  <ask:lineSketchStyleProps xmlns:ask="http://schemas.microsoft.com/office/drawing/2018/sketchyshapes" sd="1219033472">
+                  <ask:lineSketchStyleProps xmlns:ask="http://schemas.microsoft.com/office/drawing/2018/sketchyshapes" xmlns="" sd="1219033472">
                     <a:prstGeom prst="rect">
                       <a:avLst/>
                     </a:prstGeom>
@@ -4689,7 +4167,15 @@
               </a:pPr>
               <a:r>
                 <a:rPr lang="ru-RU" dirty="0"/>
-                <a:t>Разработать подсистему поиска недвижимости для «</a:t>
+                <a:t>Разработать </a:t>
+              </a:r>
+              <a:r>
+                <a:rPr lang="ru-RU" dirty="0" smtClean="0"/>
+                <a:t>информационную систему </a:t>
+              </a:r>
+              <a:r>
+                <a:rPr lang="ru-RU" dirty="0"/>
+                <a:t>поиска недвижимости для «</a:t>
               </a:r>
               <a:r>
                 <a:rPr lang="ru-RU" dirty="0" err="1"/>
@@ -4731,12 +4217,28 @@
               <a:buNone/>
             </a:pPr>
             <a:r>
-              <a:rPr lang="en-US" sz="1400" dirty="0">
+              <a:rPr lang="ru-RU" sz="1400" dirty="0">
                 <a:solidFill>
                   <a:srgbClr val="666666"/>
                 </a:solidFill>
               </a:rPr>
-              <a:t>3/8</a:t>
+              <a:t>2</a:t>
+            </a:r>
+            <a:r>
+              <a:rPr lang="en-US" sz="1400" dirty="0" smtClean="0">
+                <a:solidFill>
+                  <a:srgbClr val="666666"/>
+                </a:solidFill>
+              </a:rPr>
+              <a:t>/</a:t>
+            </a:r>
+            <a:r>
+              <a:rPr lang="ru-RU" sz="1400" dirty="0" smtClean="0">
+                <a:solidFill>
+                  <a:srgbClr val="666666"/>
+                </a:solidFill>
+              </a:rPr>
+              <a:t>6</a:t>
             </a:r>
             <a:endParaRPr lang="en-US" sz="1400" dirty="0"/>
           </a:p>
@@ -4781,2192 +4283,6 @@
 </file>
 
 <file path=ppt/slides/slide4.xml><?xml version="1.0" encoding="utf-8"?>
-<p:sld xmlns:a="http://schemas.openxmlformats.org/drawingml/2006/main" xmlns:r="http://schemas.openxmlformats.org/officeDocument/2006/relationships" xmlns:p="http://schemas.openxmlformats.org/presentationml/2006/main">
-  <p:cSld name="Slide 3">
-    <p:spTree>
-      <p:nvGrpSpPr>
-        <p:cNvPr id="1" name=""/>
-        <p:cNvGrpSpPr/>
-        <p:nvPr/>
-      </p:nvGrpSpPr>
-      <p:grpSpPr>
-        <a:xfrm>
-          <a:off x="0" y="0"/>
-          <a:ext cx="0" cy="0"/>
-          <a:chOff x="0" y="0"/>
-          <a:chExt cx="0" cy="0"/>
-        </a:xfrm>
-      </p:grpSpPr>
-      <p:sp>
-        <p:nvSpPr>
-          <p:cNvPr id="2" name="Text 0"/>
-          <p:cNvSpPr>
-            <a:spLocks noGrp="1" noRot="1" noMove="1" noResize="1" noEditPoints="1" noAdjustHandles="1" noChangeArrowheads="1" noChangeShapeType="1"/>
-          </p:cNvSpPr>
-          <p:nvPr/>
-        </p:nvSpPr>
-        <p:spPr>
-          <a:xfrm>
-            <a:off x="-914400" y="0"/>
-            <a:ext cx="10972800" cy="731520"/>
-          </a:xfrm>
-          <a:prstGeom prst="rect">
-            <a:avLst/>
-          </a:prstGeom>
-          <a:noFill/>
-          <a:ln/>
-        </p:spPr>
-        <p:txBody>
-          <a:bodyPr wrap="square" rtlCol="0" anchor="ctr"/>
-          <a:lstStyle/>
-          <a:p>
-            <a:pPr marL="0" indent="0" algn="ctr">
-              <a:buNone/>
-            </a:pPr>
-            <a:r>
-              <a:rPr lang="en-US" sz="3600" b="1" dirty="0">
-                <a:solidFill>
-                  <a:srgbClr val="006064"/>
-                </a:solidFill>
-              </a:rPr>
-              <a:t>Целевая аудитория</a:t>
-            </a:r>
-            <a:endParaRPr lang="en-US" sz="3600" dirty="0"/>
-          </a:p>
-        </p:txBody>
-      </p:sp>
-      <p:grpSp>
-        <p:nvGrpSpPr>
-          <p:cNvPr id="15" name="Группа 14">
-            <a:extLst>
-              <a:ext uri="{FF2B5EF4-FFF2-40B4-BE49-F238E27FC236}">
-                <a16:creationId xmlns:a16="http://schemas.microsoft.com/office/drawing/2014/main" id="{09DA52D2-A434-BDF2-1A80-85A2458C5C86}"/>
-              </a:ext>
-            </a:extLst>
-          </p:cNvPr>
-          <p:cNvGrpSpPr/>
-          <p:nvPr/>
-        </p:nvGrpSpPr>
-        <p:grpSpPr>
-          <a:xfrm>
-            <a:off x="1249680" y="822960"/>
-            <a:ext cx="6644640" cy="1005840"/>
-            <a:chOff x="0" y="822960"/>
-            <a:chExt cx="9144000" cy="1188720"/>
-          </a:xfrm>
-          <a:gradFill flip="none" rotWithShape="1">
-            <a:gsLst>
-              <a:gs pos="0">
-                <a:schemeClr val="accent1">
-                  <a:lumMod val="5000"/>
-                  <a:lumOff val="95000"/>
-                </a:schemeClr>
-              </a:gs>
-              <a:gs pos="74000">
-                <a:srgbClr val="E9F9FB"/>
-              </a:gs>
-              <a:gs pos="83000">
-                <a:srgbClr val="E9F9FB"/>
-              </a:gs>
-              <a:gs pos="100000">
-                <a:srgbClr val="E9F9FB"/>
-              </a:gs>
-            </a:gsLst>
-            <a:lin ang="2700000" scaled="1"/>
-            <a:tileRect/>
-          </a:gradFill>
-        </p:grpSpPr>
-        <p:sp>
-          <p:nvSpPr>
-            <p:cNvPr id="3" name="Shape 1"/>
-            <p:cNvSpPr/>
-            <p:nvPr/>
-          </p:nvSpPr>
-          <p:spPr>
-            <a:xfrm>
-              <a:off x="0" y="822960"/>
-              <a:ext cx="9144000" cy="1188720"/>
-            </a:xfrm>
-            <a:custGeom>
-              <a:avLst/>
-              <a:gdLst>
-                <a:gd name="connsiteX0" fmla="*/ 0 w 9144000"/>
-                <a:gd name="connsiteY0" fmla="*/ 0 h 1188720"/>
-                <a:gd name="connsiteX1" fmla="*/ 744583 w 9144000"/>
-                <a:gd name="connsiteY1" fmla="*/ 0 h 1188720"/>
-                <a:gd name="connsiteX2" fmla="*/ 1580606 w 9144000"/>
-                <a:gd name="connsiteY2" fmla="*/ 0 h 1188720"/>
-                <a:gd name="connsiteX3" fmla="*/ 2050869 w 9144000"/>
-                <a:gd name="connsiteY3" fmla="*/ 0 h 1188720"/>
-                <a:gd name="connsiteX4" fmla="*/ 2795451 w 9144000"/>
-                <a:gd name="connsiteY4" fmla="*/ 0 h 1188720"/>
-                <a:gd name="connsiteX5" fmla="*/ 3265714 w 9144000"/>
-                <a:gd name="connsiteY5" fmla="*/ 0 h 1188720"/>
-                <a:gd name="connsiteX6" fmla="*/ 3918857 w 9144000"/>
-                <a:gd name="connsiteY6" fmla="*/ 0 h 1188720"/>
-                <a:gd name="connsiteX7" fmla="*/ 4663440 w 9144000"/>
-                <a:gd name="connsiteY7" fmla="*/ 0 h 1188720"/>
-                <a:gd name="connsiteX8" fmla="*/ 5042263 w 9144000"/>
-                <a:gd name="connsiteY8" fmla="*/ 0 h 1188720"/>
-                <a:gd name="connsiteX9" fmla="*/ 5421086 w 9144000"/>
-                <a:gd name="connsiteY9" fmla="*/ 0 h 1188720"/>
-                <a:gd name="connsiteX10" fmla="*/ 6257109 w 9144000"/>
-                <a:gd name="connsiteY10" fmla="*/ 0 h 1188720"/>
-                <a:gd name="connsiteX11" fmla="*/ 6910251 w 9144000"/>
-                <a:gd name="connsiteY11" fmla="*/ 0 h 1188720"/>
-                <a:gd name="connsiteX12" fmla="*/ 7289074 w 9144000"/>
-                <a:gd name="connsiteY12" fmla="*/ 0 h 1188720"/>
-                <a:gd name="connsiteX13" fmla="*/ 7942217 w 9144000"/>
-                <a:gd name="connsiteY13" fmla="*/ 0 h 1188720"/>
-                <a:gd name="connsiteX14" fmla="*/ 9144000 w 9144000"/>
-                <a:gd name="connsiteY14" fmla="*/ 0 h 1188720"/>
-                <a:gd name="connsiteX15" fmla="*/ 9144000 w 9144000"/>
-                <a:gd name="connsiteY15" fmla="*/ 582473 h 1188720"/>
-                <a:gd name="connsiteX16" fmla="*/ 9144000 w 9144000"/>
-                <a:gd name="connsiteY16" fmla="*/ 1188720 h 1188720"/>
-                <a:gd name="connsiteX17" fmla="*/ 8765177 w 9144000"/>
-                <a:gd name="connsiteY17" fmla="*/ 1188720 h 1188720"/>
-                <a:gd name="connsiteX18" fmla="*/ 7929154 w 9144000"/>
-                <a:gd name="connsiteY18" fmla="*/ 1188720 h 1188720"/>
-                <a:gd name="connsiteX19" fmla="*/ 7184571 w 9144000"/>
-                <a:gd name="connsiteY19" fmla="*/ 1188720 h 1188720"/>
-                <a:gd name="connsiteX20" fmla="*/ 6439989 w 9144000"/>
-                <a:gd name="connsiteY20" fmla="*/ 1188720 h 1188720"/>
-                <a:gd name="connsiteX21" fmla="*/ 5695406 w 9144000"/>
-                <a:gd name="connsiteY21" fmla="*/ 1188720 h 1188720"/>
-                <a:gd name="connsiteX22" fmla="*/ 5225143 w 9144000"/>
-                <a:gd name="connsiteY22" fmla="*/ 1188720 h 1188720"/>
-                <a:gd name="connsiteX23" fmla="*/ 4389120 w 9144000"/>
-                <a:gd name="connsiteY23" fmla="*/ 1188720 h 1188720"/>
-                <a:gd name="connsiteX24" fmla="*/ 3735977 w 9144000"/>
-                <a:gd name="connsiteY24" fmla="*/ 1188720 h 1188720"/>
-                <a:gd name="connsiteX25" fmla="*/ 3357154 w 9144000"/>
-                <a:gd name="connsiteY25" fmla="*/ 1188720 h 1188720"/>
-                <a:gd name="connsiteX26" fmla="*/ 2704011 w 9144000"/>
-                <a:gd name="connsiteY26" fmla="*/ 1188720 h 1188720"/>
-                <a:gd name="connsiteX27" fmla="*/ 2142309 w 9144000"/>
-                <a:gd name="connsiteY27" fmla="*/ 1188720 h 1188720"/>
-                <a:gd name="connsiteX28" fmla="*/ 1580606 w 9144000"/>
-                <a:gd name="connsiteY28" fmla="*/ 1188720 h 1188720"/>
-                <a:gd name="connsiteX29" fmla="*/ 1018903 w 9144000"/>
-                <a:gd name="connsiteY29" fmla="*/ 1188720 h 1188720"/>
-                <a:gd name="connsiteX30" fmla="*/ 0 w 9144000"/>
-                <a:gd name="connsiteY30" fmla="*/ 1188720 h 1188720"/>
-                <a:gd name="connsiteX31" fmla="*/ 0 w 9144000"/>
-                <a:gd name="connsiteY31" fmla="*/ 582473 h 1188720"/>
-                <a:gd name="connsiteX32" fmla="*/ 0 w 9144000"/>
-                <a:gd name="connsiteY32" fmla="*/ 0 h 1188720"/>
-              </a:gdLst>
-              <a:ahLst/>
-              <a:cxnLst>
-                <a:cxn ang="0">
-                  <a:pos x="connsiteX0" y="connsiteY0"/>
-                </a:cxn>
-                <a:cxn ang="0">
-                  <a:pos x="connsiteX1" y="connsiteY1"/>
-                </a:cxn>
-                <a:cxn ang="0">
-                  <a:pos x="connsiteX2" y="connsiteY2"/>
-                </a:cxn>
-                <a:cxn ang="0">
-                  <a:pos x="connsiteX3" y="connsiteY3"/>
-                </a:cxn>
-                <a:cxn ang="0">
-                  <a:pos x="connsiteX4" y="connsiteY4"/>
-                </a:cxn>
-                <a:cxn ang="0">
-                  <a:pos x="connsiteX5" y="connsiteY5"/>
-                </a:cxn>
-                <a:cxn ang="0">
-                  <a:pos x="connsiteX6" y="connsiteY6"/>
-                </a:cxn>
-                <a:cxn ang="0">
-                  <a:pos x="connsiteX7" y="connsiteY7"/>
-                </a:cxn>
-                <a:cxn ang="0">
-                  <a:pos x="connsiteX8" y="connsiteY8"/>
-                </a:cxn>
-                <a:cxn ang="0">
-                  <a:pos x="connsiteX9" y="connsiteY9"/>
-                </a:cxn>
-                <a:cxn ang="0">
-                  <a:pos x="connsiteX10" y="connsiteY10"/>
-                </a:cxn>
-                <a:cxn ang="0">
-                  <a:pos x="connsiteX11" y="connsiteY11"/>
-                </a:cxn>
-                <a:cxn ang="0">
-                  <a:pos x="connsiteX12" y="connsiteY12"/>
-                </a:cxn>
-                <a:cxn ang="0">
-                  <a:pos x="connsiteX13" y="connsiteY13"/>
-                </a:cxn>
-                <a:cxn ang="0">
-                  <a:pos x="connsiteX14" y="connsiteY14"/>
-                </a:cxn>
-                <a:cxn ang="0">
-                  <a:pos x="connsiteX15" y="connsiteY15"/>
-                </a:cxn>
-                <a:cxn ang="0">
-                  <a:pos x="connsiteX16" y="connsiteY16"/>
-                </a:cxn>
-                <a:cxn ang="0">
-                  <a:pos x="connsiteX17" y="connsiteY17"/>
-                </a:cxn>
-                <a:cxn ang="0">
-                  <a:pos x="connsiteX18" y="connsiteY18"/>
-                </a:cxn>
-                <a:cxn ang="0">
-                  <a:pos x="connsiteX19" y="connsiteY19"/>
-                </a:cxn>
-                <a:cxn ang="0">
-                  <a:pos x="connsiteX20" y="connsiteY20"/>
-                </a:cxn>
-                <a:cxn ang="0">
-                  <a:pos x="connsiteX21" y="connsiteY21"/>
-                </a:cxn>
-                <a:cxn ang="0">
-                  <a:pos x="connsiteX22" y="connsiteY22"/>
-                </a:cxn>
-                <a:cxn ang="0">
-                  <a:pos x="connsiteX23" y="connsiteY23"/>
-                </a:cxn>
-                <a:cxn ang="0">
-                  <a:pos x="connsiteX24" y="connsiteY24"/>
-                </a:cxn>
-                <a:cxn ang="0">
-                  <a:pos x="connsiteX25" y="connsiteY25"/>
-                </a:cxn>
-                <a:cxn ang="0">
-                  <a:pos x="connsiteX26" y="connsiteY26"/>
-                </a:cxn>
-                <a:cxn ang="0">
-                  <a:pos x="connsiteX27" y="connsiteY27"/>
-                </a:cxn>
-                <a:cxn ang="0">
-                  <a:pos x="connsiteX28" y="connsiteY28"/>
-                </a:cxn>
-                <a:cxn ang="0">
-                  <a:pos x="connsiteX29" y="connsiteY29"/>
-                </a:cxn>
-                <a:cxn ang="0">
-                  <a:pos x="connsiteX30" y="connsiteY30"/>
-                </a:cxn>
-                <a:cxn ang="0">
-                  <a:pos x="connsiteX31" y="connsiteY31"/>
-                </a:cxn>
-                <a:cxn ang="0">
-                  <a:pos x="connsiteX32" y="connsiteY32"/>
-                </a:cxn>
-              </a:cxnLst>
-              <a:rect l="l" t="t" r="r" b="b"/>
-              <a:pathLst>
-                <a:path w="9144000" h="1188720" fill="none" extrusionOk="0">
-                  <a:moveTo>
-                    <a:pt x="0" y="0"/>
-                  </a:moveTo>
-                  <a:cubicBezTo>
-                    <a:pt x="262395" y="35323"/>
-                    <a:pt x="382833" y="-13091"/>
-                    <a:pt x="744583" y="0"/>
-                  </a:cubicBezTo>
-                  <a:cubicBezTo>
-                    <a:pt x="1106333" y="13091"/>
-                    <a:pt x="1231879" y="14118"/>
-                    <a:pt x="1580606" y="0"/>
-                  </a:cubicBezTo>
-                  <a:cubicBezTo>
-                    <a:pt x="1929333" y="-14118"/>
-                    <a:pt x="1903382" y="-18911"/>
-                    <a:pt x="2050869" y="0"/>
-                  </a:cubicBezTo>
-                  <a:cubicBezTo>
-                    <a:pt x="2198356" y="18911"/>
-                    <a:pt x="2566448" y="13634"/>
-                    <a:pt x="2795451" y="0"/>
-                  </a:cubicBezTo>
-                  <a:cubicBezTo>
-                    <a:pt x="3024454" y="-13634"/>
-                    <a:pt x="3038784" y="21107"/>
-                    <a:pt x="3265714" y="0"/>
-                  </a:cubicBezTo>
-                  <a:cubicBezTo>
-                    <a:pt x="3492644" y="-21107"/>
-                    <a:pt x="3767452" y="-25774"/>
-                    <a:pt x="3918857" y="0"/>
-                  </a:cubicBezTo>
-                  <a:cubicBezTo>
-                    <a:pt x="4070262" y="25774"/>
-                    <a:pt x="4397538" y="-27905"/>
-                    <a:pt x="4663440" y="0"/>
-                  </a:cubicBezTo>
-                  <a:cubicBezTo>
-                    <a:pt x="4929342" y="27905"/>
-                    <a:pt x="4860320" y="3204"/>
-                    <a:pt x="5042263" y="0"/>
-                  </a:cubicBezTo>
-                  <a:cubicBezTo>
-                    <a:pt x="5224206" y="-3204"/>
-                    <a:pt x="5318848" y="-5061"/>
-                    <a:pt x="5421086" y="0"/>
-                  </a:cubicBezTo>
-                  <a:cubicBezTo>
-                    <a:pt x="5523324" y="5061"/>
-                    <a:pt x="5858063" y="-5431"/>
-                    <a:pt x="6257109" y="0"/>
-                  </a:cubicBezTo>
-                  <a:cubicBezTo>
-                    <a:pt x="6656155" y="5431"/>
-                    <a:pt x="6696681" y="-5805"/>
-                    <a:pt x="6910251" y="0"/>
-                  </a:cubicBezTo>
-                  <a:cubicBezTo>
-                    <a:pt x="7123821" y="5805"/>
-                    <a:pt x="7174362" y="16437"/>
-                    <a:pt x="7289074" y="0"/>
-                  </a:cubicBezTo>
-                  <a:cubicBezTo>
-                    <a:pt x="7403786" y="-16437"/>
-                    <a:pt x="7716966" y="8318"/>
-                    <a:pt x="7942217" y="0"/>
-                  </a:cubicBezTo>
-                  <a:cubicBezTo>
-                    <a:pt x="8167468" y="-8318"/>
-                    <a:pt x="8753983" y="-41292"/>
-                    <a:pt x="9144000" y="0"/>
-                  </a:cubicBezTo>
-                  <a:cubicBezTo>
-                    <a:pt x="9161824" y="277933"/>
-                    <a:pt x="9132307" y="440554"/>
-                    <a:pt x="9144000" y="582473"/>
-                  </a:cubicBezTo>
-                  <a:cubicBezTo>
-                    <a:pt x="9155693" y="724392"/>
-                    <a:pt x="9144504" y="1032333"/>
-                    <a:pt x="9144000" y="1188720"/>
-                  </a:cubicBezTo>
-                  <a:cubicBezTo>
-                    <a:pt x="8988970" y="1199020"/>
-                    <a:pt x="8866044" y="1195548"/>
-                    <a:pt x="8765177" y="1188720"/>
-                  </a:cubicBezTo>
-                  <a:cubicBezTo>
-                    <a:pt x="8664310" y="1181892"/>
-                    <a:pt x="8307230" y="1228341"/>
-                    <a:pt x="7929154" y="1188720"/>
-                  </a:cubicBezTo>
-                  <a:cubicBezTo>
-                    <a:pt x="7551078" y="1149099"/>
-                    <a:pt x="7499748" y="1178759"/>
-                    <a:pt x="7184571" y="1188720"/>
-                  </a:cubicBezTo>
-                  <a:cubicBezTo>
-                    <a:pt x="6869394" y="1198681"/>
-                    <a:pt x="6636692" y="1169648"/>
-                    <a:pt x="6439989" y="1188720"/>
-                  </a:cubicBezTo>
-                  <a:cubicBezTo>
-                    <a:pt x="6243286" y="1207792"/>
-                    <a:pt x="5997961" y="1199494"/>
-                    <a:pt x="5695406" y="1188720"/>
-                  </a:cubicBezTo>
-                  <a:cubicBezTo>
-                    <a:pt x="5392851" y="1177946"/>
-                    <a:pt x="5342275" y="1201228"/>
-                    <a:pt x="5225143" y="1188720"/>
-                  </a:cubicBezTo>
-                  <a:cubicBezTo>
-                    <a:pt x="5108011" y="1176212"/>
-                    <a:pt x="4779838" y="1151330"/>
-                    <a:pt x="4389120" y="1188720"/>
-                  </a:cubicBezTo>
-                  <a:cubicBezTo>
-                    <a:pt x="3998402" y="1226110"/>
-                    <a:pt x="3962958" y="1213539"/>
-                    <a:pt x="3735977" y="1188720"/>
-                  </a:cubicBezTo>
-                  <a:cubicBezTo>
-                    <a:pt x="3508996" y="1163901"/>
-                    <a:pt x="3439339" y="1197704"/>
-                    <a:pt x="3357154" y="1188720"/>
-                  </a:cubicBezTo>
-                  <a:cubicBezTo>
-                    <a:pt x="3274969" y="1179736"/>
-                    <a:pt x="2881294" y="1205973"/>
-                    <a:pt x="2704011" y="1188720"/>
-                  </a:cubicBezTo>
-                  <a:cubicBezTo>
-                    <a:pt x="2526728" y="1171467"/>
-                    <a:pt x="2311240" y="1175527"/>
-                    <a:pt x="2142309" y="1188720"/>
-                  </a:cubicBezTo>
-                  <a:cubicBezTo>
-                    <a:pt x="1973378" y="1201913"/>
-                    <a:pt x="1820108" y="1165033"/>
-                    <a:pt x="1580606" y="1188720"/>
-                  </a:cubicBezTo>
-                  <a:cubicBezTo>
-                    <a:pt x="1341104" y="1212407"/>
-                    <a:pt x="1159507" y="1176609"/>
-                    <a:pt x="1018903" y="1188720"/>
-                  </a:cubicBezTo>
-                  <a:cubicBezTo>
-                    <a:pt x="878299" y="1200831"/>
-                    <a:pt x="259087" y="1233092"/>
-                    <a:pt x="0" y="1188720"/>
-                  </a:cubicBezTo>
-                  <a:cubicBezTo>
-                    <a:pt x="16745" y="957713"/>
-                    <a:pt x="9790" y="875333"/>
-                    <a:pt x="0" y="582473"/>
-                  </a:cubicBezTo>
-                  <a:cubicBezTo>
-                    <a:pt x="-9790" y="289613"/>
-                    <a:pt x="9950" y="281803"/>
-                    <a:pt x="0" y="0"/>
-                  </a:cubicBezTo>
-                  <a:close/>
-                </a:path>
-                <a:path w="9144000" h="1188720" stroke="0" extrusionOk="0">
-                  <a:moveTo>
-                    <a:pt x="0" y="0"/>
-                  </a:moveTo>
-                  <a:cubicBezTo>
-                    <a:pt x="198878" y="-10557"/>
-                    <a:pt x="407088" y="-8082"/>
-                    <a:pt x="561703" y="0"/>
-                  </a:cubicBezTo>
-                  <a:cubicBezTo>
-                    <a:pt x="716318" y="8082"/>
-                    <a:pt x="835202" y="-18772"/>
-                    <a:pt x="940526" y="0"/>
-                  </a:cubicBezTo>
-                  <a:cubicBezTo>
-                    <a:pt x="1045850" y="18772"/>
-                    <a:pt x="1393324" y="-3579"/>
-                    <a:pt x="1776549" y="0"/>
-                  </a:cubicBezTo>
-                  <a:cubicBezTo>
-                    <a:pt x="2159774" y="3579"/>
-                    <a:pt x="2190081" y="-10610"/>
-                    <a:pt x="2338251" y="0"/>
-                  </a:cubicBezTo>
-                  <a:cubicBezTo>
-                    <a:pt x="2486421" y="10610"/>
-                    <a:pt x="2645997" y="17984"/>
-                    <a:pt x="2899954" y="0"/>
-                  </a:cubicBezTo>
-                  <a:cubicBezTo>
-                    <a:pt x="3153911" y="-17984"/>
-                    <a:pt x="3493774" y="11651"/>
-                    <a:pt x="3735977" y="0"/>
-                  </a:cubicBezTo>
-                  <a:cubicBezTo>
-                    <a:pt x="3978180" y="-11651"/>
-                    <a:pt x="4089476" y="16082"/>
-                    <a:pt x="4206240" y="0"/>
-                  </a:cubicBezTo>
-                  <a:cubicBezTo>
-                    <a:pt x="4323004" y="-16082"/>
-                    <a:pt x="4870551" y="33406"/>
-                    <a:pt x="5042263" y="0"/>
-                  </a:cubicBezTo>
-                  <a:cubicBezTo>
-                    <a:pt x="5213975" y="-33406"/>
-                    <a:pt x="5518384" y="-39039"/>
-                    <a:pt x="5878286" y="0"/>
-                  </a:cubicBezTo>
-                  <a:cubicBezTo>
-                    <a:pt x="6238188" y="39039"/>
-                    <a:pt x="6358789" y="24913"/>
-                    <a:pt x="6531429" y="0"/>
-                  </a:cubicBezTo>
-                  <a:cubicBezTo>
-                    <a:pt x="6704069" y="-24913"/>
-                    <a:pt x="7047419" y="-5128"/>
-                    <a:pt x="7367451" y="0"/>
-                  </a:cubicBezTo>
-                  <a:cubicBezTo>
-                    <a:pt x="7687483" y="5128"/>
-                    <a:pt x="7814430" y="-16092"/>
-                    <a:pt x="7929154" y="0"/>
-                  </a:cubicBezTo>
-                  <a:cubicBezTo>
-                    <a:pt x="8043878" y="16092"/>
-                    <a:pt x="8250575" y="-17929"/>
-                    <a:pt x="8490857" y="0"/>
-                  </a:cubicBezTo>
-                  <a:cubicBezTo>
-                    <a:pt x="8731139" y="17929"/>
-                    <a:pt x="8898894" y="-15257"/>
-                    <a:pt x="9144000" y="0"/>
-                  </a:cubicBezTo>
-                  <a:cubicBezTo>
-                    <a:pt x="9172675" y="204553"/>
-                    <a:pt x="9139152" y="453158"/>
-                    <a:pt x="9144000" y="582473"/>
-                  </a:cubicBezTo>
-                  <a:cubicBezTo>
-                    <a:pt x="9148848" y="711788"/>
-                    <a:pt x="9166558" y="947698"/>
-                    <a:pt x="9144000" y="1188720"/>
-                  </a:cubicBezTo>
-                  <a:cubicBezTo>
-                    <a:pt x="8945849" y="1190520"/>
-                    <a:pt x="8642473" y="1190710"/>
-                    <a:pt x="8399417" y="1188720"/>
-                  </a:cubicBezTo>
-                  <a:cubicBezTo>
-                    <a:pt x="8156361" y="1186730"/>
-                    <a:pt x="8000910" y="1169017"/>
-                    <a:pt x="7746274" y="1188720"/>
-                  </a:cubicBezTo>
-                  <a:cubicBezTo>
-                    <a:pt x="7491638" y="1208423"/>
-                    <a:pt x="7539137" y="1194736"/>
-                    <a:pt x="7367451" y="1188720"/>
-                  </a:cubicBezTo>
-                  <a:cubicBezTo>
-                    <a:pt x="7195765" y="1182704"/>
-                    <a:pt x="7103813" y="1171890"/>
-                    <a:pt x="6897189" y="1188720"/>
-                  </a:cubicBezTo>
-                  <a:cubicBezTo>
-                    <a:pt x="6690565" y="1205550"/>
-                    <a:pt x="6424425" y="1208132"/>
-                    <a:pt x="6061166" y="1188720"/>
-                  </a:cubicBezTo>
-                  <a:cubicBezTo>
-                    <a:pt x="5697907" y="1169308"/>
-                    <a:pt x="5680290" y="1192972"/>
-                    <a:pt x="5408023" y="1188720"/>
-                  </a:cubicBezTo>
-                  <a:cubicBezTo>
-                    <a:pt x="5135756" y="1184468"/>
-                    <a:pt x="5104702" y="1171322"/>
-                    <a:pt x="4937760" y="1188720"/>
-                  </a:cubicBezTo>
-                  <a:cubicBezTo>
-                    <a:pt x="4770818" y="1206118"/>
-                    <a:pt x="4524353" y="1187182"/>
-                    <a:pt x="4284617" y="1188720"/>
-                  </a:cubicBezTo>
-                  <a:cubicBezTo>
-                    <a:pt x="4044881" y="1190258"/>
-                    <a:pt x="4062748" y="1207211"/>
-                    <a:pt x="3905794" y="1188720"/>
-                  </a:cubicBezTo>
-                  <a:cubicBezTo>
-                    <a:pt x="3748840" y="1170229"/>
-                    <a:pt x="3669854" y="1179105"/>
-                    <a:pt x="3526971" y="1188720"/>
-                  </a:cubicBezTo>
-                  <a:cubicBezTo>
-                    <a:pt x="3384088" y="1198335"/>
-                    <a:pt x="3195773" y="1164236"/>
-                    <a:pt x="2873829" y="1188720"/>
-                  </a:cubicBezTo>
-                  <a:cubicBezTo>
-                    <a:pt x="2551885" y="1213204"/>
-                    <a:pt x="2520987" y="1175002"/>
-                    <a:pt x="2403566" y="1188720"/>
-                  </a:cubicBezTo>
-                  <a:cubicBezTo>
-                    <a:pt x="2286145" y="1202438"/>
-                    <a:pt x="1914274" y="1163139"/>
-                    <a:pt x="1658983" y="1188720"/>
-                  </a:cubicBezTo>
-                  <a:cubicBezTo>
-                    <a:pt x="1403692" y="1214301"/>
-                    <a:pt x="1353305" y="1174520"/>
-                    <a:pt x="1188720" y="1188720"/>
-                  </a:cubicBezTo>
-                  <a:cubicBezTo>
-                    <a:pt x="1024135" y="1202920"/>
-                    <a:pt x="516889" y="1247526"/>
-                    <a:pt x="0" y="1188720"/>
-                  </a:cubicBezTo>
-                  <a:cubicBezTo>
-                    <a:pt x="13816" y="962603"/>
-                    <a:pt x="-13026" y="760994"/>
-                    <a:pt x="0" y="630022"/>
-                  </a:cubicBezTo>
-                  <a:cubicBezTo>
-                    <a:pt x="13026" y="499050"/>
-                    <a:pt x="22708" y="183063"/>
-                    <a:pt x="0" y="0"/>
-                  </a:cubicBezTo>
-                  <a:close/>
-                </a:path>
-              </a:pathLst>
-            </a:custGeom>
-            <a:grpFill/>
-            <a:ln w="25400">
-              <a:solidFill>
-                <a:srgbClr val="00ACC1"/>
-              </a:solidFill>
-              <a:prstDash val="solid"/>
-              <a:extLst>
-                <a:ext uri="{C807C97D-BFC1-408E-A445-0C87EB9F89A2}">
-                  <ask:lineSketchStyleProps xmlns:ask="http://schemas.microsoft.com/office/drawing/2018/sketchyshapes" sd="1219033472">
-                    <a:prstGeom prst="rect">
-                      <a:avLst/>
-                    </a:prstGeom>
-                    <ask:type>
-                      <ask:lineSketchFreehand/>
-                    </ask:type>
-                  </ask:lineSketchStyleProps>
-                </a:ext>
-              </a:extLst>
-            </a:ln>
-          </p:spPr>
-          <p:txBody>
-            <a:bodyPr/>
-            <a:lstStyle/>
-            <a:p>
-              <a:endParaRPr lang="ru-RU" sz="2400" dirty="0"/>
-            </a:p>
-          </p:txBody>
-        </p:sp>
-        <p:sp>
-          <p:nvSpPr>
-            <p:cNvPr id="4" name="Text 2"/>
-            <p:cNvSpPr/>
-            <p:nvPr/>
-          </p:nvSpPr>
-          <p:spPr>
-            <a:xfrm>
-              <a:off x="665806" y="1005840"/>
-              <a:ext cx="8324396" cy="365760"/>
-            </a:xfrm>
-            <a:prstGeom prst="rect">
-              <a:avLst/>
-            </a:prstGeom>
-            <a:grpFill/>
-            <a:ln/>
-          </p:spPr>
-          <p:txBody>
-            <a:bodyPr wrap="square" rtlCol="0" anchor="ctr"/>
-            <a:lstStyle/>
-            <a:p>
-              <a:pPr marL="0" indent="0">
-                <a:buNone/>
-              </a:pPr>
-              <a:r>
-                <a:rPr lang="en-US" sz="2000" b="1" dirty="0" err="1">
-                  <a:solidFill>
-                    <a:srgbClr val="006064"/>
-                  </a:solidFill>
-                </a:rPr>
-                <a:t>Потенциальные</a:t>
-              </a:r>
-              <a:r>
-                <a:rPr lang="en-US" sz="2000" b="1" dirty="0">
-                  <a:solidFill>
-                    <a:srgbClr val="006064"/>
-                  </a:solidFill>
-                </a:rPr>
-                <a:t> </a:t>
-              </a:r>
-              <a:r>
-                <a:rPr lang="en-US" sz="2000" b="1" dirty="0" err="1">
-                  <a:solidFill>
-                    <a:srgbClr val="006064"/>
-                  </a:solidFill>
-                </a:rPr>
-                <a:t>покупатели</a:t>
-              </a:r>
-              <a:r>
-                <a:rPr lang="en-US" sz="2000" b="1" dirty="0">
-                  <a:solidFill>
-                    <a:srgbClr val="006064"/>
-                  </a:solidFill>
-                </a:rPr>
-                <a:t> жилья</a:t>
-              </a:r>
-              <a:endParaRPr lang="en-US" sz="2000" dirty="0"/>
-            </a:p>
-          </p:txBody>
-        </p:sp>
-        <p:sp>
-          <p:nvSpPr>
-            <p:cNvPr id="5" name="Text 3"/>
-            <p:cNvSpPr/>
-            <p:nvPr/>
-          </p:nvSpPr>
-          <p:spPr>
-            <a:xfrm>
-              <a:off x="274320" y="1463040"/>
-              <a:ext cx="8595360" cy="365760"/>
-            </a:xfrm>
-            <a:prstGeom prst="rect">
-              <a:avLst/>
-            </a:prstGeom>
-            <a:grpFill/>
-            <a:ln/>
-          </p:spPr>
-          <p:txBody>
-            <a:bodyPr wrap="square" rtlCol="0" anchor="ctr"/>
-            <a:lstStyle/>
-            <a:p>
-              <a:pPr marL="0" indent="0">
-                <a:buNone/>
-              </a:pPr>
-              <a:r>
-                <a:rPr lang="ru-RU" sz="1600" dirty="0"/>
-                <a:t>Нуждаются в быстром поиске актуальных предложений по районам Архангельска</a:t>
-              </a:r>
-              <a:endParaRPr lang="en-US" sz="1600" dirty="0"/>
-            </a:p>
-          </p:txBody>
-        </p:sp>
-      </p:grpSp>
-      <p:grpSp>
-        <p:nvGrpSpPr>
-          <p:cNvPr id="14" name="Группа 13">
-            <a:extLst>
-              <a:ext uri="{FF2B5EF4-FFF2-40B4-BE49-F238E27FC236}">
-                <a16:creationId xmlns:a16="http://schemas.microsoft.com/office/drawing/2014/main" id="{7C38B8AB-BEB0-C293-AA39-F2E7AA770E74}"/>
-              </a:ext>
-            </a:extLst>
-          </p:cNvPr>
-          <p:cNvGrpSpPr/>
-          <p:nvPr/>
-        </p:nvGrpSpPr>
-        <p:grpSpPr>
-          <a:xfrm>
-            <a:off x="1249680" y="2240280"/>
-            <a:ext cx="6644640" cy="1005840"/>
-            <a:chOff x="0" y="2286000"/>
-            <a:chExt cx="9144000" cy="1188720"/>
-          </a:xfrm>
-          <a:gradFill>
-            <a:gsLst>
-              <a:gs pos="0">
-                <a:schemeClr val="accent1">
-                  <a:lumMod val="5000"/>
-                  <a:lumOff val="95000"/>
-                </a:schemeClr>
-              </a:gs>
-              <a:gs pos="74000">
-                <a:srgbClr val="E9F9FB"/>
-              </a:gs>
-              <a:gs pos="83000">
-                <a:srgbClr val="E9F9FB"/>
-              </a:gs>
-              <a:gs pos="100000">
-                <a:srgbClr val="E9F9FB"/>
-              </a:gs>
-            </a:gsLst>
-            <a:lin ang="2700000" scaled="1"/>
-          </a:gradFill>
-        </p:grpSpPr>
-        <p:sp>
-          <p:nvSpPr>
-            <p:cNvPr id="6" name="Shape 4"/>
-            <p:cNvSpPr/>
-            <p:nvPr/>
-          </p:nvSpPr>
-          <p:spPr>
-            <a:xfrm>
-              <a:off x="0" y="2286000"/>
-              <a:ext cx="9144000" cy="1188720"/>
-            </a:xfrm>
-            <a:custGeom>
-              <a:avLst/>
-              <a:gdLst>
-                <a:gd name="connsiteX0" fmla="*/ 0 w 9144000"/>
-                <a:gd name="connsiteY0" fmla="*/ 0 h 1188720"/>
-                <a:gd name="connsiteX1" fmla="*/ 744583 w 9144000"/>
-                <a:gd name="connsiteY1" fmla="*/ 0 h 1188720"/>
-                <a:gd name="connsiteX2" fmla="*/ 1580606 w 9144000"/>
-                <a:gd name="connsiteY2" fmla="*/ 0 h 1188720"/>
-                <a:gd name="connsiteX3" fmla="*/ 2050869 w 9144000"/>
-                <a:gd name="connsiteY3" fmla="*/ 0 h 1188720"/>
-                <a:gd name="connsiteX4" fmla="*/ 2795451 w 9144000"/>
-                <a:gd name="connsiteY4" fmla="*/ 0 h 1188720"/>
-                <a:gd name="connsiteX5" fmla="*/ 3265714 w 9144000"/>
-                <a:gd name="connsiteY5" fmla="*/ 0 h 1188720"/>
-                <a:gd name="connsiteX6" fmla="*/ 3918857 w 9144000"/>
-                <a:gd name="connsiteY6" fmla="*/ 0 h 1188720"/>
-                <a:gd name="connsiteX7" fmla="*/ 4663440 w 9144000"/>
-                <a:gd name="connsiteY7" fmla="*/ 0 h 1188720"/>
-                <a:gd name="connsiteX8" fmla="*/ 5042263 w 9144000"/>
-                <a:gd name="connsiteY8" fmla="*/ 0 h 1188720"/>
-                <a:gd name="connsiteX9" fmla="*/ 5421086 w 9144000"/>
-                <a:gd name="connsiteY9" fmla="*/ 0 h 1188720"/>
-                <a:gd name="connsiteX10" fmla="*/ 6257109 w 9144000"/>
-                <a:gd name="connsiteY10" fmla="*/ 0 h 1188720"/>
-                <a:gd name="connsiteX11" fmla="*/ 6910251 w 9144000"/>
-                <a:gd name="connsiteY11" fmla="*/ 0 h 1188720"/>
-                <a:gd name="connsiteX12" fmla="*/ 7289074 w 9144000"/>
-                <a:gd name="connsiteY12" fmla="*/ 0 h 1188720"/>
-                <a:gd name="connsiteX13" fmla="*/ 7942217 w 9144000"/>
-                <a:gd name="connsiteY13" fmla="*/ 0 h 1188720"/>
-                <a:gd name="connsiteX14" fmla="*/ 9144000 w 9144000"/>
-                <a:gd name="connsiteY14" fmla="*/ 0 h 1188720"/>
-                <a:gd name="connsiteX15" fmla="*/ 9144000 w 9144000"/>
-                <a:gd name="connsiteY15" fmla="*/ 582473 h 1188720"/>
-                <a:gd name="connsiteX16" fmla="*/ 9144000 w 9144000"/>
-                <a:gd name="connsiteY16" fmla="*/ 1188720 h 1188720"/>
-                <a:gd name="connsiteX17" fmla="*/ 8765177 w 9144000"/>
-                <a:gd name="connsiteY17" fmla="*/ 1188720 h 1188720"/>
-                <a:gd name="connsiteX18" fmla="*/ 7929154 w 9144000"/>
-                <a:gd name="connsiteY18" fmla="*/ 1188720 h 1188720"/>
-                <a:gd name="connsiteX19" fmla="*/ 7184571 w 9144000"/>
-                <a:gd name="connsiteY19" fmla="*/ 1188720 h 1188720"/>
-                <a:gd name="connsiteX20" fmla="*/ 6439989 w 9144000"/>
-                <a:gd name="connsiteY20" fmla="*/ 1188720 h 1188720"/>
-                <a:gd name="connsiteX21" fmla="*/ 5695406 w 9144000"/>
-                <a:gd name="connsiteY21" fmla="*/ 1188720 h 1188720"/>
-                <a:gd name="connsiteX22" fmla="*/ 5225143 w 9144000"/>
-                <a:gd name="connsiteY22" fmla="*/ 1188720 h 1188720"/>
-                <a:gd name="connsiteX23" fmla="*/ 4389120 w 9144000"/>
-                <a:gd name="connsiteY23" fmla="*/ 1188720 h 1188720"/>
-                <a:gd name="connsiteX24" fmla="*/ 3735977 w 9144000"/>
-                <a:gd name="connsiteY24" fmla="*/ 1188720 h 1188720"/>
-                <a:gd name="connsiteX25" fmla="*/ 3357154 w 9144000"/>
-                <a:gd name="connsiteY25" fmla="*/ 1188720 h 1188720"/>
-                <a:gd name="connsiteX26" fmla="*/ 2704011 w 9144000"/>
-                <a:gd name="connsiteY26" fmla="*/ 1188720 h 1188720"/>
-                <a:gd name="connsiteX27" fmla="*/ 2142309 w 9144000"/>
-                <a:gd name="connsiteY27" fmla="*/ 1188720 h 1188720"/>
-                <a:gd name="connsiteX28" fmla="*/ 1580606 w 9144000"/>
-                <a:gd name="connsiteY28" fmla="*/ 1188720 h 1188720"/>
-                <a:gd name="connsiteX29" fmla="*/ 1018903 w 9144000"/>
-                <a:gd name="connsiteY29" fmla="*/ 1188720 h 1188720"/>
-                <a:gd name="connsiteX30" fmla="*/ 0 w 9144000"/>
-                <a:gd name="connsiteY30" fmla="*/ 1188720 h 1188720"/>
-                <a:gd name="connsiteX31" fmla="*/ 0 w 9144000"/>
-                <a:gd name="connsiteY31" fmla="*/ 582473 h 1188720"/>
-                <a:gd name="connsiteX32" fmla="*/ 0 w 9144000"/>
-                <a:gd name="connsiteY32" fmla="*/ 0 h 1188720"/>
-              </a:gdLst>
-              <a:ahLst/>
-              <a:cxnLst>
-                <a:cxn ang="0">
-                  <a:pos x="connsiteX0" y="connsiteY0"/>
-                </a:cxn>
-                <a:cxn ang="0">
-                  <a:pos x="connsiteX1" y="connsiteY1"/>
-                </a:cxn>
-                <a:cxn ang="0">
-                  <a:pos x="connsiteX2" y="connsiteY2"/>
-                </a:cxn>
-                <a:cxn ang="0">
-                  <a:pos x="connsiteX3" y="connsiteY3"/>
-                </a:cxn>
-                <a:cxn ang="0">
-                  <a:pos x="connsiteX4" y="connsiteY4"/>
-                </a:cxn>
-                <a:cxn ang="0">
-                  <a:pos x="connsiteX5" y="connsiteY5"/>
-                </a:cxn>
-                <a:cxn ang="0">
-                  <a:pos x="connsiteX6" y="connsiteY6"/>
-                </a:cxn>
-                <a:cxn ang="0">
-                  <a:pos x="connsiteX7" y="connsiteY7"/>
-                </a:cxn>
-                <a:cxn ang="0">
-                  <a:pos x="connsiteX8" y="connsiteY8"/>
-                </a:cxn>
-                <a:cxn ang="0">
-                  <a:pos x="connsiteX9" y="connsiteY9"/>
-                </a:cxn>
-                <a:cxn ang="0">
-                  <a:pos x="connsiteX10" y="connsiteY10"/>
-                </a:cxn>
-                <a:cxn ang="0">
-                  <a:pos x="connsiteX11" y="connsiteY11"/>
-                </a:cxn>
-                <a:cxn ang="0">
-                  <a:pos x="connsiteX12" y="connsiteY12"/>
-                </a:cxn>
-                <a:cxn ang="0">
-                  <a:pos x="connsiteX13" y="connsiteY13"/>
-                </a:cxn>
-                <a:cxn ang="0">
-                  <a:pos x="connsiteX14" y="connsiteY14"/>
-                </a:cxn>
-                <a:cxn ang="0">
-                  <a:pos x="connsiteX15" y="connsiteY15"/>
-                </a:cxn>
-                <a:cxn ang="0">
-                  <a:pos x="connsiteX16" y="connsiteY16"/>
-                </a:cxn>
-                <a:cxn ang="0">
-                  <a:pos x="connsiteX17" y="connsiteY17"/>
-                </a:cxn>
-                <a:cxn ang="0">
-                  <a:pos x="connsiteX18" y="connsiteY18"/>
-                </a:cxn>
-                <a:cxn ang="0">
-                  <a:pos x="connsiteX19" y="connsiteY19"/>
-                </a:cxn>
-                <a:cxn ang="0">
-                  <a:pos x="connsiteX20" y="connsiteY20"/>
-                </a:cxn>
-                <a:cxn ang="0">
-                  <a:pos x="connsiteX21" y="connsiteY21"/>
-                </a:cxn>
-                <a:cxn ang="0">
-                  <a:pos x="connsiteX22" y="connsiteY22"/>
-                </a:cxn>
-                <a:cxn ang="0">
-                  <a:pos x="connsiteX23" y="connsiteY23"/>
-                </a:cxn>
-                <a:cxn ang="0">
-                  <a:pos x="connsiteX24" y="connsiteY24"/>
-                </a:cxn>
-                <a:cxn ang="0">
-                  <a:pos x="connsiteX25" y="connsiteY25"/>
-                </a:cxn>
-                <a:cxn ang="0">
-                  <a:pos x="connsiteX26" y="connsiteY26"/>
-                </a:cxn>
-                <a:cxn ang="0">
-                  <a:pos x="connsiteX27" y="connsiteY27"/>
-                </a:cxn>
-                <a:cxn ang="0">
-                  <a:pos x="connsiteX28" y="connsiteY28"/>
-                </a:cxn>
-                <a:cxn ang="0">
-                  <a:pos x="connsiteX29" y="connsiteY29"/>
-                </a:cxn>
-                <a:cxn ang="0">
-                  <a:pos x="connsiteX30" y="connsiteY30"/>
-                </a:cxn>
-                <a:cxn ang="0">
-                  <a:pos x="connsiteX31" y="connsiteY31"/>
-                </a:cxn>
-                <a:cxn ang="0">
-                  <a:pos x="connsiteX32" y="connsiteY32"/>
-                </a:cxn>
-              </a:cxnLst>
-              <a:rect l="l" t="t" r="r" b="b"/>
-              <a:pathLst>
-                <a:path w="9144000" h="1188720" fill="none" extrusionOk="0">
-                  <a:moveTo>
-                    <a:pt x="0" y="0"/>
-                  </a:moveTo>
-                  <a:cubicBezTo>
-                    <a:pt x="262395" y="35323"/>
-                    <a:pt x="382833" y="-13091"/>
-                    <a:pt x="744583" y="0"/>
-                  </a:cubicBezTo>
-                  <a:cubicBezTo>
-                    <a:pt x="1106333" y="13091"/>
-                    <a:pt x="1231879" y="14118"/>
-                    <a:pt x="1580606" y="0"/>
-                  </a:cubicBezTo>
-                  <a:cubicBezTo>
-                    <a:pt x="1929333" y="-14118"/>
-                    <a:pt x="1903382" y="-18911"/>
-                    <a:pt x="2050869" y="0"/>
-                  </a:cubicBezTo>
-                  <a:cubicBezTo>
-                    <a:pt x="2198356" y="18911"/>
-                    <a:pt x="2566448" y="13634"/>
-                    <a:pt x="2795451" y="0"/>
-                  </a:cubicBezTo>
-                  <a:cubicBezTo>
-                    <a:pt x="3024454" y="-13634"/>
-                    <a:pt x="3038784" y="21107"/>
-                    <a:pt x="3265714" y="0"/>
-                  </a:cubicBezTo>
-                  <a:cubicBezTo>
-                    <a:pt x="3492644" y="-21107"/>
-                    <a:pt x="3767452" y="-25774"/>
-                    <a:pt x="3918857" y="0"/>
-                  </a:cubicBezTo>
-                  <a:cubicBezTo>
-                    <a:pt x="4070262" y="25774"/>
-                    <a:pt x="4397538" y="-27905"/>
-                    <a:pt x="4663440" y="0"/>
-                  </a:cubicBezTo>
-                  <a:cubicBezTo>
-                    <a:pt x="4929342" y="27905"/>
-                    <a:pt x="4860320" y="3204"/>
-                    <a:pt x="5042263" y="0"/>
-                  </a:cubicBezTo>
-                  <a:cubicBezTo>
-                    <a:pt x="5224206" y="-3204"/>
-                    <a:pt x="5318848" y="-5061"/>
-                    <a:pt x="5421086" y="0"/>
-                  </a:cubicBezTo>
-                  <a:cubicBezTo>
-                    <a:pt x="5523324" y="5061"/>
-                    <a:pt x="5858063" y="-5431"/>
-                    <a:pt x="6257109" y="0"/>
-                  </a:cubicBezTo>
-                  <a:cubicBezTo>
-                    <a:pt x="6656155" y="5431"/>
-                    <a:pt x="6696681" y="-5805"/>
-                    <a:pt x="6910251" y="0"/>
-                  </a:cubicBezTo>
-                  <a:cubicBezTo>
-                    <a:pt x="7123821" y="5805"/>
-                    <a:pt x="7174362" y="16437"/>
-                    <a:pt x="7289074" y="0"/>
-                  </a:cubicBezTo>
-                  <a:cubicBezTo>
-                    <a:pt x="7403786" y="-16437"/>
-                    <a:pt x="7716966" y="8318"/>
-                    <a:pt x="7942217" y="0"/>
-                  </a:cubicBezTo>
-                  <a:cubicBezTo>
-                    <a:pt x="8167468" y="-8318"/>
-                    <a:pt x="8753983" y="-41292"/>
-                    <a:pt x="9144000" y="0"/>
-                  </a:cubicBezTo>
-                  <a:cubicBezTo>
-                    <a:pt x="9161824" y="277933"/>
-                    <a:pt x="9132307" y="440554"/>
-                    <a:pt x="9144000" y="582473"/>
-                  </a:cubicBezTo>
-                  <a:cubicBezTo>
-                    <a:pt x="9155693" y="724392"/>
-                    <a:pt x="9144504" y="1032333"/>
-                    <a:pt x="9144000" y="1188720"/>
-                  </a:cubicBezTo>
-                  <a:cubicBezTo>
-                    <a:pt x="8988970" y="1199020"/>
-                    <a:pt x="8866044" y="1195548"/>
-                    <a:pt x="8765177" y="1188720"/>
-                  </a:cubicBezTo>
-                  <a:cubicBezTo>
-                    <a:pt x="8664310" y="1181892"/>
-                    <a:pt x="8307230" y="1228341"/>
-                    <a:pt x="7929154" y="1188720"/>
-                  </a:cubicBezTo>
-                  <a:cubicBezTo>
-                    <a:pt x="7551078" y="1149099"/>
-                    <a:pt x="7499748" y="1178759"/>
-                    <a:pt x="7184571" y="1188720"/>
-                  </a:cubicBezTo>
-                  <a:cubicBezTo>
-                    <a:pt x="6869394" y="1198681"/>
-                    <a:pt x="6636692" y="1169648"/>
-                    <a:pt x="6439989" y="1188720"/>
-                  </a:cubicBezTo>
-                  <a:cubicBezTo>
-                    <a:pt x="6243286" y="1207792"/>
-                    <a:pt x="5997961" y="1199494"/>
-                    <a:pt x="5695406" y="1188720"/>
-                  </a:cubicBezTo>
-                  <a:cubicBezTo>
-                    <a:pt x="5392851" y="1177946"/>
-                    <a:pt x="5342275" y="1201228"/>
-                    <a:pt x="5225143" y="1188720"/>
-                  </a:cubicBezTo>
-                  <a:cubicBezTo>
-                    <a:pt x="5108011" y="1176212"/>
-                    <a:pt x="4779838" y="1151330"/>
-                    <a:pt x="4389120" y="1188720"/>
-                  </a:cubicBezTo>
-                  <a:cubicBezTo>
-                    <a:pt x="3998402" y="1226110"/>
-                    <a:pt x="3962958" y="1213539"/>
-                    <a:pt x="3735977" y="1188720"/>
-                  </a:cubicBezTo>
-                  <a:cubicBezTo>
-                    <a:pt x="3508996" y="1163901"/>
-                    <a:pt x="3439339" y="1197704"/>
-                    <a:pt x="3357154" y="1188720"/>
-                  </a:cubicBezTo>
-                  <a:cubicBezTo>
-                    <a:pt x="3274969" y="1179736"/>
-                    <a:pt x="2881294" y="1205973"/>
-                    <a:pt x="2704011" y="1188720"/>
-                  </a:cubicBezTo>
-                  <a:cubicBezTo>
-                    <a:pt x="2526728" y="1171467"/>
-                    <a:pt x="2311240" y="1175527"/>
-                    <a:pt x="2142309" y="1188720"/>
-                  </a:cubicBezTo>
-                  <a:cubicBezTo>
-                    <a:pt x="1973378" y="1201913"/>
-                    <a:pt x="1820108" y="1165033"/>
-                    <a:pt x="1580606" y="1188720"/>
-                  </a:cubicBezTo>
-                  <a:cubicBezTo>
-                    <a:pt x="1341104" y="1212407"/>
-                    <a:pt x="1159507" y="1176609"/>
-                    <a:pt x="1018903" y="1188720"/>
-                  </a:cubicBezTo>
-                  <a:cubicBezTo>
-                    <a:pt x="878299" y="1200831"/>
-                    <a:pt x="259087" y="1233092"/>
-                    <a:pt x="0" y="1188720"/>
-                  </a:cubicBezTo>
-                  <a:cubicBezTo>
-                    <a:pt x="16745" y="957713"/>
-                    <a:pt x="9790" y="875333"/>
-                    <a:pt x="0" y="582473"/>
-                  </a:cubicBezTo>
-                  <a:cubicBezTo>
-                    <a:pt x="-9790" y="289613"/>
-                    <a:pt x="9950" y="281803"/>
-                    <a:pt x="0" y="0"/>
-                  </a:cubicBezTo>
-                  <a:close/>
-                </a:path>
-                <a:path w="9144000" h="1188720" stroke="0" extrusionOk="0">
-                  <a:moveTo>
-                    <a:pt x="0" y="0"/>
-                  </a:moveTo>
-                  <a:cubicBezTo>
-                    <a:pt x="198878" y="-10557"/>
-                    <a:pt x="407088" y="-8082"/>
-                    <a:pt x="561703" y="0"/>
-                  </a:cubicBezTo>
-                  <a:cubicBezTo>
-                    <a:pt x="716318" y="8082"/>
-                    <a:pt x="835202" y="-18772"/>
-                    <a:pt x="940526" y="0"/>
-                  </a:cubicBezTo>
-                  <a:cubicBezTo>
-                    <a:pt x="1045850" y="18772"/>
-                    <a:pt x="1393324" y="-3579"/>
-                    <a:pt x="1776549" y="0"/>
-                  </a:cubicBezTo>
-                  <a:cubicBezTo>
-                    <a:pt x="2159774" y="3579"/>
-                    <a:pt x="2190081" y="-10610"/>
-                    <a:pt x="2338251" y="0"/>
-                  </a:cubicBezTo>
-                  <a:cubicBezTo>
-                    <a:pt x="2486421" y="10610"/>
-                    <a:pt x="2645997" y="17984"/>
-                    <a:pt x="2899954" y="0"/>
-                  </a:cubicBezTo>
-                  <a:cubicBezTo>
-                    <a:pt x="3153911" y="-17984"/>
-                    <a:pt x="3493774" y="11651"/>
-                    <a:pt x="3735977" y="0"/>
-                  </a:cubicBezTo>
-                  <a:cubicBezTo>
-                    <a:pt x="3978180" y="-11651"/>
-                    <a:pt x="4089476" y="16082"/>
-                    <a:pt x="4206240" y="0"/>
-                  </a:cubicBezTo>
-                  <a:cubicBezTo>
-                    <a:pt x="4323004" y="-16082"/>
-                    <a:pt x="4870551" y="33406"/>
-                    <a:pt x="5042263" y="0"/>
-                  </a:cubicBezTo>
-                  <a:cubicBezTo>
-                    <a:pt x="5213975" y="-33406"/>
-                    <a:pt x="5518384" y="-39039"/>
-                    <a:pt x="5878286" y="0"/>
-                  </a:cubicBezTo>
-                  <a:cubicBezTo>
-                    <a:pt x="6238188" y="39039"/>
-                    <a:pt x="6358789" y="24913"/>
-                    <a:pt x="6531429" y="0"/>
-                  </a:cubicBezTo>
-                  <a:cubicBezTo>
-                    <a:pt x="6704069" y="-24913"/>
-                    <a:pt x="7047419" y="-5128"/>
-                    <a:pt x="7367451" y="0"/>
-                  </a:cubicBezTo>
-                  <a:cubicBezTo>
-                    <a:pt x="7687483" y="5128"/>
-                    <a:pt x="7814430" y="-16092"/>
-                    <a:pt x="7929154" y="0"/>
-                  </a:cubicBezTo>
-                  <a:cubicBezTo>
-                    <a:pt x="8043878" y="16092"/>
-                    <a:pt x="8250575" y="-17929"/>
-                    <a:pt x="8490857" y="0"/>
-                  </a:cubicBezTo>
-                  <a:cubicBezTo>
-                    <a:pt x="8731139" y="17929"/>
-                    <a:pt x="8898894" y="-15257"/>
-                    <a:pt x="9144000" y="0"/>
-                  </a:cubicBezTo>
-                  <a:cubicBezTo>
-                    <a:pt x="9172675" y="204553"/>
-                    <a:pt x="9139152" y="453158"/>
-                    <a:pt x="9144000" y="582473"/>
-                  </a:cubicBezTo>
-                  <a:cubicBezTo>
-                    <a:pt x="9148848" y="711788"/>
-                    <a:pt x="9166558" y="947698"/>
-                    <a:pt x="9144000" y="1188720"/>
-                  </a:cubicBezTo>
-                  <a:cubicBezTo>
-                    <a:pt x="8945849" y="1190520"/>
-                    <a:pt x="8642473" y="1190710"/>
-                    <a:pt x="8399417" y="1188720"/>
-                  </a:cubicBezTo>
-                  <a:cubicBezTo>
-                    <a:pt x="8156361" y="1186730"/>
-                    <a:pt x="8000910" y="1169017"/>
-                    <a:pt x="7746274" y="1188720"/>
-                  </a:cubicBezTo>
-                  <a:cubicBezTo>
-                    <a:pt x="7491638" y="1208423"/>
-                    <a:pt x="7539137" y="1194736"/>
-                    <a:pt x="7367451" y="1188720"/>
-                  </a:cubicBezTo>
-                  <a:cubicBezTo>
-                    <a:pt x="7195765" y="1182704"/>
-                    <a:pt x="7103813" y="1171890"/>
-                    <a:pt x="6897189" y="1188720"/>
-                  </a:cubicBezTo>
-                  <a:cubicBezTo>
-                    <a:pt x="6690565" y="1205550"/>
-                    <a:pt x="6424425" y="1208132"/>
-                    <a:pt x="6061166" y="1188720"/>
-                  </a:cubicBezTo>
-                  <a:cubicBezTo>
-                    <a:pt x="5697907" y="1169308"/>
-                    <a:pt x="5680290" y="1192972"/>
-                    <a:pt x="5408023" y="1188720"/>
-                  </a:cubicBezTo>
-                  <a:cubicBezTo>
-                    <a:pt x="5135756" y="1184468"/>
-                    <a:pt x="5104702" y="1171322"/>
-                    <a:pt x="4937760" y="1188720"/>
-                  </a:cubicBezTo>
-                  <a:cubicBezTo>
-                    <a:pt x="4770818" y="1206118"/>
-                    <a:pt x="4524353" y="1187182"/>
-                    <a:pt x="4284617" y="1188720"/>
-                  </a:cubicBezTo>
-                  <a:cubicBezTo>
-                    <a:pt x="4044881" y="1190258"/>
-                    <a:pt x="4062748" y="1207211"/>
-                    <a:pt x="3905794" y="1188720"/>
-                  </a:cubicBezTo>
-                  <a:cubicBezTo>
-                    <a:pt x="3748840" y="1170229"/>
-                    <a:pt x="3669854" y="1179105"/>
-                    <a:pt x="3526971" y="1188720"/>
-                  </a:cubicBezTo>
-                  <a:cubicBezTo>
-                    <a:pt x="3384088" y="1198335"/>
-                    <a:pt x="3195773" y="1164236"/>
-                    <a:pt x="2873829" y="1188720"/>
-                  </a:cubicBezTo>
-                  <a:cubicBezTo>
-                    <a:pt x="2551885" y="1213204"/>
-                    <a:pt x="2520987" y="1175002"/>
-                    <a:pt x="2403566" y="1188720"/>
-                  </a:cubicBezTo>
-                  <a:cubicBezTo>
-                    <a:pt x="2286145" y="1202438"/>
-                    <a:pt x="1914274" y="1163139"/>
-                    <a:pt x="1658983" y="1188720"/>
-                  </a:cubicBezTo>
-                  <a:cubicBezTo>
-                    <a:pt x="1403692" y="1214301"/>
-                    <a:pt x="1353305" y="1174520"/>
-                    <a:pt x="1188720" y="1188720"/>
-                  </a:cubicBezTo>
-                  <a:cubicBezTo>
-                    <a:pt x="1024135" y="1202920"/>
-                    <a:pt x="516889" y="1247526"/>
-                    <a:pt x="0" y="1188720"/>
-                  </a:cubicBezTo>
-                  <a:cubicBezTo>
-                    <a:pt x="13816" y="962603"/>
-                    <a:pt x="-13026" y="760994"/>
-                    <a:pt x="0" y="630022"/>
-                  </a:cubicBezTo>
-                  <a:cubicBezTo>
-                    <a:pt x="13026" y="499050"/>
-                    <a:pt x="22708" y="183063"/>
-                    <a:pt x="0" y="0"/>
-                  </a:cubicBezTo>
-                  <a:close/>
-                </a:path>
-              </a:pathLst>
-            </a:custGeom>
-            <a:grpFill/>
-            <a:ln w="25400" cap="rnd">
-              <a:solidFill>
-                <a:srgbClr val="00ACC1"/>
-              </a:solidFill>
-              <a:prstDash val="solid"/>
-              <a:round/>
-              <a:extLst>
-                <a:ext uri="{C807C97D-BFC1-408E-A445-0C87EB9F89A2}">
-                  <ask:lineSketchStyleProps xmlns:ask="http://schemas.microsoft.com/office/drawing/2018/sketchyshapes" sd="1219033472">
-                    <a:prstGeom prst="rect">
-                      <a:avLst/>
-                    </a:prstGeom>
-                    <ask:type>
-                      <ask:lineSketchFreehand/>
-                    </ask:type>
-                  </ask:lineSketchStyleProps>
-                </a:ext>
-              </a:extLst>
-            </a:ln>
-          </p:spPr>
-          <p:txBody>
-            <a:bodyPr/>
-            <a:lstStyle/>
-            <a:p>
-              <a:endParaRPr lang="ru-RU" sz="2400" dirty="0"/>
-            </a:p>
-          </p:txBody>
-        </p:sp>
-        <p:sp>
-          <p:nvSpPr>
-            <p:cNvPr id="7" name="Text 5"/>
-            <p:cNvSpPr/>
-            <p:nvPr/>
-          </p:nvSpPr>
-          <p:spPr>
-            <a:xfrm>
-              <a:off x="718709" y="2470868"/>
-              <a:ext cx="7241122" cy="365760"/>
-            </a:xfrm>
-            <a:prstGeom prst="rect">
-              <a:avLst/>
-            </a:prstGeom>
-            <a:grpFill/>
-            <a:ln/>
-          </p:spPr>
-          <p:txBody>
-            <a:bodyPr wrap="square" rtlCol="0" anchor="ctr"/>
-            <a:lstStyle/>
-            <a:p>
-              <a:pPr marL="0" indent="0">
-                <a:buNone/>
-              </a:pPr>
-              <a:r>
-                <a:rPr lang="ru-RU" sz="2000" dirty="0"/>
-                <a:t>Агенты по недвижимости</a:t>
-              </a:r>
-              <a:endParaRPr lang="en-US" sz="2000" dirty="0"/>
-            </a:p>
-          </p:txBody>
-        </p:sp>
-        <p:sp>
-          <p:nvSpPr>
-            <p:cNvPr id="8" name="Text 6"/>
-            <p:cNvSpPr/>
-            <p:nvPr/>
-          </p:nvSpPr>
-          <p:spPr>
-            <a:xfrm>
-              <a:off x="274320" y="2926080"/>
-              <a:ext cx="8595360" cy="365760"/>
-            </a:xfrm>
-            <a:prstGeom prst="rect">
-              <a:avLst/>
-            </a:prstGeom>
-            <a:grpFill/>
-            <a:ln/>
-          </p:spPr>
-          <p:txBody>
-            <a:bodyPr wrap="square" rtlCol="0" anchor="ctr"/>
-            <a:lstStyle/>
-            <a:p>
-              <a:pPr marL="0" indent="0">
-                <a:buNone/>
-              </a:pPr>
-              <a:r>
-                <a:rPr lang="ru-RU" sz="1600" dirty="0"/>
-                <a:t>Получают инструмент для ведения объектов, фиксации обращений и управления процессом взаимодействия с клиентами.</a:t>
-              </a:r>
-              <a:endParaRPr lang="en-US" sz="1600" dirty="0"/>
-            </a:p>
-          </p:txBody>
-        </p:sp>
-      </p:grpSp>
-      <p:grpSp>
-        <p:nvGrpSpPr>
-          <p:cNvPr id="13" name="Группа 12">
-            <a:extLst>
-              <a:ext uri="{FF2B5EF4-FFF2-40B4-BE49-F238E27FC236}">
-                <a16:creationId xmlns:a16="http://schemas.microsoft.com/office/drawing/2014/main" id="{1F88C15B-C67B-0369-7F27-0682EE79DE04}"/>
-              </a:ext>
-            </a:extLst>
-          </p:cNvPr>
-          <p:cNvGrpSpPr/>
-          <p:nvPr/>
-        </p:nvGrpSpPr>
-        <p:grpSpPr>
-          <a:xfrm>
-            <a:off x="1249680" y="3662875"/>
-            <a:ext cx="6644640" cy="1005840"/>
-            <a:chOff x="0" y="3749040"/>
-            <a:chExt cx="9144000" cy="1188720"/>
-          </a:xfrm>
-          <a:gradFill>
-            <a:gsLst>
-              <a:gs pos="0">
-                <a:srgbClr val="B3EBF2"/>
-              </a:gs>
-              <a:gs pos="77000">
-                <a:srgbClr val="FEFEFE"/>
-              </a:gs>
-              <a:gs pos="26000">
-                <a:srgbClr val="FEFEFE"/>
-              </a:gs>
-              <a:gs pos="100000">
-                <a:srgbClr val="BEEEF4"/>
-              </a:gs>
-            </a:gsLst>
-            <a:path path="circle">
-              <a:fillToRect l="100000" t="100000"/>
-            </a:path>
-          </a:gradFill>
-        </p:grpSpPr>
-        <p:sp>
-          <p:nvSpPr>
-            <p:cNvPr id="9" name="Shape 7"/>
-            <p:cNvSpPr/>
-            <p:nvPr/>
-          </p:nvSpPr>
-          <p:spPr>
-            <a:xfrm>
-              <a:off x="0" y="3749040"/>
-              <a:ext cx="9144000" cy="1188720"/>
-            </a:xfrm>
-            <a:custGeom>
-              <a:avLst/>
-              <a:gdLst>
-                <a:gd name="connsiteX0" fmla="*/ 0 w 9144000"/>
-                <a:gd name="connsiteY0" fmla="*/ 0 h 1188720"/>
-                <a:gd name="connsiteX1" fmla="*/ 744583 w 9144000"/>
-                <a:gd name="connsiteY1" fmla="*/ 0 h 1188720"/>
-                <a:gd name="connsiteX2" fmla="*/ 1489166 w 9144000"/>
-                <a:gd name="connsiteY2" fmla="*/ 0 h 1188720"/>
-                <a:gd name="connsiteX3" fmla="*/ 2233749 w 9144000"/>
-                <a:gd name="connsiteY3" fmla="*/ 0 h 1188720"/>
-                <a:gd name="connsiteX4" fmla="*/ 3069771 w 9144000"/>
-                <a:gd name="connsiteY4" fmla="*/ 0 h 1188720"/>
-                <a:gd name="connsiteX5" fmla="*/ 3814354 w 9144000"/>
-                <a:gd name="connsiteY5" fmla="*/ 0 h 1188720"/>
-                <a:gd name="connsiteX6" fmla="*/ 4284617 w 9144000"/>
-                <a:gd name="connsiteY6" fmla="*/ 0 h 1188720"/>
-                <a:gd name="connsiteX7" fmla="*/ 4846320 w 9144000"/>
-                <a:gd name="connsiteY7" fmla="*/ 0 h 1188720"/>
-                <a:gd name="connsiteX8" fmla="*/ 5316583 w 9144000"/>
-                <a:gd name="connsiteY8" fmla="*/ 0 h 1188720"/>
-                <a:gd name="connsiteX9" fmla="*/ 5786846 w 9144000"/>
-                <a:gd name="connsiteY9" fmla="*/ 0 h 1188720"/>
-                <a:gd name="connsiteX10" fmla="*/ 6257109 w 9144000"/>
-                <a:gd name="connsiteY10" fmla="*/ 0 h 1188720"/>
-                <a:gd name="connsiteX11" fmla="*/ 7093131 w 9144000"/>
-                <a:gd name="connsiteY11" fmla="*/ 0 h 1188720"/>
-                <a:gd name="connsiteX12" fmla="*/ 7654834 w 9144000"/>
-                <a:gd name="connsiteY12" fmla="*/ 0 h 1188720"/>
-                <a:gd name="connsiteX13" fmla="*/ 8399417 w 9144000"/>
-                <a:gd name="connsiteY13" fmla="*/ 0 h 1188720"/>
-                <a:gd name="connsiteX14" fmla="*/ 9144000 w 9144000"/>
-                <a:gd name="connsiteY14" fmla="*/ 0 h 1188720"/>
-                <a:gd name="connsiteX15" fmla="*/ 9144000 w 9144000"/>
-                <a:gd name="connsiteY15" fmla="*/ 618134 h 1188720"/>
-                <a:gd name="connsiteX16" fmla="*/ 9144000 w 9144000"/>
-                <a:gd name="connsiteY16" fmla="*/ 1188720 h 1188720"/>
-                <a:gd name="connsiteX17" fmla="*/ 8582297 w 9144000"/>
-                <a:gd name="connsiteY17" fmla="*/ 1188720 h 1188720"/>
-                <a:gd name="connsiteX18" fmla="*/ 7837714 w 9144000"/>
-                <a:gd name="connsiteY18" fmla="*/ 1188720 h 1188720"/>
-                <a:gd name="connsiteX19" fmla="*/ 7001691 w 9144000"/>
-                <a:gd name="connsiteY19" fmla="*/ 1188720 h 1188720"/>
-                <a:gd name="connsiteX20" fmla="*/ 6622869 w 9144000"/>
-                <a:gd name="connsiteY20" fmla="*/ 1188720 h 1188720"/>
-                <a:gd name="connsiteX21" fmla="*/ 5786846 w 9144000"/>
-                <a:gd name="connsiteY21" fmla="*/ 1188720 h 1188720"/>
-                <a:gd name="connsiteX22" fmla="*/ 5408023 w 9144000"/>
-                <a:gd name="connsiteY22" fmla="*/ 1188720 h 1188720"/>
-                <a:gd name="connsiteX23" fmla="*/ 4937760 w 9144000"/>
-                <a:gd name="connsiteY23" fmla="*/ 1188720 h 1188720"/>
-                <a:gd name="connsiteX24" fmla="*/ 4193177 w 9144000"/>
-                <a:gd name="connsiteY24" fmla="*/ 1188720 h 1188720"/>
-                <a:gd name="connsiteX25" fmla="*/ 3631474 w 9144000"/>
-                <a:gd name="connsiteY25" fmla="*/ 1188720 h 1188720"/>
-                <a:gd name="connsiteX26" fmla="*/ 3069771 w 9144000"/>
-                <a:gd name="connsiteY26" fmla="*/ 1188720 h 1188720"/>
-                <a:gd name="connsiteX27" fmla="*/ 2508069 w 9144000"/>
-                <a:gd name="connsiteY27" fmla="*/ 1188720 h 1188720"/>
-                <a:gd name="connsiteX28" fmla="*/ 1946366 w 9144000"/>
-                <a:gd name="connsiteY28" fmla="*/ 1188720 h 1188720"/>
-                <a:gd name="connsiteX29" fmla="*/ 1201783 w 9144000"/>
-                <a:gd name="connsiteY29" fmla="*/ 1188720 h 1188720"/>
-                <a:gd name="connsiteX30" fmla="*/ 0 w 9144000"/>
-                <a:gd name="connsiteY30" fmla="*/ 1188720 h 1188720"/>
-                <a:gd name="connsiteX31" fmla="*/ 0 w 9144000"/>
-                <a:gd name="connsiteY31" fmla="*/ 630022 h 1188720"/>
-                <a:gd name="connsiteX32" fmla="*/ 0 w 9144000"/>
-                <a:gd name="connsiteY32" fmla="*/ 0 h 1188720"/>
-              </a:gdLst>
-              <a:ahLst/>
-              <a:cxnLst>
-                <a:cxn ang="0">
-                  <a:pos x="connsiteX0" y="connsiteY0"/>
-                </a:cxn>
-                <a:cxn ang="0">
-                  <a:pos x="connsiteX1" y="connsiteY1"/>
-                </a:cxn>
-                <a:cxn ang="0">
-                  <a:pos x="connsiteX2" y="connsiteY2"/>
-                </a:cxn>
-                <a:cxn ang="0">
-                  <a:pos x="connsiteX3" y="connsiteY3"/>
-                </a:cxn>
-                <a:cxn ang="0">
-                  <a:pos x="connsiteX4" y="connsiteY4"/>
-                </a:cxn>
-                <a:cxn ang="0">
-                  <a:pos x="connsiteX5" y="connsiteY5"/>
-                </a:cxn>
-                <a:cxn ang="0">
-                  <a:pos x="connsiteX6" y="connsiteY6"/>
-                </a:cxn>
-                <a:cxn ang="0">
-                  <a:pos x="connsiteX7" y="connsiteY7"/>
-                </a:cxn>
-                <a:cxn ang="0">
-                  <a:pos x="connsiteX8" y="connsiteY8"/>
-                </a:cxn>
-                <a:cxn ang="0">
-                  <a:pos x="connsiteX9" y="connsiteY9"/>
-                </a:cxn>
-                <a:cxn ang="0">
-                  <a:pos x="connsiteX10" y="connsiteY10"/>
-                </a:cxn>
-                <a:cxn ang="0">
-                  <a:pos x="connsiteX11" y="connsiteY11"/>
-                </a:cxn>
-                <a:cxn ang="0">
-                  <a:pos x="connsiteX12" y="connsiteY12"/>
-                </a:cxn>
-                <a:cxn ang="0">
-                  <a:pos x="connsiteX13" y="connsiteY13"/>
-                </a:cxn>
-                <a:cxn ang="0">
-                  <a:pos x="connsiteX14" y="connsiteY14"/>
-                </a:cxn>
-                <a:cxn ang="0">
-                  <a:pos x="connsiteX15" y="connsiteY15"/>
-                </a:cxn>
-                <a:cxn ang="0">
-                  <a:pos x="connsiteX16" y="connsiteY16"/>
-                </a:cxn>
-                <a:cxn ang="0">
-                  <a:pos x="connsiteX17" y="connsiteY17"/>
-                </a:cxn>
-                <a:cxn ang="0">
-                  <a:pos x="connsiteX18" y="connsiteY18"/>
-                </a:cxn>
-                <a:cxn ang="0">
-                  <a:pos x="connsiteX19" y="connsiteY19"/>
-                </a:cxn>
-                <a:cxn ang="0">
-                  <a:pos x="connsiteX20" y="connsiteY20"/>
-                </a:cxn>
-                <a:cxn ang="0">
-                  <a:pos x="connsiteX21" y="connsiteY21"/>
-                </a:cxn>
-                <a:cxn ang="0">
-                  <a:pos x="connsiteX22" y="connsiteY22"/>
-                </a:cxn>
-                <a:cxn ang="0">
-                  <a:pos x="connsiteX23" y="connsiteY23"/>
-                </a:cxn>
-                <a:cxn ang="0">
-                  <a:pos x="connsiteX24" y="connsiteY24"/>
-                </a:cxn>
-                <a:cxn ang="0">
-                  <a:pos x="connsiteX25" y="connsiteY25"/>
-                </a:cxn>
-                <a:cxn ang="0">
-                  <a:pos x="connsiteX26" y="connsiteY26"/>
-                </a:cxn>
-                <a:cxn ang="0">
-                  <a:pos x="connsiteX27" y="connsiteY27"/>
-                </a:cxn>
-                <a:cxn ang="0">
-                  <a:pos x="connsiteX28" y="connsiteY28"/>
-                </a:cxn>
-                <a:cxn ang="0">
-                  <a:pos x="connsiteX29" y="connsiteY29"/>
-                </a:cxn>
-                <a:cxn ang="0">
-                  <a:pos x="connsiteX30" y="connsiteY30"/>
-                </a:cxn>
-                <a:cxn ang="0">
-                  <a:pos x="connsiteX31" y="connsiteY31"/>
-                </a:cxn>
-                <a:cxn ang="0">
-                  <a:pos x="connsiteX32" y="connsiteY32"/>
-                </a:cxn>
-              </a:cxnLst>
-              <a:rect l="l" t="t" r="r" b="b"/>
-              <a:pathLst>
-                <a:path w="9144000" h="1188720" fill="none" extrusionOk="0">
-                  <a:moveTo>
-                    <a:pt x="0" y="0"/>
-                  </a:moveTo>
-                  <a:cubicBezTo>
-                    <a:pt x="346150" y="17427"/>
-                    <a:pt x="460579" y="-32327"/>
-                    <a:pt x="744583" y="0"/>
-                  </a:cubicBezTo>
-                  <a:cubicBezTo>
-                    <a:pt x="1028587" y="32327"/>
-                    <a:pt x="1225955" y="2422"/>
-                    <a:pt x="1489166" y="0"/>
-                  </a:cubicBezTo>
-                  <a:cubicBezTo>
-                    <a:pt x="1752377" y="-2422"/>
-                    <a:pt x="2020819" y="25107"/>
-                    <a:pt x="2233749" y="0"/>
-                  </a:cubicBezTo>
-                  <a:cubicBezTo>
-                    <a:pt x="2446679" y="-25107"/>
-                    <a:pt x="2839803" y="-26586"/>
-                    <a:pt x="3069771" y="0"/>
-                  </a:cubicBezTo>
-                  <a:cubicBezTo>
-                    <a:pt x="3299739" y="26586"/>
-                    <a:pt x="3648691" y="9561"/>
-                    <a:pt x="3814354" y="0"/>
-                  </a:cubicBezTo>
-                  <a:cubicBezTo>
-                    <a:pt x="3980017" y="-9561"/>
-                    <a:pt x="4091686" y="7716"/>
-                    <a:pt x="4284617" y="0"/>
-                  </a:cubicBezTo>
-                  <a:cubicBezTo>
-                    <a:pt x="4477548" y="-7716"/>
-                    <a:pt x="4697656" y="-22626"/>
-                    <a:pt x="4846320" y="0"/>
-                  </a:cubicBezTo>
-                  <a:cubicBezTo>
-                    <a:pt x="4994984" y="22626"/>
-                    <a:pt x="5113480" y="-6722"/>
-                    <a:pt x="5316583" y="0"/>
-                  </a:cubicBezTo>
-                  <a:cubicBezTo>
-                    <a:pt x="5519686" y="6722"/>
-                    <a:pt x="5645800" y="-12722"/>
-                    <a:pt x="5786846" y="0"/>
-                  </a:cubicBezTo>
-                  <a:cubicBezTo>
-                    <a:pt x="5927892" y="12722"/>
-                    <a:pt x="6095437" y="-5402"/>
-                    <a:pt x="6257109" y="0"/>
-                  </a:cubicBezTo>
-                  <a:cubicBezTo>
-                    <a:pt x="6418781" y="5402"/>
-                    <a:pt x="6697826" y="1791"/>
-                    <a:pt x="7093131" y="0"/>
-                  </a:cubicBezTo>
-                  <a:cubicBezTo>
-                    <a:pt x="7488436" y="-1791"/>
-                    <a:pt x="7424400" y="6950"/>
-                    <a:pt x="7654834" y="0"/>
-                  </a:cubicBezTo>
-                  <a:cubicBezTo>
-                    <a:pt x="7885268" y="-6950"/>
-                    <a:pt x="8245773" y="-20153"/>
-                    <a:pt x="8399417" y="0"/>
-                  </a:cubicBezTo>
-                  <a:cubicBezTo>
-                    <a:pt x="8553061" y="20153"/>
-                    <a:pt x="8958689" y="2095"/>
-                    <a:pt x="9144000" y="0"/>
-                  </a:cubicBezTo>
-                  <a:cubicBezTo>
-                    <a:pt x="9131910" y="164959"/>
-                    <a:pt x="9134324" y="362209"/>
-                    <a:pt x="9144000" y="618134"/>
-                  </a:cubicBezTo>
-                  <a:cubicBezTo>
-                    <a:pt x="9153676" y="874059"/>
-                    <a:pt x="9167638" y="1055625"/>
-                    <a:pt x="9144000" y="1188720"/>
-                  </a:cubicBezTo>
-                  <a:cubicBezTo>
-                    <a:pt x="8867558" y="1180687"/>
-                    <a:pt x="8851480" y="1208005"/>
-                    <a:pt x="8582297" y="1188720"/>
-                  </a:cubicBezTo>
-                  <a:cubicBezTo>
-                    <a:pt x="8313114" y="1169435"/>
-                    <a:pt x="8099932" y="1210150"/>
-                    <a:pt x="7837714" y="1188720"/>
-                  </a:cubicBezTo>
-                  <a:cubicBezTo>
-                    <a:pt x="7575496" y="1167290"/>
-                    <a:pt x="7253662" y="1228870"/>
-                    <a:pt x="7001691" y="1188720"/>
-                  </a:cubicBezTo>
-                  <a:cubicBezTo>
-                    <a:pt x="6749720" y="1148570"/>
-                    <a:pt x="6713212" y="1198820"/>
-                    <a:pt x="6622869" y="1188720"/>
-                  </a:cubicBezTo>
-                  <a:cubicBezTo>
-                    <a:pt x="6532526" y="1178620"/>
-                    <a:pt x="6032340" y="1164794"/>
-                    <a:pt x="5786846" y="1188720"/>
-                  </a:cubicBezTo>
-                  <a:cubicBezTo>
-                    <a:pt x="5541352" y="1212646"/>
-                    <a:pt x="5536874" y="1171010"/>
-                    <a:pt x="5408023" y="1188720"/>
-                  </a:cubicBezTo>
-                  <a:cubicBezTo>
-                    <a:pt x="5279172" y="1206430"/>
-                    <a:pt x="5134196" y="1211778"/>
-                    <a:pt x="4937760" y="1188720"/>
-                  </a:cubicBezTo>
-                  <a:cubicBezTo>
-                    <a:pt x="4741324" y="1165662"/>
-                    <a:pt x="4391368" y="1214124"/>
-                    <a:pt x="4193177" y="1188720"/>
-                  </a:cubicBezTo>
-                  <a:cubicBezTo>
-                    <a:pt x="3994986" y="1163316"/>
-                    <a:pt x="3857212" y="1193004"/>
-                    <a:pt x="3631474" y="1188720"/>
-                  </a:cubicBezTo>
-                  <a:cubicBezTo>
-                    <a:pt x="3405736" y="1184436"/>
-                    <a:pt x="3336646" y="1197495"/>
-                    <a:pt x="3069771" y="1188720"/>
-                  </a:cubicBezTo>
-                  <a:cubicBezTo>
-                    <a:pt x="2802896" y="1179945"/>
-                    <a:pt x="2712980" y="1197904"/>
-                    <a:pt x="2508069" y="1188720"/>
-                  </a:cubicBezTo>
-                  <a:cubicBezTo>
-                    <a:pt x="2303158" y="1179536"/>
-                    <a:pt x="2192144" y="1197195"/>
-                    <a:pt x="1946366" y="1188720"/>
-                  </a:cubicBezTo>
-                  <a:cubicBezTo>
-                    <a:pt x="1700588" y="1180245"/>
-                    <a:pt x="1522074" y="1224070"/>
-                    <a:pt x="1201783" y="1188720"/>
-                  </a:cubicBezTo>
-                  <a:cubicBezTo>
-                    <a:pt x="881492" y="1153370"/>
-                    <a:pt x="278687" y="1182716"/>
-                    <a:pt x="0" y="1188720"/>
-                  </a:cubicBezTo>
-                  <a:cubicBezTo>
-                    <a:pt x="4725" y="945728"/>
-                    <a:pt x="-5843" y="828056"/>
-                    <a:pt x="0" y="630022"/>
-                  </a:cubicBezTo>
-                  <a:cubicBezTo>
-                    <a:pt x="5843" y="431988"/>
-                    <a:pt x="-26535" y="309174"/>
-                    <a:pt x="0" y="0"/>
-                  </a:cubicBezTo>
-                  <a:close/>
-                </a:path>
-                <a:path w="9144000" h="1188720" stroke="0" extrusionOk="0">
-                  <a:moveTo>
-                    <a:pt x="0" y="0"/>
-                  </a:moveTo>
-                  <a:cubicBezTo>
-                    <a:pt x="394276" y="-7074"/>
-                    <a:pt x="631824" y="-11077"/>
-                    <a:pt x="836023" y="0"/>
-                  </a:cubicBezTo>
-                  <a:cubicBezTo>
-                    <a:pt x="1040222" y="11077"/>
-                    <a:pt x="1204572" y="14059"/>
-                    <a:pt x="1489166" y="0"/>
-                  </a:cubicBezTo>
-                  <a:cubicBezTo>
-                    <a:pt x="1773760" y="-14059"/>
-                    <a:pt x="1863488" y="16489"/>
-                    <a:pt x="2142309" y="0"/>
-                  </a:cubicBezTo>
-                  <a:cubicBezTo>
-                    <a:pt x="2421130" y="-16489"/>
-                    <a:pt x="2438062" y="-1195"/>
-                    <a:pt x="2612571" y="0"/>
-                  </a:cubicBezTo>
-                  <a:cubicBezTo>
-                    <a:pt x="2787080" y="1195"/>
-                    <a:pt x="2871452" y="2763"/>
-                    <a:pt x="3082834" y="0"/>
-                  </a:cubicBezTo>
-                  <a:cubicBezTo>
-                    <a:pt x="3294216" y="-2763"/>
-                    <a:pt x="3641985" y="38395"/>
-                    <a:pt x="3918857" y="0"/>
-                  </a:cubicBezTo>
-                  <a:cubicBezTo>
-                    <a:pt x="4195729" y="-38395"/>
-                    <a:pt x="4334756" y="-31795"/>
-                    <a:pt x="4572000" y="0"/>
-                  </a:cubicBezTo>
-                  <a:cubicBezTo>
-                    <a:pt x="4809244" y="31795"/>
-                    <a:pt x="4964956" y="19195"/>
-                    <a:pt x="5133703" y="0"/>
-                  </a:cubicBezTo>
-                  <a:cubicBezTo>
-                    <a:pt x="5302450" y="-19195"/>
-                    <a:pt x="5695046" y="33149"/>
-                    <a:pt x="5878286" y="0"/>
-                  </a:cubicBezTo>
-                  <a:cubicBezTo>
-                    <a:pt x="6061526" y="-33149"/>
-                    <a:pt x="6167020" y="-14637"/>
-                    <a:pt x="6257109" y="0"/>
-                  </a:cubicBezTo>
-                  <a:cubicBezTo>
-                    <a:pt x="6347198" y="14637"/>
-                    <a:pt x="6618956" y="-2375"/>
-                    <a:pt x="6818811" y="0"/>
-                  </a:cubicBezTo>
-                  <a:cubicBezTo>
-                    <a:pt x="7018666" y="2375"/>
-                    <a:pt x="7078189" y="-9632"/>
-                    <a:pt x="7197634" y="0"/>
-                  </a:cubicBezTo>
-                  <a:cubicBezTo>
-                    <a:pt x="7317079" y="9632"/>
-                    <a:pt x="7390741" y="894"/>
-                    <a:pt x="7576457" y="0"/>
-                  </a:cubicBezTo>
-                  <a:cubicBezTo>
-                    <a:pt x="7762173" y="-894"/>
-                    <a:pt x="7918136" y="-2770"/>
-                    <a:pt x="8046720" y="0"/>
-                  </a:cubicBezTo>
-                  <a:cubicBezTo>
-                    <a:pt x="8175304" y="2770"/>
-                    <a:pt x="8816970" y="10446"/>
-                    <a:pt x="9144000" y="0"/>
-                  </a:cubicBezTo>
-                  <a:cubicBezTo>
-                    <a:pt x="9131901" y="176571"/>
-                    <a:pt x="9123502" y="399743"/>
-                    <a:pt x="9144000" y="558698"/>
-                  </a:cubicBezTo>
-                  <a:cubicBezTo>
-                    <a:pt x="9164498" y="717653"/>
-                    <a:pt x="9128465" y="1057756"/>
-                    <a:pt x="9144000" y="1188720"/>
-                  </a:cubicBezTo>
-                  <a:cubicBezTo>
-                    <a:pt x="8985846" y="1188110"/>
-                    <a:pt x="8725512" y="1176395"/>
-                    <a:pt x="8490857" y="1188720"/>
-                  </a:cubicBezTo>
-                  <a:cubicBezTo>
-                    <a:pt x="8256202" y="1201045"/>
-                    <a:pt x="8035177" y="1210646"/>
-                    <a:pt x="7654834" y="1188720"/>
-                  </a:cubicBezTo>
-                  <a:cubicBezTo>
-                    <a:pt x="7274491" y="1166794"/>
-                    <a:pt x="7247999" y="1183334"/>
-                    <a:pt x="7093131" y="1188720"/>
-                  </a:cubicBezTo>
-                  <a:cubicBezTo>
-                    <a:pt x="6938263" y="1194106"/>
-                    <a:pt x="6525467" y="1212159"/>
-                    <a:pt x="6257109" y="1188720"/>
-                  </a:cubicBezTo>
-                  <a:cubicBezTo>
-                    <a:pt x="5988751" y="1165281"/>
-                    <a:pt x="5802551" y="1215032"/>
-                    <a:pt x="5421086" y="1188720"/>
-                  </a:cubicBezTo>
-                  <a:cubicBezTo>
-                    <a:pt x="5039621" y="1162408"/>
-                    <a:pt x="4920561" y="1181195"/>
-                    <a:pt x="4676503" y="1188720"/>
-                  </a:cubicBezTo>
-                  <a:cubicBezTo>
-                    <a:pt x="4432445" y="1196245"/>
-                    <a:pt x="4258057" y="1206291"/>
-                    <a:pt x="4114800" y="1188720"/>
-                  </a:cubicBezTo>
-                  <a:cubicBezTo>
-                    <a:pt x="3971543" y="1171149"/>
-                    <a:pt x="3578801" y="1166524"/>
-                    <a:pt x="3278777" y="1188720"/>
-                  </a:cubicBezTo>
-                  <a:cubicBezTo>
-                    <a:pt x="2978753" y="1210916"/>
-                    <a:pt x="2755501" y="1195381"/>
-                    <a:pt x="2534194" y="1188720"/>
-                  </a:cubicBezTo>
-                  <a:cubicBezTo>
-                    <a:pt x="2312887" y="1182059"/>
-                    <a:pt x="2264168" y="1202675"/>
-                    <a:pt x="2155371" y="1188720"/>
-                  </a:cubicBezTo>
-                  <a:cubicBezTo>
-                    <a:pt x="2046574" y="1174765"/>
-                    <a:pt x="1820166" y="1178289"/>
-                    <a:pt x="1502229" y="1188720"/>
-                  </a:cubicBezTo>
-                  <a:cubicBezTo>
-                    <a:pt x="1184292" y="1199151"/>
-                    <a:pt x="1167452" y="1205896"/>
-                    <a:pt x="849086" y="1188720"/>
-                  </a:cubicBezTo>
-                  <a:cubicBezTo>
-                    <a:pt x="530720" y="1171544"/>
-                    <a:pt x="187960" y="1213602"/>
-                    <a:pt x="0" y="1188720"/>
-                  </a:cubicBezTo>
-                  <a:cubicBezTo>
-                    <a:pt x="15590" y="1013913"/>
-                    <a:pt x="-205" y="763496"/>
-                    <a:pt x="0" y="630022"/>
-                  </a:cubicBezTo>
-                  <a:cubicBezTo>
-                    <a:pt x="205" y="496548"/>
-                    <a:pt x="-4725" y="310909"/>
-                    <a:pt x="0" y="0"/>
-                  </a:cubicBezTo>
-                  <a:close/>
-                </a:path>
-              </a:pathLst>
-            </a:custGeom>
-            <a:grpFill/>
-            <a:ln w="25400">
-              <a:solidFill>
-                <a:srgbClr val="00ACC1"/>
-              </a:solidFill>
-              <a:prstDash val="solid"/>
-              <a:extLst>
-                <a:ext uri="{C807C97D-BFC1-408E-A445-0C87EB9F89A2}">
-                  <ask:lineSketchStyleProps xmlns:ask="http://schemas.microsoft.com/office/drawing/2018/sketchyshapes" sd="661058248">
-                    <a:prstGeom prst="rect">
-                      <a:avLst/>
-                    </a:prstGeom>
-                    <ask:type>
-                      <ask:lineSketchFreehand/>
-                    </ask:type>
-                  </ask:lineSketchStyleProps>
-                </a:ext>
-              </a:extLst>
-            </a:ln>
-          </p:spPr>
-          <p:txBody>
-            <a:bodyPr/>
-            <a:lstStyle/>
-            <a:p>
-              <a:endParaRPr lang="ru-RU" sz="2400" dirty="0"/>
-            </a:p>
-          </p:txBody>
-        </p:sp>
-        <p:sp>
-          <p:nvSpPr>
-            <p:cNvPr id="10" name="Text 8"/>
-            <p:cNvSpPr/>
-            <p:nvPr/>
-          </p:nvSpPr>
-          <p:spPr>
-            <a:xfrm>
-              <a:off x="665806" y="3931920"/>
-              <a:ext cx="6803436" cy="365760"/>
-            </a:xfrm>
-            <a:prstGeom prst="rect">
-              <a:avLst/>
-            </a:prstGeom>
-            <a:grpFill/>
-            <a:ln/>
-          </p:spPr>
-          <p:txBody>
-            <a:bodyPr wrap="square" rtlCol="0" anchor="ctr"/>
-            <a:lstStyle/>
-            <a:p>
-              <a:pPr marL="0" indent="0">
-                <a:buNone/>
-              </a:pPr>
-              <a:r>
-                <a:rPr lang="ru-RU" sz="2000" dirty="0"/>
-                <a:t>Администраторы и руководство агентства</a:t>
-              </a:r>
-              <a:endParaRPr lang="en-US" sz="2000" dirty="0"/>
-            </a:p>
-          </p:txBody>
-        </p:sp>
-        <p:sp>
-          <p:nvSpPr>
-            <p:cNvPr id="11" name="Text 9"/>
-            <p:cNvSpPr/>
-            <p:nvPr/>
-          </p:nvSpPr>
-          <p:spPr>
-            <a:xfrm>
-              <a:off x="274320" y="4389120"/>
-              <a:ext cx="8595360" cy="365760"/>
-            </a:xfrm>
-            <a:prstGeom prst="rect">
-              <a:avLst/>
-            </a:prstGeom>
-            <a:grpFill/>
-            <a:ln/>
-          </p:spPr>
-          <p:txBody>
-            <a:bodyPr wrap="square" rtlCol="0" anchor="ctr"/>
-            <a:lstStyle/>
-            <a:p>
-              <a:pPr marL="0" indent="0">
-                <a:buNone/>
-              </a:pPr>
-              <a:r>
-                <a:rPr lang="ru-RU" sz="1600" dirty="0"/>
-                <a:t>Используют аналитику, отчёты и контроль актуальности каталога.</a:t>
-              </a:r>
-              <a:endParaRPr lang="en-US" sz="1600" dirty="0"/>
-            </a:p>
-          </p:txBody>
-        </p:sp>
-      </p:grpSp>
-      <p:sp>
-        <p:nvSpPr>
-          <p:cNvPr id="12" name="Text 10"/>
-          <p:cNvSpPr>
-            <a:spLocks noGrp="1" noRot="1" noMove="1" noResize="1" noEditPoints="1" noAdjustHandles="1" noChangeArrowheads="1" noChangeShapeType="1"/>
-          </p:cNvSpPr>
-          <p:nvPr/>
-        </p:nvSpPr>
-        <p:spPr>
-          <a:xfrm>
-            <a:off x="8229600" y="4869180"/>
-            <a:ext cx="914400" cy="274320"/>
-          </a:xfrm>
-          <a:prstGeom prst="rect">
-            <a:avLst/>
-          </a:prstGeom>
-          <a:noFill/>
-          <a:ln/>
-        </p:spPr>
-        <p:txBody>
-          <a:bodyPr wrap="square" rtlCol="0" anchor="ctr"/>
-          <a:lstStyle/>
-          <a:p>
-            <a:pPr marL="0" indent="0" algn="r">
-              <a:buNone/>
-            </a:pPr>
-            <a:r>
-              <a:rPr lang="en-US" sz="1400" dirty="0">
-                <a:solidFill>
-                  <a:srgbClr val="666666"/>
-                </a:solidFill>
-              </a:rPr>
-              <a:t>2/8</a:t>
-            </a:r>
-            <a:endParaRPr lang="en-US" sz="1400" dirty="0"/>
-          </a:p>
-        </p:txBody>
-      </p:sp>
-      <p:pic>
-        <p:nvPicPr>
-          <p:cNvPr id="17" name="Рисунок 16" descr="Изображение выглядит как Шрифт, Графика, дизайн&#10;&#10;Содержимое, созданное искусственным интеллектом, может быть неверным.">
-            <a:extLst>
-              <a:ext uri="{FF2B5EF4-FFF2-40B4-BE49-F238E27FC236}">
-                <a16:creationId xmlns:a16="http://schemas.microsoft.com/office/drawing/2014/main" id="{D0EF28DD-F449-A516-2D4A-D209E50EFECC}"/>
-              </a:ext>
-            </a:extLst>
-          </p:cNvPr>
-          <p:cNvPicPr>
-            <a:picLocks noChangeAspect="1"/>
-          </p:cNvPicPr>
-          <p:nvPr/>
-        </p:nvPicPr>
-        <p:blipFill>
-          <a:blip r:embed="rId3"/>
-          <a:stretch>
-            <a:fillRect/>
-          </a:stretch>
-        </p:blipFill>
-        <p:spPr>
-          <a:xfrm>
-            <a:off x="1471536" y="947372"/>
-            <a:ext cx="300406" cy="277298"/>
-          </a:xfrm>
-          <a:prstGeom prst="rect">
-            <a:avLst/>
-          </a:prstGeom>
-        </p:spPr>
-      </p:pic>
-      <p:pic>
-        <p:nvPicPr>
-          <p:cNvPr id="21" name="Рисунок 20" descr="Изображение выглядит как логотип, символ, Графика, дизайн&#10;&#10;Содержимое, созданное искусственным интеллектом, может быть неверным.">
-            <a:extLst>
-              <a:ext uri="{FF2B5EF4-FFF2-40B4-BE49-F238E27FC236}">
-                <a16:creationId xmlns:a16="http://schemas.microsoft.com/office/drawing/2014/main" id="{58E39716-FE75-5A26-2BF0-AA610AA40716}"/>
-              </a:ext>
-            </a:extLst>
-          </p:cNvPr>
-          <p:cNvPicPr>
-            <a:picLocks noChangeAspect="1"/>
-          </p:cNvPicPr>
-          <p:nvPr/>
-        </p:nvPicPr>
-        <p:blipFill>
-          <a:blip r:embed="rId4"/>
-          <a:stretch>
-            <a:fillRect/>
-          </a:stretch>
-        </p:blipFill>
-        <p:spPr>
-          <a:xfrm>
-            <a:off x="1471536" y="2365131"/>
-            <a:ext cx="309489" cy="309489"/>
-          </a:xfrm>
-          <a:prstGeom prst="rect">
-            <a:avLst/>
-          </a:prstGeom>
-        </p:spPr>
-      </p:pic>
-      <p:pic>
-        <p:nvPicPr>
-          <p:cNvPr id="29" name="Рисунок 28" descr="Изображение выглядит как Графика, круг, Шрифт, символ&#10;&#10;Содержимое, созданное искусственным интеллектом, может быть неверным.">
-            <a:extLst>
-              <a:ext uri="{FF2B5EF4-FFF2-40B4-BE49-F238E27FC236}">
-                <a16:creationId xmlns:a16="http://schemas.microsoft.com/office/drawing/2014/main" id="{F9F65EB8-D563-CB0E-5C45-63804925FF7C}"/>
-              </a:ext>
-            </a:extLst>
-          </p:cNvPr>
-          <p:cNvPicPr>
-            <a:picLocks noChangeAspect="1"/>
-          </p:cNvPicPr>
-          <p:nvPr/>
-        </p:nvPicPr>
-        <p:blipFill>
-          <a:blip r:embed="rId5"/>
-          <a:stretch>
-            <a:fillRect/>
-          </a:stretch>
-        </p:blipFill>
-        <p:spPr>
-          <a:xfrm>
-            <a:off x="1471536" y="3778933"/>
-            <a:ext cx="309490" cy="309490"/>
-          </a:xfrm>
-          <a:prstGeom prst="rect">
-            <a:avLst/>
-          </a:prstGeom>
-        </p:spPr>
-      </p:pic>
-    </p:spTree>
-  </p:cSld>
-  <p:clrMapOvr>
-    <a:masterClrMapping/>
-  </p:clrMapOvr>
-</p:sld>
-</file>
-
-<file path=ppt/slides/slide5.xml><?xml version="1.0" encoding="utf-8"?>
 <p:sld xmlns:a="http://schemas.openxmlformats.org/drawingml/2006/main" xmlns:r="http://schemas.openxmlformats.org/officeDocument/2006/relationships" xmlns:p="http://schemas.openxmlformats.org/presentationml/2006/main">
   <p:cSld name="Slide 5">
     <p:spTree>
@@ -7589,7 +4905,7 @@
               </a:solidFill>
               <a:extLst>
                 <a:ext uri="{C807C97D-BFC1-408E-A445-0C87EB9F89A2}">
-                  <ask:lineSketchStyleProps xmlns:ask="http://schemas.microsoft.com/office/drawing/2018/sketchyshapes" sd="1219033472">
+                  <ask:lineSketchStyleProps xmlns:ask="http://schemas.microsoft.com/office/drawing/2018/sketchyshapes" xmlns="" sd="1219033472">
                     <a:prstGeom prst="rect">
                       <a:avLst/>
                     </a:prstGeom>
@@ -8277,7 +5593,7 @@
               </a:solidFill>
               <a:extLst>
                 <a:ext uri="{C807C97D-BFC1-408E-A445-0C87EB9F89A2}">
-                  <ask:lineSketchStyleProps xmlns:ask="http://schemas.microsoft.com/office/drawing/2018/sketchyshapes" sd="1219033472">
+                  <ask:lineSketchStyleProps xmlns:ask="http://schemas.microsoft.com/office/drawing/2018/sketchyshapes" xmlns="" sd="1219033472">
                     <a:prstGeom prst="rect">
                       <a:avLst/>
                     </a:prstGeom>
@@ -8966,7 +6282,7 @@
               </a:solidFill>
               <a:extLst>
                 <a:ext uri="{C807C97D-BFC1-408E-A445-0C87EB9F89A2}">
-                  <ask:lineSketchStyleProps xmlns:ask="http://schemas.microsoft.com/office/drawing/2018/sketchyshapes" sd="1219033472">
+                  <ask:lineSketchStyleProps xmlns:ask="http://schemas.microsoft.com/office/drawing/2018/sketchyshapes" xmlns="" sd="1219033472">
                     <a:prstGeom prst="rect">
                       <a:avLst/>
                     </a:prstGeom>
@@ -9133,12 +6449,28 @@
               <a:buNone/>
             </a:pPr>
             <a:r>
-              <a:rPr lang="en-US" sz="1400" dirty="0">
+              <a:rPr lang="ru-RU" sz="1400" dirty="0">
                 <a:solidFill>
                   <a:srgbClr val="666666"/>
                 </a:solidFill>
               </a:rPr>
-              <a:t>4/8</a:t>
+              <a:t>3</a:t>
+            </a:r>
+            <a:r>
+              <a:rPr lang="en-US" sz="1400" dirty="0" smtClean="0">
+                <a:solidFill>
+                  <a:srgbClr val="666666"/>
+                </a:solidFill>
+              </a:rPr>
+              <a:t>/</a:t>
+            </a:r>
+            <a:r>
+              <a:rPr lang="ru-RU" sz="1400" dirty="0" smtClean="0">
+                <a:solidFill>
+                  <a:srgbClr val="666666"/>
+                </a:solidFill>
+              </a:rPr>
+              <a:t>6</a:t>
             </a:r>
             <a:endParaRPr lang="en-US" sz="1400" dirty="0"/>
           </a:p>
@@ -9152,7 +6484,7 @@
 </p:sld>
 </file>
 
-<file path=ppt/slides/slide6.xml><?xml version="1.0" encoding="utf-8"?>
+<file path=ppt/slides/slide5.xml><?xml version="1.0" encoding="utf-8"?>
 <p:sld xmlns:a="http://schemas.openxmlformats.org/drawingml/2006/main" xmlns:r="http://schemas.openxmlformats.org/officeDocument/2006/relationships" xmlns:p="http://schemas.openxmlformats.org/presentationml/2006/main">
   <p:cSld name="Slide 6">
     <p:spTree>
@@ -9556,7 +6888,7 @@
             <a:prstDash val="solid"/>
             <a:extLst>
               <a:ext uri="{C807C97D-BFC1-408E-A445-0C87EB9F89A2}">
-                <ask:lineSketchStyleProps xmlns:ask="http://schemas.microsoft.com/office/drawing/2018/sketchyshapes" sd="2671490977">
+                <ask:lineSketchStyleProps xmlns:ask="http://schemas.microsoft.com/office/drawing/2018/sketchyshapes" xmlns="" sd="2671490977">
                   <a:prstGeom prst="rect">
                     <a:avLst/>
                   </a:prstGeom>
@@ -9919,7 +7251,7 @@
             <a:prstDash val="solid"/>
             <a:extLst>
               <a:ext uri="{C807C97D-BFC1-408E-A445-0C87EB9F89A2}">
-                <ask:lineSketchStyleProps xmlns:ask="http://schemas.microsoft.com/office/drawing/2018/sketchyshapes" sd="2694758939">
+                <ask:lineSketchStyleProps xmlns:ask="http://schemas.microsoft.com/office/drawing/2018/sketchyshapes" xmlns="" sd="2694758939">
                   <a:prstGeom prst="rect">
                     <a:avLst/>
                   </a:prstGeom>
@@ -10334,7 +7666,7 @@
             <a:prstDash val="solid"/>
             <a:extLst>
               <a:ext uri="{C807C97D-BFC1-408E-A445-0C87EB9F89A2}">
-                <ask:lineSketchStyleProps xmlns:ask="http://schemas.microsoft.com/office/drawing/2018/sketchyshapes" sd="1219033472">
+                <ask:lineSketchStyleProps xmlns:ask="http://schemas.microsoft.com/office/drawing/2018/sketchyshapes" xmlns="" sd="1219033472">
                   <a:prstGeom prst="rect">
                     <a:avLst/>
                   </a:prstGeom>
@@ -10687,7 +8019,7 @@
             <a:prstDash val="solid"/>
             <a:extLst>
               <a:ext uri="{C807C97D-BFC1-408E-A445-0C87EB9F89A2}">
-                <ask:lineSketchStyleProps xmlns:ask="http://schemas.microsoft.com/office/drawing/2018/sketchyshapes" sd="3989574929">
+                <ask:lineSketchStyleProps xmlns:ask="http://schemas.microsoft.com/office/drawing/2018/sketchyshapes" xmlns="" sd="3989574929">
                   <a:prstGeom prst="rect">
                     <a:avLst/>
                   </a:prstGeom>
@@ -11076,7 +8408,7 @@
             <a:prstDash val="solid"/>
             <a:extLst>
               <a:ext uri="{C807C97D-BFC1-408E-A445-0C87EB9F89A2}">
-                <ask:lineSketchStyleProps xmlns:ask="http://schemas.microsoft.com/office/drawing/2018/sketchyshapes" sd="3700506234">
+                <ask:lineSketchStyleProps xmlns:ask="http://schemas.microsoft.com/office/drawing/2018/sketchyshapes" xmlns="" sd="3700506234">
                   <a:prstGeom prst="rect">
                     <a:avLst/>
                   </a:prstGeom>
@@ -11439,7 +8771,7 @@
             <a:prstDash val="solid"/>
             <a:extLst>
               <a:ext uri="{C807C97D-BFC1-408E-A445-0C87EB9F89A2}">
-                <ask:lineSketchStyleProps xmlns:ask="http://schemas.microsoft.com/office/drawing/2018/sketchyshapes" sd="133579509">
+                <ask:lineSketchStyleProps xmlns:ask="http://schemas.microsoft.com/office/drawing/2018/sketchyshapes" xmlns="" sd="133579509">
                   <a:prstGeom prst="rect">
                     <a:avLst/>
                   </a:prstGeom>
@@ -11843,7 +9175,7 @@
             <a:prstDash val="solid"/>
             <a:extLst>
               <a:ext uri="{C807C97D-BFC1-408E-A445-0C87EB9F89A2}">
-                <ask:lineSketchStyleProps xmlns:ask="http://schemas.microsoft.com/office/drawing/2018/sketchyshapes" sd="142639777">
+                <ask:lineSketchStyleProps xmlns:ask="http://schemas.microsoft.com/office/drawing/2018/sketchyshapes" xmlns="" sd="142639777">
                   <a:prstGeom prst="rect">
                     <a:avLst/>
                   </a:prstGeom>
@@ -12206,7 +9538,7 @@
             <a:prstDash val="solid"/>
             <a:extLst>
               <a:ext uri="{C807C97D-BFC1-408E-A445-0C87EB9F89A2}">
-                <ask:lineSketchStyleProps xmlns:ask="http://schemas.microsoft.com/office/drawing/2018/sketchyshapes" sd="4234782577">
+                <ask:lineSketchStyleProps xmlns:ask="http://schemas.microsoft.com/office/drawing/2018/sketchyshapes" xmlns="" sd="4234782577">
                   <a:prstGeom prst="rect">
                     <a:avLst/>
                   </a:prstGeom>
@@ -12300,15 +9632,23 @@
                   <a:srgbClr val="666666"/>
                 </a:solidFill>
               </a:rPr>
-              <a:t>5</a:t>
+              <a:t>4</a:t>
             </a:r>
             <a:r>
-              <a:rPr lang="en-US" sz="2400" dirty="0">
+              <a:rPr lang="en-US" sz="2400" dirty="0" smtClean="0">
                 <a:solidFill>
                   <a:srgbClr val="666666"/>
                 </a:solidFill>
               </a:rPr>
-              <a:t>/8</a:t>
+              <a:t>/</a:t>
+            </a:r>
+            <a:r>
+              <a:rPr lang="ru-RU" sz="2400" dirty="0" smtClean="0">
+                <a:solidFill>
+                  <a:srgbClr val="666666"/>
+                </a:solidFill>
+              </a:rPr>
+              <a:t>6</a:t>
             </a:r>
             <a:endParaRPr lang="en-US" sz="2400" dirty="0"/>
           </a:p>
@@ -12682,7 +10022,7 @@
 </p:sld>
 </file>
 
-<file path=ppt/slides/slide7.xml><?xml version="1.0" encoding="utf-8"?>
+<file path=ppt/slides/slide6.xml><?xml version="1.0" encoding="utf-8"?>
 <p:sld xmlns:a="http://schemas.openxmlformats.org/drawingml/2006/main" xmlns:r="http://schemas.openxmlformats.org/officeDocument/2006/relationships" xmlns:p="http://schemas.openxmlformats.org/presentationml/2006/main">
   <p:cSld name="Slide 7">
     <p:spTree>
@@ -13076,7 +10416,7 @@
             <a:prstDash val="solid"/>
             <a:extLst>
               <a:ext uri="{C807C97D-BFC1-408E-A445-0C87EB9F89A2}">
-                <ask:lineSketchStyleProps xmlns:ask="http://schemas.microsoft.com/office/drawing/2018/sketchyshapes" sd="1219033472">
+                <ask:lineSketchStyleProps xmlns:ask="http://schemas.microsoft.com/office/drawing/2018/sketchyshapes" xmlns="" sd="1219033472">
                   <a:prstGeom prst="rect">
                     <a:avLst/>
                   </a:prstGeom>
@@ -13766,7 +11106,7 @@
               <a:prstDash val="solid"/>
               <a:extLst>
                 <a:ext uri="{C807C97D-BFC1-408E-A445-0C87EB9F89A2}">
-                  <ask:lineSketchStyleProps xmlns:ask="http://schemas.microsoft.com/office/drawing/2018/sketchyshapes" sd="2512980468">
+                  <ask:lineSketchStyleProps xmlns:ask="http://schemas.microsoft.com/office/drawing/2018/sketchyshapes" xmlns="" sd="2512980468">
                     <a:prstGeom prst="rect">
                       <a:avLst/>
                     </a:prstGeom>
@@ -14466,7 +11806,7 @@
             </a:solidFill>
             <a:extLst>
               <a:ext uri="{C807C97D-BFC1-408E-A445-0C87EB9F89A2}">
-                <ask:lineSketchStyleProps xmlns:ask="http://schemas.microsoft.com/office/drawing/2018/sketchyshapes" sd="3008917798">
+                <ask:lineSketchStyleProps xmlns:ask="http://schemas.microsoft.com/office/drawing/2018/sketchyshapes" xmlns="" sd="3008917798">
                   <a:prstGeom prst="rect">
                     <a:avLst/>
                   </a:prstGeom>
@@ -14566,7 +11906,7 @@
         </p:nvSpPr>
         <p:spPr>
           <a:xfrm>
-            <a:off x="5297708" y="4114800"/>
+            <a:off x="5266712" y="4090820"/>
             <a:ext cx="3474720" cy="365760"/>
           </a:xfrm>
           <a:prstGeom prst="rect">
@@ -14583,12 +11923,12 @@
               <a:buNone/>
             </a:pPr>
             <a:r>
-              <a:rPr lang="en-US" sz="1400" dirty="0">
+              <a:rPr lang="ru-RU" sz="1400" dirty="0" smtClean="0">
                 <a:solidFill>
                   <a:srgbClr val="333333"/>
                 </a:solidFill>
               </a:rPr>
-              <a:t>• Система отображения результатов</a:t>
+              <a:t>Модуль взаимодействия с пользователями</a:t>
             </a:r>
             <a:endParaRPr lang="en-US" sz="1400" dirty="0"/>
           </a:p>
@@ -14624,7 +11964,55 @@
                   <a:srgbClr val="333333"/>
                 </a:solidFill>
               </a:rPr>
-              <a:t>• Управление каталогом объектов</a:t>
+              <a:t>• </a:t>
+            </a:r>
+            <a:r>
+              <a:rPr lang="ru-RU" sz="1400" dirty="0" smtClean="0">
+                <a:solidFill>
+                  <a:srgbClr val="333333"/>
+                </a:solidFill>
+              </a:rPr>
+              <a:t>Модуль у</a:t>
+            </a:r>
+            <a:r>
+              <a:rPr lang="en-US" sz="1400" dirty="0" err="1" smtClean="0">
+                <a:solidFill>
+                  <a:srgbClr val="333333"/>
+                </a:solidFill>
+              </a:rPr>
+              <a:t>правление</a:t>
+            </a:r>
+            <a:r>
+              <a:rPr lang="en-US" sz="1400" dirty="0" smtClean="0">
+                <a:solidFill>
+                  <a:srgbClr val="333333"/>
+                </a:solidFill>
+              </a:rPr>
+              <a:t> </a:t>
+            </a:r>
+            <a:r>
+              <a:rPr lang="en-US" sz="1400" dirty="0" err="1" smtClean="0">
+                <a:solidFill>
+                  <a:srgbClr val="333333"/>
+                </a:solidFill>
+              </a:rPr>
+              <a:t>каталогом</a:t>
+            </a:r>
+            <a:r>
+              <a:rPr lang="en-US" sz="1400" dirty="0" smtClean="0">
+                <a:solidFill>
+                  <a:srgbClr val="333333"/>
+                </a:solidFill>
+              </a:rPr>
+              <a:t> </a:t>
+            </a:r>
+            <a:r>
+              <a:rPr lang="en-US" sz="1400" dirty="0" err="1" smtClean="0">
+                <a:solidFill>
+                  <a:srgbClr val="333333"/>
+                </a:solidFill>
+              </a:rPr>
+              <a:t>объектов</a:t>
             </a:r>
             <a:endParaRPr lang="en-US" sz="1400" dirty="0"/>
           </a:p>
@@ -14638,7 +12026,7 @@
         </p:nvSpPr>
         <p:spPr>
           <a:xfrm>
-            <a:off x="5452498" y="4572000"/>
+            <a:off x="5266712" y="4572000"/>
             <a:ext cx="3474720" cy="365760"/>
           </a:xfrm>
           <a:prstGeom prst="rect">
@@ -14663,12 +12051,12 @@
               <a:t> </a:t>
             </a:r>
             <a:r>
-              <a:rPr lang="ru-RU" sz="1400" dirty="0">
+              <a:rPr lang="ru-RU" sz="1400" dirty="0" smtClean="0">
                 <a:solidFill>
                   <a:srgbClr val="333333"/>
                 </a:solidFill>
               </a:rPr>
-              <a:t>Учёт обращений</a:t>
+              <a:t>Модуль администрирования и отчётности</a:t>
             </a:r>
             <a:endParaRPr lang="en-US" sz="1400" dirty="0">
               <a:solidFill>
@@ -14716,15 +12104,23 @@
                   <a:srgbClr val="666666"/>
                 </a:solidFill>
               </a:rPr>
-              <a:t>6</a:t>
+              <a:t>5</a:t>
             </a:r>
             <a:r>
-              <a:rPr lang="en-US" sz="1400" dirty="0">
+              <a:rPr lang="en-US" sz="1400" dirty="0" smtClean="0">
                 <a:solidFill>
                   <a:srgbClr val="666666"/>
                 </a:solidFill>
               </a:rPr>
-              <a:t>/8</a:t>
+              <a:t>/</a:t>
+            </a:r>
+            <a:r>
+              <a:rPr lang="ru-RU" sz="1400" dirty="0" smtClean="0">
+                <a:solidFill>
+                  <a:srgbClr val="666666"/>
+                </a:solidFill>
+              </a:rPr>
+              <a:t>6</a:t>
             </a:r>
             <a:endParaRPr lang="en-US" sz="1400" dirty="0"/>
           </a:p>
@@ -14842,7 +12238,7 @@
         </p:blipFill>
         <p:spPr>
           <a:xfrm>
-            <a:off x="5241333" y="4149090"/>
+            <a:off x="5084831" y="4146452"/>
             <a:ext cx="274320" cy="274320"/>
           </a:xfrm>
           <a:prstGeom prst="rect">
@@ -14872,7 +12268,7 @@
         </p:blipFill>
         <p:spPr>
           <a:xfrm>
-            <a:off x="5241333" y="4617720"/>
+            <a:off x="5084831" y="4617720"/>
             <a:ext cx="274320" cy="274320"/>
           </a:xfrm>
           <a:prstGeom prst="rect">
@@ -14948,2425 +12344,7 @@
 </p:sld>
 </file>
 
-<file path=ppt/slides/slide8.xml><?xml version="1.0" encoding="utf-8"?>
-<p:sld xmlns:a="http://schemas.openxmlformats.org/drawingml/2006/main" xmlns:r="http://schemas.openxmlformats.org/officeDocument/2006/relationships" xmlns:p="http://schemas.openxmlformats.org/presentationml/2006/main">
-  <p:cSld name="Slide 8">
-    <p:spTree>
-      <p:nvGrpSpPr>
-        <p:cNvPr id="1" name=""/>
-        <p:cNvGrpSpPr/>
-        <p:nvPr/>
-      </p:nvGrpSpPr>
-      <p:grpSpPr>
-        <a:xfrm>
-          <a:off x="0" y="0"/>
-          <a:ext cx="0" cy="0"/>
-          <a:chOff x="0" y="0"/>
-          <a:chExt cx="0" cy="0"/>
-        </a:xfrm>
-      </p:grpSpPr>
-      <p:sp>
-        <p:nvSpPr>
-          <p:cNvPr id="2" name="Text 0"/>
-          <p:cNvSpPr>
-            <a:spLocks noGrp="1" noRot="1" noMove="1" noResize="1" noEditPoints="1" noAdjustHandles="1" noChangeArrowheads="1" noChangeShapeType="1"/>
-          </p:cNvSpPr>
-          <p:nvPr/>
-        </p:nvSpPr>
-        <p:spPr>
-          <a:xfrm>
-            <a:off x="-914400" y="0"/>
-            <a:ext cx="10972800" cy="731520"/>
-          </a:xfrm>
-          <a:prstGeom prst="rect">
-            <a:avLst/>
-          </a:prstGeom>
-          <a:noFill/>
-          <a:ln/>
-        </p:spPr>
-        <p:txBody>
-          <a:bodyPr wrap="square" rtlCol="0" anchor="ctr"/>
-          <a:lstStyle/>
-          <a:p>
-            <a:pPr marL="0" indent="0" algn="ctr">
-              <a:buNone/>
-            </a:pPr>
-            <a:r>
-              <a:rPr lang="en-US" sz="3200" b="1" dirty="0">
-                <a:solidFill>
-                  <a:srgbClr val="006064"/>
-                </a:solidFill>
-              </a:rPr>
-              <a:t>Преимущества разработанного ПО</a:t>
-            </a:r>
-            <a:endParaRPr lang="en-US" sz="3200" dirty="0"/>
-          </a:p>
-        </p:txBody>
-      </p:sp>
-      <p:sp>
-        <p:nvSpPr>
-          <p:cNvPr id="3" name="Shape 1"/>
-          <p:cNvSpPr/>
-          <p:nvPr/>
-        </p:nvSpPr>
-        <p:spPr>
-          <a:xfrm>
-            <a:off x="730856" y="798830"/>
-            <a:ext cx="2911500" cy="1276973"/>
-          </a:xfrm>
-          <a:custGeom>
-            <a:avLst/>
-            <a:gdLst>
-              <a:gd name="connsiteX0" fmla="*/ 0 w 2911500"/>
-              <a:gd name="connsiteY0" fmla="*/ 0 h 1276973"/>
-              <a:gd name="connsiteX1" fmla="*/ 611415 w 2911500"/>
-              <a:gd name="connsiteY1" fmla="*/ 0 h 1276973"/>
-              <a:gd name="connsiteX2" fmla="*/ 1222830 w 2911500"/>
-              <a:gd name="connsiteY2" fmla="*/ 0 h 1276973"/>
-              <a:gd name="connsiteX3" fmla="*/ 1863360 w 2911500"/>
-              <a:gd name="connsiteY3" fmla="*/ 0 h 1276973"/>
-              <a:gd name="connsiteX4" fmla="*/ 2911500 w 2911500"/>
-              <a:gd name="connsiteY4" fmla="*/ 0 h 1276973"/>
-              <a:gd name="connsiteX5" fmla="*/ 2911500 w 2911500"/>
-              <a:gd name="connsiteY5" fmla="*/ 625717 h 1276973"/>
-              <a:gd name="connsiteX6" fmla="*/ 2911500 w 2911500"/>
-              <a:gd name="connsiteY6" fmla="*/ 1276973 h 1276973"/>
-              <a:gd name="connsiteX7" fmla="*/ 2416545 w 2911500"/>
-              <a:gd name="connsiteY7" fmla="*/ 1276973 h 1276973"/>
-              <a:gd name="connsiteX8" fmla="*/ 1776015 w 2911500"/>
-              <a:gd name="connsiteY8" fmla="*/ 1276973 h 1276973"/>
-              <a:gd name="connsiteX9" fmla="*/ 1164600 w 2911500"/>
-              <a:gd name="connsiteY9" fmla="*/ 1276973 h 1276973"/>
-              <a:gd name="connsiteX10" fmla="*/ 524070 w 2911500"/>
-              <a:gd name="connsiteY10" fmla="*/ 1276973 h 1276973"/>
-              <a:gd name="connsiteX11" fmla="*/ 0 w 2911500"/>
-              <a:gd name="connsiteY11" fmla="*/ 1276973 h 1276973"/>
-              <a:gd name="connsiteX12" fmla="*/ 0 w 2911500"/>
-              <a:gd name="connsiteY12" fmla="*/ 638487 h 1276973"/>
-              <a:gd name="connsiteX13" fmla="*/ 0 w 2911500"/>
-              <a:gd name="connsiteY13" fmla="*/ 0 h 1276973"/>
-            </a:gdLst>
-            <a:ahLst/>
-            <a:cxnLst>
-              <a:cxn ang="0">
-                <a:pos x="connsiteX0" y="connsiteY0"/>
-              </a:cxn>
-              <a:cxn ang="0">
-                <a:pos x="connsiteX1" y="connsiteY1"/>
-              </a:cxn>
-              <a:cxn ang="0">
-                <a:pos x="connsiteX2" y="connsiteY2"/>
-              </a:cxn>
-              <a:cxn ang="0">
-                <a:pos x="connsiteX3" y="connsiteY3"/>
-              </a:cxn>
-              <a:cxn ang="0">
-                <a:pos x="connsiteX4" y="connsiteY4"/>
-              </a:cxn>
-              <a:cxn ang="0">
-                <a:pos x="connsiteX5" y="connsiteY5"/>
-              </a:cxn>
-              <a:cxn ang="0">
-                <a:pos x="connsiteX6" y="connsiteY6"/>
-              </a:cxn>
-              <a:cxn ang="0">
-                <a:pos x="connsiteX7" y="connsiteY7"/>
-              </a:cxn>
-              <a:cxn ang="0">
-                <a:pos x="connsiteX8" y="connsiteY8"/>
-              </a:cxn>
-              <a:cxn ang="0">
-                <a:pos x="connsiteX9" y="connsiteY9"/>
-              </a:cxn>
-              <a:cxn ang="0">
-                <a:pos x="connsiteX10" y="connsiteY10"/>
-              </a:cxn>
-              <a:cxn ang="0">
-                <a:pos x="connsiteX11" y="connsiteY11"/>
-              </a:cxn>
-              <a:cxn ang="0">
-                <a:pos x="connsiteX12" y="connsiteY12"/>
-              </a:cxn>
-              <a:cxn ang="0">
-                <a:pos x="connsiteX13" y="connsiteY13"/>
-              </a:cxn>
-            </a:cxnLst>
-            <a:rect l="l" t="t" r="r" b="b"/>
-            <a:pathLst>
-              <a:path w="2911500" h="1276973" fill="none" extrusionOk="0">
-                <a:moveTo>
-                  <a:pt x="0" y="0"/>
-                </a:moveTo>
-                <a:cubicBezTo>
-                  <a:pt x="180338" y="7932"/>
-                  <a:pt x="408087" y="-15731"/>
-                  <a:pt x="611415" y="0"/>
-                </a:cubicBezTo>
-                <a:cubicBezTo>
-                  <a:pt x="814743" y="15731"/>
-                  <a:pt x="1023499" y="3878"/>
-                  <a:pt x="1222830" y="0"/>
-                </a:cubicBezTo>
-                <a:cubicBezTo>
-                  <a:pt x="1422162" y="-3878"/>
-                  <a:pt x="1722555" y="-5171"/>
-                  <a:pt x="1863360" y="0"/>
-                </a:cubicBezTo>
-                <a:cubicBezTo>
-                  <a:pt x="2004165" y="5171"/>
-                  <a:pt x="2422754" y="-17156"/>
-                  <a:pt x="2911500" y="0"/>
-                </a:cubicBezTo>
-                <a:cubicBezTo>
-                  <a:pt x="2917765" y="170231"/>
-                  <a:pt x="2882529" y="418947"/>
-                  <a:pt x="2911500" y="625717"/>
-                </a:cubicBezTo>
-                <a:cubicBezTo>
-                  <a:pt x="2940471" y="832487"/>
-                  <a:pt x="2882025" y="1095457"/>
-                  <a:pt x="2911500" y="1276973"/>
-                </a:cubicBezTo>
-                <a:cubicBezTo>
-                  <a:pt x="2795224" y="1290222"/>
-                  <a:pt x="2648449" y="1277588"/>
-                  <a:pt x="2416545" y="1276973"/>
-                </a:cubicBezTo>
-                <a:cubicBezTo>
-                  <a:pt x="2184641" y="1276358"/>
-                  <a:pt x="1963858" y="1279203"/>
-                  <a:pt x="1776015" y="1276973"/>
-                </a:cubicBezTo>
-                <a:cubicBezTo>
-                  <a:pt x="1588172" y="1274744"/>
-                  <a:pt x="1307617" y="1253992"/>
-                  <a:pt x="1164600" y="1276973"/>
-                </a:cubicBezTo>
-                <a:cubicBezTo>
-                  <a:pt x="1021584" y="1299954"/>
-                  <a:pt x="782936" y="1256359"/>
-                  <a:pt x="524070" y="1276973"/>
-                </a:cubicBezTo>
-                <a:cubicBezTo>
-                  <a:pt x="265204" y="1297588"/>
-                  <a:pt x="238549" y="1270569"/>
-                  <a:pt x="0" y="1276973"/>
-                </a:cubicBezTo>
-                <a:cubicBezTo>
-                  <a:pt x="31684" y="1096228"/>
-                  <a:pt x="1656" y="897024"/>
-                  <a:pt x="0" y="638487"/>
-                </a:cubicBezTo>
-                <a:cubicBezTo>
-                  <a:pt x="-1656" y="379950"/>
-                  <a:pt x="-27726" y="130251"/>
-                  <a:pt x="0" y="0"/>
-                </a:cubicBezTo>
-                <a:close/>
-              </a:path>
-              <a:path w="2911500" h="1276973" stroke="0" extrusionOk="0">
-                <a:moveTo>
-                  <a:pt x="0" y="0"/>
-                </a:moveTo>
-                <a:cubicBezTo>
-                  <a:pt x="142103" y="-4028"/>
-                  <a:pt x="291532" y="15591"/>
-                  <a:pt x="494955" y="0"/>
-                </a:cubicBezTo>
-                <a:cubicBezTo>
-                  <a:pt x="698378" y="-15591"/>
-                  <a:pt x="791341" y="-4060"/>
-                  <a:pt x="1019025" y="0"/>
-                </a:cubicBezTo>
-                <a:cubicBezTo>
-                  <a:pt x="1246709" y="4060"/>
-                  <a:pt x="1476709" y="-24415"/>
-                  <a:pt x="1630440" y="0"/>
-                </a:cubicBezTo>
-                <a:cubicBezTo>
-                  <a:pt x="1784171" y="24415"/>
-                  <a:pt x="2049655" y="1784"/>
-                  <a:pt x="2212740" y="0"/>
-                </a:cubicBezTo>
-                <a:cubicBezTo>
-                  <a:pt x="2375825" y="-1784"/>
-                  <a:pt x="2679129" y="7644"/>
-                  <a:pt x="2911500" y="0"/>
-                </a:cubicBezTo>
-                <a:cubicBezTo>
-                  <a:pt x="2926656" y="295721"/>
-                  <a:pt x="2889249" y="490024"/>
-                  <a:pt x="2911500" y="612947"/>
-                </a:cubicBezTo>
-                <a:cubicBezTo>
-                  <a:pt x="2933751" y="735870"/>
-                  <a:pt x="2892109" y="946094"/>
-                  <a:pt x="2911500" y="1276973"/>
-                </a:cubicBezTo>
-                <a:cubicBezTo>
-                  <a:pt x="2637850" y="1269902"/>
-                  <a:pt x="2509485" y="1301596"/>
-                  <a:pt x="2270970" y="1276973"/>
-                </a:cubicBezTo>
-                <a:cubicBezTo>
-                  <a:pt x="2032455" y="1252351"/>
-                  <a:pt x="1856040" y="1274370"/>
-                  <a:pt x="1630440" y="1276973"/>
-                </a:cubicBezTo>
-                <a:cubicBezTo>
-                  <a:pt x="1404840" y="1279577"/>
-                  <a:pt x="1237035" y="1299155"/>
-                  <a:pt x="1048140" y="1276973"/>
-                </a:cubicBezTo>
-                <a:cubicBezTo>
-                  <a:pt x="859245" y="1254791"/>
-                  <a:pt x="643824" y="1263719"/>
-                  <a:pt x="524070" y="1276973"/>
-                </a:cubicBezTo>
-                <a:cubicBezTo>
-                  <a:pt x="404316" y="1290228"/>
-                  <a:pt x="155709" y="1263982"/>
-                  <a:pt x="0" y="1276973"/>
-                </a:cubicBezTo>
-                <a:cubicBezTo>
-                  <a:pt x="-15573" y="1093107"/>
-                  <a:pt x="-26494" y="851311"/>
-                  <a:pt x="0" y="612947"/>
-                </a:cubicBezTo>
-                <a:cubicBezTo>
-                  <a:pt x="26494" y="374583"/>
-                  <a:pt x="25104" y="296556"/>
-                  <a:pt x="0" y="0"/>
-                </a:cubicBezTo>
-                <a:close/>
-              </a:path>
-            </a:pathLst>
-          </a:custGeom>
-          <a:gradFill>
-            <a:gsLst>
-              <a:gs pos="0">
-                <a:srgbClr val="B3EBF2"/>
-              </a:gs>
-              <a:gs pos="77000">
-                <a:srgbClr val="FEFEFE"/>
-              </a:gs>
-              <a:gs pos="26000">
-                <a:srgbClr val="FEFEFE"/>
-              </a:gs>
-              <a:gs pos="100000">
-                <a:srgbClr val="BEEEF4"/>
-              </a:gs>
-            </a:gsLst>
-            <a:path path="circle">
-              <a:fillToRect l="100000" t="100000"/>
-            </a:path>
-          </a:gradFill>
-          <a:ln w="25400">
-            <a:solidFill>
-              <a:srgbClr val="00ACC1"/>
-            </a:solidFill>
-            <a:prstDash val="solid"/>
-            <a:extLst>
-              <a:ext uri="{C807C97D-BFC1-408E-A445-0C87EB9F89A2}">
-                <ask:lineSketchStyleProps xmlns:ask="http://schemas.microsoft.com/office/drawing/2018/sketchyshapes" sd="1115298373">
-                  <a:prstGeom prst="rect">
-                    <a:avLst/>
-                  </a:prstGeom>
-                  <ask:type>
-                    <ask:lineSketchFreehand/>
-                  </ask:type>
-                </ask:lineSketchStyleProps>
-              </a:ext>
-            </a:extLst>
-          </a:ln>
-        </p:spPr>
-        <p:txBody>
-          <a:bodyPr/>
-          <a:lstStyle/>
-          <a:p>
-            <a:endParaRPr lang="ru-RU" dirty="0"/>
-          </a:p>
-        </p:txBody>
-      </p:sp>
-      <p:sp>
-        <p:nvSpPr>
-          <p:cNvPr id="4" name="Text 2"/>
-          <p:cNvSpPr/>
-          <p:nvPr/>
-        </p:nvSpPr>
-        <p:spPr>
-          <a:xfrm>
-            <a:off x="1357105" y="1627043"/>
-            <a:ext cx="4055165" cy="319243"/>
-          </a:xfrm>
-          <a:prstGeom prst="rect">
-            <a:avLst/>
-          </a:prstGeom>
-          <a:noFill/>
-          <a:ln/>
-        </p:spPr>
-        <p:txBody>
-          <a:bodyPr wrap="square" rtlCol="0" anchor="ctr"/>
-          <a:lstStyle/>
-          <a:p>
-            <a:pPr marL="0" indent="0">
-              <a:buNone/>
-            </a:pPr>
-            <a:r>
-              <a:rPr lang="ru-RU" sz="1600" b="1" dirty="0">
-                <a:solidFill>
-                  <a:srgbClr val="006064"/>
-                </a:solidFill>
-              </a:rPr>
-              <a:t>Быстрая работа</a:t>
-            </a:r>
-            <a:endParaRPr lang="en-US" sz="1600" dirty="0"/>
-          </a:p>
-        </p:txBody>
-      </p:sp>
-      <p:sp>
-        <p:nvSpPr>
-          <p:cNvPr id="5" name="Text 3"/>
-          <p:cNvSpPr/>
-          <p:nvPr/>
-        </p:nvSpPr>
-        <p:spPr>
-          <a:xfrm>
-            <a:off x="-10798535" y="1655059"/>
-            <a:ext cx="4055165" cy="638486"/>
-          </a:xfrm>
-          <a:prstGeom prst="rect">
-            <a:avLst/>
-          </a:prstGeom>
-          <a:noFill/>
-          <a:ln/>
-        </p:spPr>
-        <p:txBody>
-          <a:bodyPr wrap="square" rtlCol="0" anchor="ctr"/>
-          <a:lstStyle/>
-          <a:p>
-            <a:pPr marL="0" indent="0">
-              <a:buNone/>
-            </a:pPr>
-            <a:r>
-              <a:rPr lang="en-US" sz="1200" dirty="0">
-                <a:solidFill>
-                  <a:srgbClr val="333333"/>
-                </a:solidFill>
-              </a:rPr>
-              <a:t>Автоматический подбор объектов </a:t>
-            </a:r>
-            <a:r>
-              <a:rPr lang="en-US" sz="1200" dirty="0" err="1">
-                <a:solidFill>
-                  <a:srgbClr val="333333"/>
-                </a:solidFill>
-              </a:rPr>
-              <a:t>сокращает</a:t>
-            </a:r>
-            <a:r>
-              <a:rPr lang="en-US" sz="1200" dirty="0">
-                <a:solidFill>
-                  <a:srgbClr val="333333"/>
-                </a:solidFill>
-              </a:rPr>
-              <a:t> </a:t>
-            </a:r>
-            <a:r>
-              <a:rPr lang="en-US" sz="1200" dirty="0" err="1">
-                <a:solidFill>
-                  <a:srgbClr val="333333"/>
-                </a:solidFill>
-              </a:rPr>
-              <a:t>врея</a:t>
-            </a:r>
-            <a:r>
-              <a:rPr lang="en-US" sz="1200" dirty="0">
-                <a:solidFill>
-                  <a:srgbClr val="333333"/>
-                </a:solidFill>
-              </a:rPr>
-              <a:t> поиска с нескольких дней до нескольких минут</a:t>
-            </a:r>
-            <a:endParaRPr lang="en-US" sz="1200" dirty="0"/>
-          </a:p>
-        </p:txBody>
-      </p:sp>
-      <p:sp>
-        <p:nvSpPr>
-          <p:cNvPr id="6" name="Shape 4"/>
-          <p:cNvSpPr/>
-          <p:nvPr/>
-        </p:nvSpPr>
-        <p:spPr>
-          <a:xfrm>
-            <a:off x="5501640" y="798830"/>
-            <a:ext cx="2911500" cy="1276973"/>
-          </a:xfrm>
-          <a:custGeom>
-            <a:avLst/>
-            <a:gdLst>
-              <a:gd name="connsiteX0" fmla="*/ 0 w 2911500"/>
-              <a:gd name="connsiteY0" fmla="*/ 0 h 1276973"/>
-              <a:gd name="connsiteX1" fmla="*/ 553185 w 2911500"/>
-              <a:gd name="connsiteY1" fmla="*/ 0 h 1276973"/>
-              <a:gd name="connsiteX2" fmla="*/ 1048140 w 2911500"/>
-              <a:gd name="connsiteY2" fmla="*/ 0 h 1276973"/>
-              <a:gd name="connsiteX3" fmla="*/ 1630440 w 2911500"/>
-              <a:gd name="connsiteY3" fmla="*/ 0 h 1276973"/>
-              <a:gd name="connsiteX4" fmla="*/ 2183625 w 2911500"/>
-              <a:gd name="connsiteY4" fmla="*/ 0 h 1276973"/>
-              <a:gd name="connsiteX5" fmla="*/ 2911500 w 2911500"/>
-              <a:gd name="connsiteY5" fmla="*/ 0 h 1276973"/>
-              <a:gd name="connsiteX6" fmla="*/ 2911500 w 2911500"/>
-              <a:gd name="connsiteY6" fmla="*/ 612947 h 1276973"/>
-              <a:gd name="connsiteX7" fmla="*/ 2911500 w 2911500"/>
-              <a:gd name="connsiteY7" fmla="*/ 1276973 h 1276973"/>
-              <a:gd name="connsiteX8" fmla="*/ 2329200 w 2911500"/>
-              <a:gd name="connsiteY8" fmla="*/ 1276973 h 1276973"/>
-              <a:gd name="connsiteX9" fmla="*/ 1834245 w 2911500"/>
-              <a:gd name="connsiteY9" fmla="*/ 1276973 h 1276973"/>
-              <a:gd name="connsiteX10" fmla="*/ 1222830 w 2911500"/>
-              <a:gd name="connsiteY10" fmla="*/ 1276973 h 1276973"/>
-              <a:gd name="connsiteX11" fmla="*/ 727875 w 2911500"/>
-              <a:gd name="connsiteY11" fmla="*/ 1276973 h 1276973"/>
-              <a:gd name="connsiteX12" fmla="*/ 0 w 2911500"/>
-              <a:gd name="connsiteY12" fmla="*/ 1276973 h 1276973"/>
-              <a:gd name="connsiteX13" fmla="*/ 0 w 2911500"/>
-              <a:gd name="connsiteY13" fmla="*/ 664026 h 1276973"/>
-              <a:gd name="connsiteX14" fmla="*/ 0 w 2911500"/>
-              <a:gd name="connsiteY14" fmla="*/ 0 h 1276973"/>
-            </a:gdLst>
-            <a:ahLst/>
-            <a:cxnLst>
-              <a:cxn ang="0">
-                <a:pos x="connsiteX0" y="connsiteY0"/>
-              </a:cxn>
-              <a:cxn ang="0">
-                <a:pos x="connsiteX1" y="connsiteY1"/>
-              </a:cxn>
-              <a:cxn ang="0">
-                <a:pos x="connsiteX2" y="connsiteY2"/>
-              </a:cxn>
-              <a:cxn ang="0">
-                <a:pos x="connsiteX3" y="connsiteY3"/>
-              </a:cxn>
-              <a:cxn ang="0">
-                <a:pos x="connsiteX4" y="connsiteY4"/>
-              </a:cxn>
-              <a:cxn ang="0">
-                <a:pos x="connsiteX5" y="connsiteY5"/>
-              </a:cxn>
-              <a:cxn ang="0">
-                <a:pos x="connsiteX6" y="connsiteY6"/>
-              </a:cxn>
-              <a:cxn ang="0">
-                <a:pos x="connsiteX7" y="connsiteY7"/>
-              </a:cxn>
-              <a:cxn ang="0">
-                <a:pos x="connsiteX8" y="connsiteY8"/>
-              </a:cxn>
-              <a:cxn ang="0">
-                <a:pos x="connsiteX9" y="connsiteY9"/>
-              </a:cxn>
-              <a:cxn ang="0">
-                <a:pos x="connsiteX10" y="connsiteY10"/>
-              </a:cxn>
-              <a:cxn ang="0">
-                <a:pos x="connsiteX11" y="connsiteY11"/>
-              </a:cxn>
-              <a:cxn ang="0">
-                <a:pos x="connsiteX12" y="connsiteY12"/>
-              </a:cxn>
-              <a:cxn ang="0">
-                <a:pos x="connsiteX13" y="connsiteY13"/>
-              </a:cxn>
-              <a:cxn ang="0">
-                <a:pos x="connsiteX14" y="connsiteY14"/>
-              </a:cxn>
-            </a:cxnLst>
-            <a:rect l="l" t="t" r="r" b="b"/>
-            <a:pathLst>
-              <a:path w="2911500" h="1276973" fill="none" extrusionOk="0">
-                <a:moveTo>
-                  <a:pt x="0" y="0"/>
-                </a:moveTo>
-                <a:cubicBezTo>
-                  <a:pt x="244425" y="13808"/>
-                  <a:pt x="363027" y="450"/>
-                  <a:pt x="553185" y="0"/>
-                </a:cubicBezTo>
-                <a:cubicBezTo>
-                  <a:pt x="743344" y="-450"/>
-                  <a:pt x="832273" y="5998"/>
-                  <a:pt x="1048140" y="0"/>
-                </a:cubicBezTo>
-                <a:cubicBezTo>
-                  <a:pt x="1264008" y="-5998"/>
-                  <a:pt x="1393282" y="-27657"/>
-                  <a:pt x="1630440" y="0"/>
-                </a:cubicBezTo>
-                <a:cubicBezTo>
-                  <a:pt x="1867598" y="27657"/>
-                  <a:pt x="2056767" y="1839"/>
-                  <a:pt x="2183625" y="0"/>
-                </a:cubicBezTo>
-                <a:cubicBezTo>
-                  <a:pt x="2310484" y="-1839"/>
-                  <a:pt x="2554637" y="12952"/>
-                  <a:pt x="2911500" y="0"/>
-                </a:cubicBezTo>
-                <a:cubicBezTo>
-                  <a:pt x="2888641" y="257410"/>
-                  <a:pt x="2921839" y="351091"/>
-                  <a:pt x="2911500" y="612947"/>
-                </a:cubicBezTo>
-                <a:cubicBezTo>
-                  <a:pt x="2901161" y="874803"/>
-                  <a:pt x="2937881" y="1095561"/>
-                  <a:pt x="2911500" y="1276973"/>
-                </a:cubicBezTo>
-                <a:cubicBezTo>
-                  <a:pt x="2684022" y="1298909"/>
-                  <a:pt x="2485169" y="1297273"/>
-                  <a:pt x="2329200" y="1276973"/>
-                </a:cubicBezTo>
-                <a:cubicBezTo>
-                  <a:pt x="2173231" y="1256673"/>
-                  <a:pt x="2017806" y="1276420"/>
-                  <a:pt x="1834245" y="1276973"/>
-                </a:cubicBezTo>
-                <a:cubicBezTo>
-                  <a:pt x="1650684" y="1277526"/>
-                  <a:pt x="1512518" y="1300766"/>
-                  <a:pt x="1222830" y="1276973"/>
-                </a:cubicBezTo>
-                <a:cubicBezTo>
-                  <a:pt x="933143" y="1253180"/>
-                  <a:pt x="928857" y="1264272"/>
-                  <a:pt x="727875" y="1276973"/>
-                </a:cubicBezTo>
-                <a:cubicBezTo>
-                  <a:pt x="526894" y="1289674"/>
-                  <a:pt x="309343" y="1266741"/>
-                  <a:pt x="0" y="1276973"/>
-                </a:cubicBezTo>
-                <a:cubicBezTo>
-                  <a:pt x="-19487" y="1074554"/>
-                  <a:pt x="-1924" y="802109"/>
-                  <a:pt x="0" y="664026"/>
-                </a:cubicBezTo>
-                <a:cubicBezTo>
-                  <a:pt x="1924" y="525943"/>
-                  <a:pt x="8865" y="231091"/>
-                  <a:pt x="0" y="0"/>
-                </a:cubicBezTo>
-                <a:close/>
-              </a:path>
-              <a:path w="2911500" h="1276973" stroke="0" extrusionOk="0">
-                <a:moveTo>
-                  <a:pt x="0" y="0"/>
-                </a:moveTo>
-                <a:cubicBezTo>
-                  <a:pt x="298438" y="-21878"/>
-                  <a:pt x="360767" y="18652"/>
-                  <a:pt x="640530" y="0"/>
-                </a:cubicBezTo>
-                <a:cubicBezTo>
-                  <a:pt x="920293" y="-18652"/>
-                  <a:pt x="963743" y="-27115"/>
-                  <a:pt x="1193715" y="0"/>
-                </a:cubicBezTo>
-                <a:cubicBezTo>
-                  <a:pt x="1423688" y="27115"/>
-                  <a:pt x="1568570" y="-15379"/>
-                  <a:pt x="1688670" y="0"/>
-                </a:cubicBezTo>
-                <a:cubicBezTo>
-                  <a:pt x="1808770" y="15379"/>
-                  <a:pt x="2094433" y="11844"/>
-                  <a:pt x="2241855" y="0"/>
-                </a:cubicBezTo>
-                <a:cubicBezTo>
-                  <a:pt x="2389277" y="-11844"/>
-                  <a:pt x="2775786" y="-15920"/>
-                  <a:pt x="2911500" y="0"/>
-                </a:cubicBezTo>
-                <a:cubicBezTo>
-                  <a:pt x="2915821" y="169188"/>
-                  <a:pt x="2891157" y="369881"/>
-                  <a:pt x="2911500" y="612947"/>
-                </a:cubicBezTo>
-                <a:cubicBezTo>
-                  <a:pt x="2931843" y="856013"/>
-                  <a:pt x="2907873" y="1061977"/>
-                  <a:pt x="2911500" y="1276973"/>
-                </a:cubicBezTo>
-                <a:cubicBezTo>
-                  <a:pt x="2709220" y="1284741"/>
-                  <a:pt x="2598133" y="1278195"/>
-                  <a:pt x="2387430" y="1276973"/>
-                </a:cubicBezTo>
-                <a:cubicBezTo>
-                  <a:pt x="2176727" y="1275752"/>
-                  <a:pt x="2060445" y="1270986"/>
-                  <a:pt x="1863360" y="1276973"/>
-                </a:cubicBezTo>
-                <a:cubicBezTo>
-                  <a:pt x="1666275" y="1282961"/>
-                  <a:pt x="1445702" y="1264867"/>
-                  <a:pt x="1281060" y="1276973"/>
-                </a:cubicBezTo>
-                <a:cubicBezTo>
-                  <a:pt x="1116418" y="1289079"/>
-                  <a:pt x="853631" y="1261872"/>
-                  <a:pt x="727875" y="1276973"/>
-                </a:cubicBezTo>
-                <a:cubicBezTo>
-                  <a:pt x="602120" y="1292074"/>
-                  <a:pt x="263289" y="1310171"/>
-                  <a:pt x="0" y="1276973"/>
-                </a:cubicBezTo>
-                <a:cubicBezTo>
-                  <a:pt x="-24379" y="1027311"/>
-                  <a:pt x="-28176" y="808657"/>
-                  <a:pt x="0" y="664026"/>
-                </a:cubicBezTo>
-                <a:cubicBezTo>
-                  <a:pt x="28176" y="519395"/>
-                  <a:pt x="24136" y="202235"/>
-                  <a:pt x="0" y="0"/>
-                </a:cubicBezTo>
-                <a:close/>
-              </a:path>
-            </a:pathLst>
-          </a:custGeom>
-          <a:gradFill>
-            <a:gsLst>
-              <a:gs pos="0">
-                <a:srgbClr val="B3EBF2"/>
-              </a:gs>
-              <a:gs pos="77000">
-                <a:srgbClr val="FEFEFE"/>
-              </a:gs>
-              <a:gs pos="26000">
-                <a:srgbClr val="FEFEFE"/>
-              </a:gs>
-              <a:gs pos="100000">
-                <a:srgbClr val="BEEEF4"/>
-              </a:gs>
-            </a:gsLst>
-            <a:path path="circle">
-              <a:fillToRect l="100000" t="100000"/>
-            </a:path>
-          </a:gradFill>
-          <a:ln w="25400">
-            <a:solidFill>
-              <a:srgbClr val="00ACC1"/>
-            </a:solidFill>
-            <a:prstDash val="solid"/>
-            <a:extLst>
-              <a:ext uri="{C807C97D-BFC1-408E-A445-0C87EB9F89A2}">
-                <ask:lineSketchStyleProps xmlns:ask="http://schemas.microsoft.com/office/drawing/2018/sketchyshapes" sd="4100733447">
-                  <a:prstGeom prst="rect">
-                    <a:avLst/>
-                  </a:prstGeom>
-                  <ask:type>
-                    <ask:lineSketchFreehand/>
-                  </ask:type>
-                </ask:lineSketchStyleProps>
-              </a:ext>
-            </a:extLst>
-          </a:ln>
-        </p:spPr>
-        <p:txBody>
-          <a:bodyPr/>
-          <a:lstStyle/>
-          <a:p>
-            <a:endParaRPr lang="ru-RU" dirty="0"/>
-          </a:p>
-        </p:txBody>
-      </p:sp>
-      <p:sp>
-        <p:nvSpPr>
-          <p:cNvPr id="7" name="Text 5"/>
-          <p:cNvSpPr/>
-          <p:nvPr/>
-        </p:nvSpPr>
-        <p:spPr>
-          <a:xfrm>
-            <a:off x="6072808" y="1616540"/>
-            <a:ext cx="4055165" cy="319243"/>
-          </a:xfrm>
-          <a:prstGeom prst="rect">
-            <a:avLst/>
-          </a:prstGeom>
-          <a:noFill/>
-          <a:ln/>
-        </p:spPr>
-        <p:txBody>
-          <a:bodyPr wrap="square" rtlCol="0" anchor="ctr"/>
-          <a:lstStyle/>
-          <a:p>
-            <a:pPr marL="0" indent="0">
-              <a:buNone/>
-            </a:pPr>
-            <a:r>
-              <a:rPr lang="en-US" sz="1600" b="1" dirty="0">
-                <a:solidFill>
-                  <a:srgbClr val="006064"/>
-                </a:solidFill>
-              </a:rPr>
-              <a:t>Высокая точность</a:t>
-            </a:r>
-            <a:endParaRPr lang="en-US" sz="1600" dirty="0"/>
-          </a:p>
-        </p:txBody>
-      </p:sp>
-      <p:sp>
-        <p:nvSpPr>
-          <p:cNvPr id="8" name="Text 6"/>
-          <p:cNvSpPr/>
-          <p:nvPr/>
-        </p:nvSpPr>
-        <p:spPr>
-          <a:xfrm>
-            <a:off x="-6027751" y="1655059"/>
-            <a:ext cx="4055165" cy="638486"/>
-          </a:xfrm>
-          <a:prstGeom prst="rect">
-            <a:avLst/>
-          </a:prstGeom>
-          <a:noFill/>
-          <a:ln/>
-        </p:spPr>
-        <p:txBody>
-          <a:bodyPr wrap="square" rtlCol="0" anchor="ctr"/>
-          <a:lstStyle/>
-          <a:p>
-            <a:pPr marL="0" indent="0">
-              <a:buNone/>
-            </a:pPr>
-            <a:r>
-              <a:rPr lang="en-US" sz="1200" dirty="0">
-                <a:solidFill>
-                  <a:srgbClr val="333333"/>
-                </a:solidFill>
-              </a:rPr>
-              <a:t>Многокритериальная фильтрация обеспечивает максимальное соответствие требованиям пользователя</a:t>
-            </a:r>
-            <a:endParaRPr lang="en-US" sz="1200" dirty="0"/>
-          </a:p>
-        </p:txBody>
-      </p:sp>
-      <p:sp>
-        <p:nvSpPr>
-          <p:cNvPr id="9" name="Shape 7"/>
-          <p:cNvSpPr/>
-          <p:nvPr/>
-        </p:nvSpPr>
-        <p:spPr>
-          <a:xfrm>
-            <a:off x="730858" y="2315235"/>
-            <a:ext cx="2911500" cy="1276973"/>
-          </a:xfrm>
-          <a:custGeom>
-            <a:avLst/>
-            <a:gdLst>
-              <a:gd name="connsiteX0" fmla="*/ 0 w 2911500"/>
-              <a:gd name="connsiteY0" fmla="*/ 0 h 1276973"/>
-              <a:gd name="connsiteX1" fmla="*/ 640530 w 2911500"/>
-              <a:gd name="connsiteY1" fmla="*/ 0 h 1276973"/>
-              <a:gd name="connsiteX2" fmla="*/ 1251945 w 2911500"/>
-              <a:gd name="connsiteY2" fmla="*/ 0 h 1276973"/>
-              <a:gd name="connsiteX3" fmla="*/ 1863360 w 2911500"/>
-              <a:gd name="connsiteY3" fmla="*/ 0 h 1276973"/>
-              <a:gd name="connsiteX4" fmla="*/ 2358315 w 2911500"/>
-              <a:gd name="connsiteY4" fmla="*/ 0 h 1276973"/>
-              <a:gd name="connsiteX5" fmla="*/ 2911500 w 2911500"/>
-              <a:gd name="connsiteY5" fmla="*/ 0 h 1276973"/>
-              <a:gd name="connsiteX6" fmla="*/ 2911500 w 2911500"/>
-              <a:gd name="connsiteY6" fmla="*/ 651256 h 1276973"/>
-              <a:gd name="connsiteX7" fmla="*/ 2911500 w 2911500"/>
-              <a:gd name="connsiteY7" fmla="*/ 1276973 h 1276973"/>
-              <a:gd name="connsiteX8" fmla="*/ 2329200 w 2911500"/>
-              <a:gd name="connsiteY8" fmla="*/ 1276973 h 1276973"/>
-              <a:gd name="connsiteX9" fmla="*/ 1834245 w 2911500"/>
-              <a:gd name="connsiteY9" fmla="*/ 1276973 h 1276973"/>
-              <a:gd name="connsiteX10" fmla="*/ 1339290 w 2911500"/>
-              <a:gd name="connsiteY10" fmla="*/ 1276973 h 1276973"/>
-              <a:gd name="connsiteX11" fmla="*/ 727875 w 2911500"/>
-              <a:gd name="connsiteY11" fmla="*/ 1276973 h 1276973"/>
-              <a:gd name="connsiteX12" fmla="*/ 0 w 2911500"/>
-              <a:gd name="connsiteY12" fmla="*/ 1276973 h 1276973"/>
-              <a:gd name="connsiteX13" fmla="*/ 0 w 2911500"/>
-              <a:gd name="connsiteY13" fmla="*/ 612947 h 1276973"/>
-              <a:gd name="connsiteX14" fmla="*/ 0 w 2911500"/>
-              <a:gd name="connsiteY14" fmla="*/ 0 h 1276973"/>
-            </a:gdLst>
-            <a:ahLst/>
-            <a:cxnLst>
-              <a:cxn ang="0">
-                <a:pos x="connsiteX0" y="connsiteY0"/>
-              </a:cxn>
-              <a:cxn ang="0">
-                <a:pos x="connsiteX1" y="connsiteY1"/>
-              </a:cxn>
-              <a:cxn ang="0">
-                <a:pos x="connsiteX2" y="connsiteY2"/>
-              </a:cxn>
-              <a:cxn ang="0">
-                <a:pos x="connsiteX3" y="connsiteY3"/>
-              </a:cxn>
-              <a:cxn ang="0">
-                <a:pos x="connsiteX4" y="connsiteY4"/>
-              </a:cxn>
-              <a:cxn ang="0">
-                <a:pos x="connsiteX5" y="connsiteY5"/>
-              </a:cxn>
-              <a:cxn ang="0">
-                <a:pos x="connsiteX6" y="connsiteY6"/>
-              </a:cxn>
-              <a:cxn ang="0">
-                <a:pos x="connsiteX7" y="connsiteY7"/>
-              </a:cxn>
-              <a:cxn ang="0">
-                <a:pos x="connsiteX8" y="connsiteY8"/>
-              </a:cxn>
-              <a:cxn ang="0">
-                <a:pos x="connsiteX9" y="connsiteY9"/>
-              </a:cxn>
-              <a:cxn ang="0">
-                <a:pos x="connsiteX10" y="connsiteY10"/>
-              </a:cxn>
-              <a:cxn ang="0">
-                <a:pos x="connsiteX11" y="connsiteY11"/>
-              </a:cxn>
-              <a:cxn ang="0">
-                <a:pos x="connsiteX12" y="connsiteY12"/>
-              </a:cxn>
-              <a:cxn ang="0">
-                <a:pos x="connsiteX13" y="connsiteY13"/>
-              </a:cxn>
-              <a:cxn ang="0">
-                <a:pos x="connsiteX14" y="connsiteY14"/>
-              </a:cxn>
-            </a:cxnLst>
-            <a:rect l="l" t="t" r="r" b="b"/>
-            <a:pathLst>
-              <a:path w="2911500" h="1276973" fill="none" extrusionOk="0">
-                <a:moveTo>
-                  <a:pt x="0" y="0"/>
-                </a:moveTo>
-                <a:cubicBezTo>
-                  <a:pt x="286345" y="14508"/>
-                  <a:pt x="484028" y="17761"/>
-                  <a:pt x="640530" y="0"/>
-                </a:cubicBezTo>
-                <a:cubicBezTo>
-                  <a:pt x="797032" y="-17761"/>
-                  <a:pt x="1065565" y="-1819"/>
-                  <a:pt x="1251945" y="0"/>
-                </a:cubicBezTo>
-                <a:cubicBezTo>
-                  <a:pt x="1438325" y="1819"/>
-                  <a:pt x="1708072" y="-3137"/>
-                  <a:pt x="1863360" y="0"/>
-                </a:cubicBezTo>
-                <a:cubicBezTo>
-                  <a:pt x="2018648" y="3137"/>
-                  <a:pt x="2125973" y="-21568"/>
-                  <a:pt x="2358315" y="0"/>
-                </a:cubicBezTo>
-                <a:cubicBezTo>
-                  <a:pt x="2590657" y="21568"/>
-                  <a:pt x="2677624" y="-19302"/>
-                  <a:pt x="2911500" y="0"/>
-                </a:cubicBezTo>
-                <a:cubicBezTo>
-                  <a:pt x="2928236" y="324687"/>
-                  <a:pt x="2890240" y="474251"/>
-                  <a:pt x="2911500" y="651256"/>
-                </a:cubicBezTo>
-                <a:cubicBezTo>
-                  <a:pt x="2932760" y="828261"/>
-                  <a:pt x="2900349" y="1106747"/>
-                  <a:pt x="2911500" y="1276973"/>
-                </a:cubicBezTo>
-                <a:cubicBezTo>
-                  <a:pt x="2766454" y="1279644"/>
-                  <a:pt x="2597950" y="1248461"/>
-                  <a:pt x="2329200" y="1276973"/>
-                </a:cubicBezTo>
-                <a:cubicBezTo>
-                  <a:pt x="2060450" y="1305485"/>
-                  <a:pt x="2053859" y="1274845"/>
-                  <a:pt x="1834245" y="1276973"/>
-                </a:cubicBezTo>
-                <a:cubicBezTo>
-                  <a:pt x="1614632" y="1279101"/>
-                  <a:pt x="1538204" y="1264028"/>
-                  <a:pt x="1339290" y="1276973"/>
-                </a:cubicBezTo>
-                <a:cubicBezTo>
-                  <a:pt x="1140377" y="1289918"/>
-                  <a:pt x="993292" y="1284749"/>
-                  <a:pt x="727875" y="1276973"/>
-                </a:cubicBezTo>
-                <a:cubicBezTo>
-                  <a:pt x="462459" y="1269197"/>
-                  <a:pt x="356773" y="1283320"/>
-                  <a:pt x="0" y="1276973"/>
-                </a:cubicBezTo>
-                <a:cubicBezTo>
-                  <a:pt x="-25267" y="1113269"/>
-                  <a:pt x="14722" y="844735"/>
-                  <a:pt x="0" y="612947"/>
-                </a:cubicBezTo>
-                <a:cubicBezTo>
-                  <a:pt x="-14722" y="381159"/>
-                  <a:pt x="6526" y="141657"/>
-                  <a:pt x="0" y="0"/>
-                </a:cubicBezTo>
-                <a:close/>
-              </a:path>
-              <a:path w="2911500" h="1276973" stroke="0" extrusionOk="0">
-                <a:moveTo>
-                  <a:pt x="0" y="0"/>
-                </a:moveTo>
-                <a:cubicBezTo>
-                  <a:pt x="198315" y="12067"/>
-                  <a:pt x="380773" y="-3719"/>
-                  <a:pt x="553185" y="0"/>
-                </a:cubicBezTo>
-                <a:cubicBezTo>
-                  <a:pt x="725597" y="3719"/>
-                  <a:pt x="867656" y="11010"/>
-                  <a:pt x="1048140" y="0"/>
-                </a:cubicBezTo>
-                <a:cubicBezTo>
-                  <a:pt x="1228625" y="-11010"/>
-                  <a:pt x="1529405" y="-8712"/>
-                  <a:pt x="1688670" y="0"/>
-                </a:cubicBezTo>
-                <a:cubicBezTo>
-                  <a:pt x="1847935" y="8712"/>
-                  <a:pt x="2124539" y="-14317"/>
-                  <a:pt x="2241855" y="0"/>
-                </a:cubicBezTo>
-                <a:cubicBezTo>
-                  <a:pt x="2359172" y="14317"/>
-                  <a:pt x="2606560" y="-3541"/>
-                  <a:pt x="2911500" y="0"/>
-                </a:cubicBezTo>
-                <a:cubicBezTo>
-                  <a:pt x="2880937" y="321846"/>
-                  <a:pt x="2915766" y="392722"/>
-                  <a:pt x="2911500" y="664026"/>
-                </a:cubicBezTo>
-                <a:cubicBezTo>
-                  <a:pt x="2907234" y="935330"/>
-                  <a:pt x="2894801" y="1046817"/>
-                  <a:pt x="2911500" y="1276973"/>
-                </a:cubicBezTo>
-                <a:cubicBezTo>
-                  <a:pt x="2649744" y="1292703"/>
-                  <a:pt x="2446129" y="1271879"/>
-                  <a:pt x="2329200" y="1276973"/>
-                </a:cubicBezTo>
-                <a:cubicBezTo>
-                  <a:pt x="2212271" y="1282067"/>
-                  <a:pt x="2029019" y="1279256"/>
-                  <a:pt x="1834245" y="1276973"/>
-                </a:cubicBezTo>
-                <a:cubicBezTo>
-                  <a:pt x="1639471" y="1274690"/>
-                  <a:pt x="1377075" y="1262160"/>
-                  <a:pt x="1251945" y="1276973"/>
-                </a:cubicBezTo>
-                <a:cubicBezTo>
-                  <a:pt x="1126815" y="1291786"/>
-                  <a:pt x="833007" y="1261164"/>
-                  <a:pt x="669645" y="1276973"/>
-                </a:cubicBezTo>
-                <a:cubicBezTo>
-                  <a:pt x="506283" y="1292782"/>
-                  <a:pt x="169158" y="1277664"/>
-                  <a:pt x="0" y="1276973"/>
-                </a:cubicBezTo>
-                <a:cubicBezTo>
-                  <a:pt x="-6745" y="1121701"/>
-                  <a:pt x="-4464" y="824587"/>
-                  <a:pt x="0" y="612947"/>
-                </a:cubicBezTo>
-                <a:cubicBezTo>
-                  <a:pt x="4464" y="401307"/>
-                  <a:pt x="14612" y="278376"/>
-                  <a:pt x="0" y="0"/>
-                </a:cubicBezTo>
-                <a:close/>
-              </a:path>
-            </a:pathLst>
-          </a:custGeom>
-          <a:gradFill>
-            <a:gsLst>
-              <a:gs pos="0">
-                <a:srgbClr val="B3EBF2"/>
-              </a:gs>
-              <a:gs pos="77000">
-                <a:srgbClr val="FEFEFE"/>
-              </a:gs>
-              <a:gs pos="26000">
-                <a:srgbClr val="FEFEFE"/>
-              </a:gs>
-              <a:gs pos="100000">
-                <a:srgbClr val="BEEEF4"/>
-              </a:gs>
-            </a:gsLst>
-            <a:path path="circle">
-              <a:fillToRect l="100000" t="100000"/>
-            </a:path>
-          </a:gradFill>
-          <a:ln w="25400">
-            <a:solidFill>
-              <a:srgbClr val="00ACC1"/>
-            </a:solidFill>
-            <a:prstDash val="solid"/>
-            <a:extLst>
-              <a:ext uri="{C807C97D-BFC1-408E-A445-0C87EB9F89A2}">
-                <ask:lineSketchStyleProps xmlns:ask="http://schemas.microsoft.com/office/drawing/2018/sketchyshapes" sd="1219033472">
-                  <a:prstGeom prst="rect">
-                    <a:avLst/>
-                  </a:prstGeom>
-                  <ask:type>
-                    <ask:lineSketchFreehand/>
-                  </ask:type>
-                </ask:lineSketchStyleProps>
-              </a:ext>
-            </a:extLst>
-          </a:ln>
-        </p:spPr>
-        <p:txBody>
-          <a:bodyPr/>
-          <a:lstStyle/>
-          <a:p>
-            <a:endParaRPr lang="ru-RU"/>
-          </a:p>
-        </p:txBody>
-      </p:sp>
-      <p:sp>
-        <p:nvSpPr>
-          <p:cNvPr id="10" name="Text 8"/>
-          <p:cNvSpPr/>
-          <p:nvPr/>
-        </p:nvSpPr>
-        <p:spPr>
-          <a:xfrm>
-            <a:off x="730858" y="3132943"/>
-            <a:ext cx="4055165" cy="319243"/>
-          </a:xfrm>
-          <a:prstGeom prst="rect">
-            <a:avLst/>
-          </a:prstGeom>
-          <a:noFill/>
-          <a:ln/>
-        </p:spPr>
-        <p:txBody>
-          <a:bodyPr wrap="square" rtlCol="0" anchor="ctr"/>
-          <a:lstStyle/>
-          <a:p>
-            <a:pPr marL="0" indent="0">
-              <a:buNone/>
-            </a:pPr>
-            <a:r>
-              <a:rPr lang="en-US" sz="1600" b="1" dirty="0">
-                <a:solidFill>
-                  <a:srgbClr val="006064"/>
-                </a:solidFill>
-              </a:rPr>
-              <a:t>Повышение качества сервиса</a:t>
-            </a:r>
-            <a:endParaRPr lang="en-US" sz="1600" dirty="0"/>
-          </a:p>
-        </p:txBody>
-      </p:sp>
-      <p:sp>
-        <p:nvSpPr>
-          <p:cNvPr id="11" name="Text 9"/>
-          <p:cNvSpPr/>
-          <p:nvPr/>
-        </p:nvSpPr>
-        <p:spPr>
-          <a:xfrm>
-            <a:off x="-10798535" y="3171464"/>
-            <a:ext cx="4055165" cy="638486"/>
-          </a:xfrm>
-          <a:prstGeom prst="rect">
-            <a:avLst/>
-          </a:prstGeom>
-          <a:noFill/>
-          <a:ln/>
-        </p:spPr>
-        <p:txBody>
-          <a:bodyPr wrap="square" rtlCol="0" anchor="ctr"/>
-          <a:lstStyle/>
-          <a:p>
-            <a:pPr marL="0" indent="0">
-              <a:buNone/>
-            </a:pPr>
-            <a:r>
-              <a:rPr lang="en-US" sz="1200" dirty="0">
-                <a:solidFill>
-                  <a:srgbClr val="333333"/>
-                </a:solidFill>
-              </a:rPr>
-              <a:t>Улучшение пользовательского опыта за счет удобного и быстрого интерфейса</a:t>
-            </a:r>
-            <a:endParaRPr lang="en-US" sz="1200" dirty="0"/>
-          </a:p>
-        </p:txBody>
-      </p:sp>
-      <p:sp>
-        <p:nvSpPr>
-          <p:cNvPr id="12" name="Shape 10"/>
-          <p:cNvSpPr/>
-          <p:nvPr/>
-        </p:nvSpPr>
-        <p:spPr>
-          <a:xfrm>
-            <a:off x="5501641" y="2315235"/>
-            <a:ext cx="2911500" cy="1276973"/>
-          </a:xfrm>
-          <a:custGeom>
-            <a:avLst/>
-            <a:gdLst>
-              <a:gd name="connsiteX0" fmla="*/ 0 w 2911500"/>
-              <a:gd name="connsiteY0" fmla="*/ 0 h 1276973"/>
-              <a:gd name="connsiteX1" fmla="*/ 582300 w 2911500"/>
-              <a:gd name="connsiteY1" fmla="*/ 0 h 1276973"/>
-              <a:gd name="connsiteX2" fmla="*/ 1135485 w 2911500"/>
-              <a:gd name="connsiteY2" fmla="*/ 0 h 1276973"/>
-              <a:gd name="connsiteX3" fmla="*/ 1776015 w 2911500"/>
-              <a:gd name="connsiteY3" fmla="*/ 0 h 1276973"/>
-              <a:gd name="connsiteX4" fmla="*/ 2300085 w 2911500"/>
-              <a:gd name="connsiteY4" fmla="*/ 0 h 1276973"/>
-              <a:gd name="connsiteX5" fmla="*/ 2911500 w 2911500"/>
-              <a:gd name="connsiteY5" fmla="*/ 0 h 1276973"/>
-              <a:gd name="connsiteX6" fmla="*/ 2911500 w 2911500"/>
-              <a:gd name="connsiteY6" fmla="*/ 625717 h 1276973"/>
-              <a:gd name="connsiteX7" fmla="*/ 2911500 w 2911500"/>
-              <a:gd name="connsiteY7" fmla="*/ 1276973 h 1276973"/>
-              <a:gd name="connsiteX8" fmla="*/ 2358315 w 2911500"/>
-              <a:gd name="connsiteY8" fmla="*/ 1276973 h 1276973"/>
-              <a:gd name="connsiteX9" fmla="*/ 1746900 w 2911500"/>
-              <a:gd name="connsiteY9" fmla="*/ 1276973 h 1276973"/>
-              <a:gd name="connsiteX10" fmla="*/ 1164600 w 2911500"/>
-              <a:gd name="connsiteY10" fmla="*/ 1276973 h 1276973"/>
-              <a:gd name="connsiteX11" fmla="*/ 611415 w 2911500"/>
-              <a:gd name="connsiteY11" fmla="*/ 1276973 h 1276973"/>
-              <a:gd name="connsiteX12" fmla="*/ 0 w 2911500"/>
-              <a:gd name="connsiteY12" fmla="*/ 1276973 h 1276973"/>
-              <a:gd name="connsiteX13" fmla="*/ 0 w 2911500"/>
-              <a:gd name="connsiteY13" fmla="*/ 612947 h 1276973"/>
-              <a:gd name="connsiteX14" fmla="*/ 0 w 2911500"/>
-              <a:gd name="connsiteY14" fmla="*/ 0 h 1276973"/>
-            </a:gdLst>
-            <a:ahLst/>
-            <a:cxnLst>
-              <a:cxn ang="0">
-                <a:pos x="connsiteX0" y="connsiteY0"/>
-              </a:cxn>
-              <a:cxn ang="0">
-                <a:pos x="connsiteX1" y="connsiteY1"/>
-              </a:cxn>
-              <a:cxn ang="0">
-                <a:pos x="connsiteX2" y="connsiteY2"/>
-              </a:cxn>
-              <a:cxn ang="0">
-                <a:pos x="connsiteX3" y="connsiteY3"/>
-              </a:cxn>
-              <a:cxn ang="0">
-                <a:pos x="connsiteX4" y="connsiteY4"/>
-              </a:cxn>
-              <a:cxn ang="0">
-                <a:pos x="connsiteX5" y="connsiteY5"/>
-              </a:cxn>
-              <a:cxn ang="0">
-                <a:pos x="connsiteX6" y="connsiteY6"/>
-              </a:cxn>
-              <a:cxn ang="0">
-                <a:pos x="connsiteX7" y="connsiteY7"/>
-              </a:cxn>
-              <a:cxn ang="0">
-                <a:pos x="connsiteX8" y="connsiteY8"/>
-              </a:cxn>
-              <a:cxn ang="0">
-                <a:pos x="connsiteX9" y="connsiteY9"/>
-              </a:cxn>
-              <a:cxn ang="0">
-                <a:pos x="connsiteX10" y="connsiteY10"/>
-              </a:cxn>
-              <a:cxn ang="0">
-                <a:pos x="connsiteX11" y="connsiteY11"/>
-              </a:cxn>
-              <a:cxn ang="0">
-                <a:pos x="connsiteX12" y="connsiteY12"/>
-              </a:cxn>
-              <a:cxn ang="0">
-                <a:pos x="connsiteX13" y="connsiteY13"/>
-              </a:cxn>
-              <a:cxn ang="0">
-                <a:pos x="connsiteX14" y="connsiteY14"/>
-              </a:cxn>
-            </a:cxnLst>
-            <a:rect l="l" t="t" r="r" b="b"/>
-            <a:pathLst>
-              <a:path w="2911500" h="1276973" fill="none" extrusionOk="0">
-                <a:moveTo>
-                  <a:pt x="0" y="0"/>
-                </a:moveTo>
-                <a:cubicBezTo>
-                  <a:pt x="180528" y="24176"/>
-                  <a:pt x="302350" y="-19723"/>
-                  <a:pt x="582300" y="0"/>
-                </a:cubicBezTo>
-                <a:cubicBezTo>
-                  <a:pt x="862250" y="19723"/>
-                  <a:pt x="967112" y="26877"/>
-                  <a:pt x="1135485" y="0"/>
-                </a:cubicBezTo>
-                <a:cubicBezTo>
-                  <a:pt x="1303858" y="-26877"/>
-                  <a:pt x="1567075" y="14316"/>
-                  <a:pt x="1776015" y="0"/>
-                </a:cubicBezTo>
-                <a:cubicBezTo>
-                  <a:pt x="1984955" y="-14316"/>
-                  <a:pt x="2179952" y="25011"/>
-                  <a:pt x="2300085" y="0"/>
-                </a:cubicBezTo>
-                <a:cubicBezTo>
-                  <a:pt x="2420218" y="-25011"/>
-                  <a:pt x="2677196" y="11615"/>
-                  <a:pt x="2911500" y="0"/>
-                </a:cubicBezTo>
-                <a:cubicBezTo>
-                  <a:pt x="2887711" y="205621"/>
-                  <a:pt x="2933404" y="410077"/>
-                  <a:pt x="2911500" y="625717"/>
-                </a:cubicBezTo>
-                <a:cubicBezTo>
-                  <a:pt x="2889596" y="841357"/>
-                  <a:pt x="2925588" y="994002"/>
-                  <a:pt x="2911500" y="1276973"/>
-                </a:cubicBezTo>
-                <a:cubicBezTo>
-                  <a:pt x="2749363" y="1266283"/>
-                  <a:pt x="2473469" y="1301086"/>
-                  <a:pt x="2358315" y="1276973"/>
-                </a:cubicBezTo>
-                <a:cubicBezTo>
-                  <a:pt x="2243162" y="1252860"/>
-                  <a:pt x="1989224" y="1250070"/>
-                  <a:pt x="1746900" y="1276973"/>
-                </a:cubicBezTo>
-                <a:cubicBezTo>
-                  <a:pt x="1504577" y="1303876"/>
-                  <a:pt x="1350576" y="1261603"/>
-                  <a:pt x="1164600" y="1276973"/>
-                </a:cubicBezTo>
-                <a:cubicBezTo>
-                  <a:pt x="978624" y="1292343"/>
-                  <a:pt x="822431" y="1262785"/>
-                  <a:pt x="611415" y="1276973"/>
-                </a:cubicBezTo>
-                <a:cubicBezTo>
-                  <a:pt x="400400" y="1291161"/>
-                  <a:pt x="168481" y="1302976"/>
-                  <a:pt x="0" y="1276973"/>
-                </a:cubicBezTo>
-                <a:cubicBezTo>
-                  <a:pt x="-2073" y="1025096"/>
-                  <a:pt x="-28423" y="923218"/>
-                  <a:pt x="0" y="612947"/>
-                </a:cubicBezTo>
-                <a:cubicBezTo>
-                  <a:pt x="28423" y="302676"/>
-                  <a:pt x="2719" y="156876"/>
-                  <a:pt x="0" y="0"/>
-                </a:cubicBezTo>
-                <a:close/>
-              </a:path>
-              <a:path w="2911500" h="1276973" stroke="0" extrusionOk="0">
-                <a:moveTo>
-                  <a:pt x="0" y="0"/>
-                </a:moveTo>
-                <a:cubicBezTo>
-                  <a:pt x="255109" y="-15790"/>
-                  <a:pt x="426945" y="-13059"/>
-                  <a:pt x="553185" y="0"/>
-                </a:cubicBezTo>
-                <a:cubicBezTo>
-                  <a:pt x="679426" y="13059"/>
-                  <a:pt x="826718" y="-13186"/>
-                  <a:pt x="1077255" y="0"/>
-                </a:cubicBezTo>
-                <a:cubicBezTo>
-                  <a:pt x="1327792" y="13186"/>
-                  <a:pt x="1454779" y="30397"/>
-                  <a:pt x="1688670" y="0"/>
-                </a:cubicBezTo>
-                <a:cubicBezTo>
-                  <a:pt x="1922562" y="-30397"/>
-                  <a:pt x="2026205" y="16241"/>
-                  <a:pt x="2270970" y="0"/>
-                </a:cubicBezTo>
-                <a:cubicBezTo>
-                  <a:pt x="2515735" y="-16241"/>
-                  <a:pt x="2650590" y="-27896"/>
-                  <a:pt x="2911500" y="0"/>
-                </a:cubicBezTo>
-                <a:cubicBezTo>
-                  <a:pt x="2912859" y="218182"/>
-                  <a:pt x="2907291" y="385982"/>
-                  <a:pt x="2911500" y="625717"/>
-                </a:cubicBezTo>
-                <a:cubicBezTo>
-                  <a:pt x="2915709" y="865452"/>
-                  <a:pt x="2887920" y="1119055"/>
-                  <a:pt x="2911500" y="1276973"/>
-                </a:cubicBezTo>
-                <a:cubicBezTo>
-                  <a:pt x="2672567" y="1296724"/>
-                  <a:pt x="2552542" y="1264312"/>
-                  <a:pt x="2358315" y="1276973"/>
-                </a:cubicBezTo>
-                <a:cubicBezTo>
-                  <a:pt x="2164088" y="1289634"/>
-                  <a:pt x="1882644" y="1269999"/>
-                  <a:pt x="1717785" y="1276973"/>
-                </a:cubicBezTo>
-                <a:cubicBezTo>
-                  <a:pt x="1552926" y="1283948"/>
-                  <a:pt x="1435615" y="1257892"/>
-                  <a:pt x="1164600" y="1276973"/>
-                </a:cubicBezTo>
-                <a:cubicBezTo>
-                  <a:pt x="893586" y="1296054"/>
-                  <a:pt x="716272" y="1253155"/>
-                  <a:pt x="553185" y="1276973"/>
-                </a:cubicBezTo>
-                <a:cubicBezTo>
-                  <a:pt x="390099" y="1300791"/>
-                  <a:pt x="163137" y="1293404"/>
-                  <a:pt x="0" y="1276973"/>
-                </a:cubicBezTo>
-                <a:cubicBezTo>
-                  <a:pt x="-28509" y="960681"/>
-                  <a:pt x="-22238" y="911450"/>
-                  <a:pt x="0" y="638487"/>
-                </a:cubicBezTo>
-                <a:cubicBezTo>
-                  <a:pt x="22238" y="365524"/>
-                  <a:pt x="29815" y="138701"/>
-                  <a:pt x="0" y="0"/>
-                </a:cubicBezTo>
-                <a:close/>
-              </a:path>
-            </a:pathLst>
-          </a:custGeom>
-          <a:gradFill>
-            <a:gsLst>
-              <a:gs pos="0">
-                <a:srgbClr val="B3EBF2"/>
-              </a:gs>
-              <a:gs pos="77000">
-                <a:srgbClr val="FEFEFE"/>
-              </a:gs>
-              <a:gs pos="26000">
-                <a:srgbClr val="FEFEFE"/>
-              </a:gs>
-              <a:gs pos="100000">
-                <a:srgbClr val="BEEEF4"/>
-              </a:gs>
-            </a:gsLst>
-            <a:path path="circle">
-              <a:fillToRect l="100000" t="100000"/>
-            </a:path>
-          </a:gradFill>
-          <a:ln w="25400">
-            <a:solidFill>
-              <a:srgbClr val="00ACC1"/>
-            </a:solidFill>
-            <a:prstDash val="solid"/>
-            <a:extLst>
-              <a:ext uri="{C807C97D-BFC1-408E-A445-0C87EB9F89A2}">
-                <ask:lineSketchStyleProps xmlns:ask="http://schemas.microsoft.com/office/drawing/2018/sketchyshapes" sd="3701050100">
-                  <a:prstGeom prst="rect">
-                    <a:avLst/>
-                  </a:prstGeom>
-                  <ask:type>
-                    <ask:lineSketchFreehand/>
-                  </ask:type>
-                </ask:lineSketchStyleProps>
-              </a:ext>
-            </a:extLst>
-          </a:ln>
-        </p:spPr>
-        <p:txBody>
-          <a:bodyPr/>
-          <a:lstStyle/>
-          <a:p>
-            <a:endParaRPr lang="ru-RU" dirty="0"/>
-          </a:p>
-        </p:txBody>
-      </p:sp>
-      <p:sp>
-        <p:nvSpPr>
-          <p:cNvPr id="13" name="Text 11"/>
-          <p:cNvSpPr/>
-          <p:nvPr/>
-        </p:nvSpPr>
-        <p:spPr>
-          <a:xfrm>
-            <a:off x="6003235" y="3157347"/>
-            <a:ext cx="4055165" cy="319243"/>
-          </a:xfrm>
-          <a:prstGeom prst="rect">
-            <a:avLst/>
-          </a:prstGeom>
-          <a:noFill/>
-          <a:ln/>
-        </p:spPr>
-        <p:txBody>
-          <a:bodyPr wrap="square" rtlCol="0" anchor="ctr"/>
-          <a:lstStyle/>
-          <a:p>
-            <a:pPr marL="0" indent="0">
-              <a:buNone/>
-            </a:pPr>
-            <a:r>
-              <a:rPr lang="en-US" sz="1600" b="1" dirty="0">
-                <a:solidFill>
-                  <a:srgbClr val="006064"/>
-                </a:solidFill>
-              </a:rPr>
-              <a:t>Масштабируемость</a:t>
-            </a:r>
-            <a:endParaRPr lang="en-US" sz="1600" dirty="0"/>
-          </a:p>
-        </p:txBody>
-      </p:sp>
-      <p:sp>
-        <p:nvSpPr>
-          <p:cNvPr id="14" name="Text 12"/>
-          <p:cNvSpPr/>
-          <p:nvPr/>
-        </p:nvSpPr>
-        <p:spPr>
-          <a:xfrm>
-            <a:off x="-6027752" y="3171464"/>
-            <a:ext cx="4055165" cy="638486"/>
-          </a:xfrm>
-          <a:prstGeom prst="rect">
-            <a:avLst/>
-          </a:prstGeom>
-          <a:noFill/>
-          <a:ln/>
-        </p:spPr>
-        <p:txBody>
-          <a:bodyPr wrap="square" rtlCol="0" anchor="ctr"/>
-          <a:lstStyle/>
-          <a:p>
-            <a:pPr marL="0" indent="0">
-              <a:buNone/>
-            </a:pPr>
-            <a:r>
-              <a:rPr lang="en-US" sz="1200" dirty="0">
-                <a:solidFill>
-                  <a:srgbClr val="333333"/>
-                </a:solidFill>
-              </a:rPr>
-              <a:t>Модульная архитектура позволяет легко расширять функциональность системы</a:t>
-            </a:r>
-            <a:endParaRPr lang="en-US" sz="1200" dirty="0"/>
-          </a:p>
-        </p:txBody>
-      </p:sp>
-      <p:sp>
-        <p:nvSpPr>
-          <p:cNvPr id="15" name="Shape 13"/>
-          <p:cNvSpPr/>
-          <p:nvPr/>
-        </p:nvSpPr>
-        <p:spPr>
-          <a:xfrm>
-            <a:off x="1554480" y="3831640"/>
-            <a:ext cx="6035040" cy="1037540"/>
-          </a:xfrm>
-          <a:custGeom>
-            <a:avLst/>
-            <a:gdLst>
-              <a:gd name="connsiteX0" fmla="*/ 0 w 6035040"/>
-              <a:gd name="connsiteY0" fmla="*/ 0 h 1037540"/>
-              <a:gd name="connsiteX1" fmla="*/ 791261 w 6035040"/>
-              <a:gd name="connsiteY1" fmla="*/ 0 h 1037540"/>
-              <a:gd name="connsiteX2" fmla="*/ 1522171 w 6035040"/>
-              <a:gd name="connsiteY2" fmla="*/ 0 h 1037540"/>
-              <a:gd name="connsiteX3" fmla="*/ 2192731 w 6035040"/>
-              <a:gd name="connsiteY3" fmla="*/ 0 h 1037540"/>
-              <a:gd name="connsiteX4" fmla="*/ 2863291 w 6035040"/>
-              <a:gd name="connsiteY4" fmla="*/ 0 h 1037540"/>
-              <a:gd name="connsiteX5" fmla="*/ 3654552 w 6035040"/>
-              <a:gd name="connsiteY5" fmla="*/ 0 h 1037540"/>
-              <a:gd name="connsiteX6" fmla="*/ 4385462 w 6035040"/>
-              <a:gd name="connsiteY6" fmla="*/ 0 h 1037540"/>
-              <a:gd name="connsiteX7" fmla="*/ 4874971 w 6035040"/>
-              <a:gd name="connsiteY7" fmla="*/ 0 h 1037540"/>
-              <a:gd name="connsiteX8" fmla="*/ 6035040 w 6035040"/>
-              <a:gd name="connsiteY8" fmla="*/ 0 h 1037540"/>
-              <a:gd name="connsiteX9" fmla="*/ 6035040 w 6035040"/>
-              <a:gd name="connsiteY9" fmla="*/ 539521 h 1037540"/>
-              <a:gd name="connsiteX10" fmla="*/ 6035040 w 6035040"/>
-              <a:gd name="connsiteY10" fmla="*/ 1037540 h 1037540"/>
-              <a:gd name="connsiteX11" fmla="*/ 5485181 w 6035040"/>
-              <a:gd name="connsiteY11" fmla="*/ 1037540 h 1037540"/>
-              <a:gd name="connsiteX12" fmla="*/ 4693920 w 6035040"/>
-              <a:gd name="connsiteY12" fmla="*/ 1037540 h 1037540"/>
-              <a:gd name="connsiteX13" fmla="*/ 4083710 w 6035040"/>
-              <a:gd name="connsiteY13" fmla="*/ 1037540 h 1037540"/>
-              <a:gd name="connsiteX14" fmla="*/ 3292450 w 6035040"/>
-              <a:gd name="connsiteY14" fmla="*/ 1037540 h 1037540"/>
-              <a:gd name="connsiteX15" fmla="*/ 2742590 w 6035040"/>
-              <a:gd name="connsiteY15" fmla="*/ 1037540 h 1037540"/>
-              <a:gd name="connsiteX16" fmla="*/ 2253082 w 6035040"/>
-              <a:gd name="connsiteY16" fmla="*/ 1037540 h 1037540"/>
-              <a:gd name="connsiteX17" fmla="*/ 1763573 w 6035040"/>
-              <a:gd name="connsiteY17" fmla="*/ 1037540 h 1037540"/>
-              <a:gd name="connsiteX18" fmla="*/ 1032662 w 6035040"/>
-              <a:gd name="connsiteY18" fmla="*/ 1037540 h 1037540"/>
-              <a:gd name="connsiteX19" fmla="*/ 0 w 6035040"/>
-              <a:gd name="connsiteY19" fmla="*/ 1037540 h 1037540"/>
-              <a:gd name="connsiteX20" fmla="*/ 0 w 6035040"/>
-              <a:gd name="connsiteY20" fmla="*/ 518770 h 1037540"/>
-              <a:gd name="connsiteX21" fmla="*/ 0 w 6035040"/>
-              <a:gd name="connsiteY21" fmla="*/ 0 h 1037540"/>
-            </a:gdLst>
-            <a:ahLst/>
-            <a:cxnLst>
-              <a:cxn ang="0">
-                <a:pos x="connsiteX0" y="connsiteY0"/>
-              </a:cxn>
-              <a:cxn ang="0">
-                <a:pos x="connsiteX1" y="connsiteY1"/>
-              </a:cxn>
-              <a:cxn ang="0">
-                <a:pos x="connsiteX2" y="connsiteY2"/>
-              </a:cxn>
-              <a:cxn ang="0">
-                <a:pos x="connsiteX3" y="connsiteY3"/>
-              </a:cxn>
-              <a:cxn ang="0">
-                <a:pos x="connsiteX4" y="connsiteY4"/>
-              </a:cxn>
-              <a:cxn ang="0">
-                <a:pos x="connsiteX5" y="connsiteY5"/>
-              </a:cxn>
-              <a:cxn ang="0">
-                <a:pos x="connsiteX6" y="connsiteY6"/>
-              </a:cxn>
-              <a:cxn ang="0">
-                <a:pos x="connsiteX7" y="connsiteY7"/>
-              </a:cxn>
-              <a:cxn ang="0">
-                <a:pos x="connsiteX8" y="connsiteY8"/>
-              </a:cxn>
-              <a:cxn ang="0">
-                <a:pos x="connsiteX9" y="connsiteY9"/>
-              </a:cxn>
-              <a:cxn ang="0">
-                <a:pos x="connsiteX10" y="connsiteY10"/>
-              </a:cxn>
-              <a:cxn ang="0">
-                <a:pos x="connsiteX11" y="connsiteY11"/>
-              </a:cxn>
-              <a:cxn ang="0">
-                <a:pos x="connsiteX12" y="connsiteY12"/>
-              </a:cxn>
-              <a:cxn ang="0">
-                <a:pos x="connsiteX13" y="connsiteY13"/>
-              </a:cxn>
-              <a:cxn ang="0">
-                <a:pos x="connsiteX14" y="connsiteY14"/>
-              </a:cxn>
-              <a:cxn ang="0">
-                <a:pos x="connsiteX15" y="connsiteY15"/>
-              </a:cxn>
-              <a:cxn ang="0">
-                <a:pos x="connsiteX16" y="connsiteY16"/>
-              </a:cxn>
-              <a:cxn ang="0">
-                <a:pos x="connsiteX17" y="connsiteY17"/>
-              </a:cxn>
-              <a:cxn ang="0">
-                <a:pos x="connsiteX18" y="connsiteY18"/>
-              </a:cxn>
-              <a:cxn ang="0">
-                <a:pos x="connsiteX19" y="connsiteY19"/>
-              </a:cxn>
-              <a:cxn ang="0">
-                <a:pos x="connsiteX20" y="connsiteY20"/>
-              </a:cxn>
-              <a:cxn ang="0">
-                <a:pos x="connsiteX21" y="connsiteY21"/>
-              </a:cxn>
-            </a:cxnLst>
-            <a:rect l="l" t="t" r="r" b="b"/>
-            <a:pathLst>
-              <a:path w="6035040" h="1037540" fill="none" extrusionOk="0">
-                <a:moveTo>
-                  <a:pt x="0" y="0"/>
-                </a:moveTo>
-                <a:cubicBezTo>
-                  <a:pt x="278874" y="-14899"/>
-                  <a:pt x="540854" y="-16632"/>
-                  <a:pt x="791261" y="0"/>
-                </a:cubicBezTo>
-                <a:cubicBezTo>
-                  <a:pt x="1041668" y="16632"/>
-                  <a:pt x="1206042" y="28762"/>
-                  <a:pt x="1522171" y="0"/>
-                </a:cubicBezTo>
-                <a:cubicBezTo>
-                  <a:pt x="1838300" y="-28762"/>
-                  <a:pt x="2022058" y="30996"/>
-                  <a:pt x="2192731" y="0"/>
-                </a:cubicBezTo>
-                <a:cubicBezTo>
-                  <a:pt x="2363404" y="-30996"/>
-                  <a:pt x="2528426" y="22047"/>
-                  <a:pt x="2863291" y="0"/>
-                </a:cubicBezTo>
-                <a:cubicBezTo>
-                  <a:pt x="3198156" y="-22047"/>
-                  <a:pt x="3348325" y="33861"/>
-                  <a:pt x="3654552" y="0"/>
-                </a:cubicBezTo>
-                <a:cubicBezTo>
-                  <a:pt x="3960779" y="-33861"/>
-                  <a:pt x="4059016" y="-8448"/>
-                  <a:pt x="4385462" y="0"/>
-                </a:cubicBezTo>
-                <a:cubicBezTo>
-                  <a:pt x="4711908" y="8448"/>
-                  <a:pt x="4730381" y="12856"/>
-                  <a:pt x="4874971" y="0"/>
-                </a:cubicBezTo>
-                <a:cubicBezTo>
-                  <a:pt x="5019561" y="-12856"/>
-                  <a:pt x="5717730" y="-21572"/>
-                  <a:pt x="6035040" y="0"/>
-                </a:cubicBezTo>
-                <a:cubicBezTo>
-                  <a:pt x="6018556" y="266383"/>
-                  <a:pt x="6057943" y="348955"/>
-                  <a:pt x="6035040" y="539521"/>
-                </a:cubicBezTo>
-                <a:cubicBezTo>
-                  <a:pt x="6012137" y="730087"/>
-                  <a:pt x="6013320" y="834777"/>
-                  <a:pt x="6035040" y="1037540"/>
-                </a:cubicBezTo>
-                <a:cubicBezTo>
-                  <a:pt x="5828333" y="1025040"/>
-                  <a:pt x="5698315" y="1011638"/>
-                  <a:pt x="5485181" y="1037540"/>
-                </a:cubicBezTo>
-                <a:cubicBezTo>
-                  <a:pt x="5272047" y="1063442"/>
-                  <a:pt x="4982916" y="1040136"/>
-                  <a:pt x="4693920" y="1037540"/>
-                </a:cubicBezTo>
-                <a:cubicBezTo>
-                  <a:pt x="4404924" y="1034944"/>
-                  <a:pt x="4208333" y="1017705"/>
-                  <a:pt x="4083710" y="1037540"/>
-                </a:cubicBezTo>
-                <a:cubicBezTo>
-                  <a:pt x="3959087" y="1057376"/>
-                  <a:pt x="3482248" y="1025927"/>
-                  <a:pt x="3292450" y="1037540"/>
-                </a:cubicBezTo>
-                <a:cubicBezTo>
-                  <a:pt x="3102652" y="1049153"/>
-                  <a:pt x="3007859" y="1011076"/>
-                  <a:pt x="2742590" y="1037540"/>
-                </a:cubicBezTo>
-                <a:cubicBezTo>
-                  <a:pt x="2477321" y="1064004"/>
-                  <a:pt x="2381434" y="1051958"/>
-                  <a:pt x="2253082" y="1037540"/>
-                </a:cubicBezTo>
-                <a:cubicBezTo>
-                  <a:pt x="2124730" y="1023122"/>
-                  <a:pt x="2002048" y="1036800"/>
-                  <a:pt x="1763573" y="1037540"/>
-                </a:cubicBezTo>
-                <a:cubicBezTo>
-                  <a:pt x="1525098" y="1038280"/>
-                  <a:pt x="1353194" y="1003580"/>
-                  <a:pt x="1032662" y="1037540"/>
-                </a:cubicBezTo>
-                <a:cubicBezTo>
-                  <a:pt x="712130" y="1071500"/>
-                  <a:pt x="208208" y="988416"/>
-                  <a:pt x="0" y="1037540"/>
-                </a:cubicBezTo>
-                <a:cubicBezTo>
-                  <a:pt x="19655" y="914933"/>
-                  <a:pt x="20347" y="680180"/>
-                  <a:pt x="0" y="518770"/>
-                </a:cubicBezTo>
-                <a:cubicBezTo>
-                  <a:pt x="-20347" y="357360"/>
-                  <a:pt x="-1038" y="105344"/>
-                  <a:pt x="0" y="0"/>
-                </a:cubicBezTo>
-                <a:close/>
-              </a:path>
-              <a:path w="6035040" h="1037540" stroke="0" extrusionOk="0">
-                <a:moveTo>
-                  <a:pt x="0" y="0"/>
-                </a:moveTo>
-                <a:cubicBezTo>
-                  <a:pt x="289527" y="-5259"/>
-                  <a:pt x="365357" y="-18788"/>
-                  <a:pt x="610210" y="0"/>
-                </a:cubicBezTo>
-                <a:cubicBezTo>
-                  <a:pt x="855063" y="18788"/>
-                  <a:pt x="901801" y="-21570"/>
-                  <a:pt x="1099718" y="0"/>
-                </a:cubicBezTo>
-                <a:cubicBezTo>
-                  <a:pt x="1297635" y="21570"/>
-                  <a:pt x="1589022" y="15537"/>
-                  <a:pt x="1890979" y="0"/>
-                </a:cubicBezTo>
-                <a:cubicBezTo>
-                  <a:pt x="2192936" y="-15537"/>
-                  <a:pt x="2291197" y="-19373"/>
-                  <a:pt x="2501189" y="0"/>
-                </a:cubicBezTo>
-                <a:cubicBezTo>
-                  <a:pt x="2711181" y="19373"/>
-                  <a:pt x="2871431" y="-12225"/>
-                  <a:pt x="3111398" y="0"/>
-                </a:cubicBezTo>
-                <a:cubicBezTo>
-                  <a:pt x="3351365" y="12225"/>
-                  <a:pt x="3618019" y="8180"/>
-                  <a:pt x="3902659" y="0"/>
-                </a:cubicBezTo>
-                <a:cubicBezTo>
-                  <a:pt x="4187299" y="-8180"/>
-                  <a:pt x="4207834" y="-14641"/>
-                  <a:pt x="4452518" y="0"/>
-                </a:cubicBezTo>
-                <a:cubicBezTo>
-                  <a:pt x="4697202" y="14641"/>
-                  <a:pt x="4914876" y="-29725"/>
-                  <a:pt x="5243779" y="0"/>
-                </a:cubicBezTo>
-                <a:cubicBezTo>
-                  <a:pt x="5572682" y="29725"/>
-                  <a:pt x="5866253" y="-28421"/>
-                  <a:pt x="6035040" y="0"/>
-                </a:cubicBezTo>
-                <a:cubicBezTo>
-                  <a:pt x="6012304" y="163062"/>
-                  <a:pt x="6019692" y="298436"/>
-                  <a:pt x="6035040" y="518770"/>
-                </a:cubicBezTo>
-                <a:cubicBezTo>
-                  <a:pt x="6050389" y="739104"/>
-                  <a:pt x="6019501" y="864777"/>
-                  <a:pt x="6035040" y="1037540"/>
-                </a:cubicBezTo>
-                <a:cubicBezTo>
-                  <a:pt x="5754248" y="1042692"/>
-                  <a:pt x="5477105" y="1016460"/>
-                  <a:pt x="5304130" y="1037540"/>
-                </a:cubicBezTo>
-                <a:cubicBezTo>
-                  <a:pt x="5131155" y="1058621"/>
-                  <a:pt x="4698824" y="1013027"/>
-                  <a:pt x="4512869" y="1037540"/>
-                </a:cubicBezTo>
-                <a:cubicBezTo>
-                  <a:pt x="4326914" y="1062053"/>
-                  <a:pt x="4051383" y="1049917"/>
-                  <a:pt x="3721608" y="1037540"/>
-                </a:cubicBezTo>
-                <a:cubicBezTo>
-                  <a:pt x="3391833" y="1025163"/>
-                  <a:pt x="3303903" y="1043941"/>
-                  <a:pt x="3171749" y="1037540"/>
-                </a:cubicBezTo>
-                <a:cubicBezTo>
-                  <a:pt x="3039595" y="1031139"/>
-                  <a:pt x="2765782" y="1031081"/>
-                  <a:pt x="2501189" y="1037540"/>
-                </a:cubicBezTo>
-                <a:cubicBezTo>
-                  <a:pt x="2236596" y="1043999"/>
-                  <a:pt x="1977286" y="1006643"/>
-                  <a:pt x="1709928" y="1037540"/>
-                </a:cubicBezTo>
-                <a:cubicBezTo>
-                  <a:pt x="1442570" y="1068437"/>
-                  <a:pt x="1293950" y="1027178"/>
-                  <a:pt x="1039368" y="1037540"/>
-                </a:cubicBezTo>
-                <a:cubicBezTo>
-                  <a:pt x="784786" y="1047902"/>
-                  <a:pt x="333809" y="1009214"/>
-                  <a:pt x="0" y="1037540"/>
-                </a:cubicBezTo>
-                <a:cubicBezTo>
-                  <a:pt x="37" y="896691"/>
-                  <a:pt x="15580" y="733555"/>
-                  <a:pt x="0" y="539521"/>
-                </a:cubicBezTo>
-                <a:cubicBezTo>
-                  <a:pt x="-15580" y="345487"/>
-                  <a:pt x="-2973" y="207556"/>
-                  <a:pt x="0" y="0"/>
-                </a:cubicBezTo>
-                <a:close/>
-              </a:path>
-            </a:pathLst>
-          </a:custGeom>
-          <a:gradFill>
-            <a:gsLst>
-              <a:gs pos="0">
-                <a:srgbClr val="B3EBF2"/>
-              </a:gs>
-              <a:gs pos="77000">
-                <a:srgbClr val="FEFEFE"/>
-              </a:gs>
-              <a:gs pos="26000">
-                <a:srgbClr val="FEFEFE"/>
-              </a:gs>
-              <a:gs pos="100000">
-                <a:srgbClr val="BEEEF4"/>
-              </a:gs>
-            </a:gsLst>
-            <a:path path="circle">
-              <a:fillToRect l="100000" t="100000"/>
-            </a:path>
-          </a:gradFill>
-          <a:ln w="25400">
-            <a:solidFill>
-              <a:srgbClr val="00ACC1"/>
-            </a:solidFill>
-            <a:extLst>
-              <a:ext uri="{C807C97D-BFC1-408E-A445-0C87EB9F89A2}">
-                <ask:lineSketchStyleProps xmlns:ask="http://schemas.microsoft.com/office/drawing/2018/sketchyshapes" sd="1219033472">
-                  <a:prstGeom prst="rect">
-                    <a:avLst/>
-                  </a:prstGeom>
-                  <ask:type>
-                    <ask:lineSketchFreehand/>
-                  </ask:type>
-                </ask:lineSketchStyleProps>
-              </a:ext>
-            </a:extLst>
-          </a:ln>
-        </p:spPr>
-        <p:txBody>
-          <a:bodyPr/>
-          <a:lstStyle/>
-          <a:p>
-            <a:endParaRPr lang="ru-RU" dirty="0"/>
-          </a:p>
-        </p:txBody>
-      </p:sp>
-      <p:sp>
-        <p:nvSpPr>
-          <p:cNvPr id="16" name="Text 14"/>
-          <p:cNvSpPr/>
-          <p:nvPr/>
-        </p:nvSpPr>
-        <p:spPr>
-          <a:xfrm>
-            <a:off x="1659437" y="3911451"/>
-            <a:ext cx="5825126" cy="239432"/>
-          </a:xfrm>
-          <a:prstGeom prst="rect">
-            <a:avLst/>
-          </a:prstGeom>
-          <a:noFill/>
-          <a:ln/>
-        </p:spPr>
-        <p:txBody>
-          <a:bodyPr wrap="square" rtlCol="0" anchor="ctr"/>
-          <a:lstStyle/>
-          <a:p>
-            <a:pPr marL="0" indent="0">
-              <a:buNone/>
-            </a:pPr>
-            <a:r>
-              <a:rPr lang="en-US" sz="1400" b="1" dirty="0">
-                <a:solidFill>
-                  <a:srgbClr val="006064"/>
-                </a:solidFill>
-              </a:rPr>
-              <a:t>Особенности разработки:</a:t>
-            </a:r>
-            <a:endParaRPr lang="en-US" sz="1400" dirty="0"/>
-          </a:p>
-        </p:txBody>
-      </p:sp>
-      <p:sp>
-        <p:nvSpPr>
-          <p:cNvPr id="17" name="Text 15"/>
-          <p:cNvSpPr/>
-          <p:nvPr/>
-        </p:nvSpPr>
-        <p:spPr>
-          <a:xfrm>
-            <a:off x="1659437" y="4230694"/>
-            <a:ext cx="5825126" cy="159622"/>
-          </a:xfrm>
-          <a:prstGeom prst="rect">
-            <a:avLst/>
-          </a:prstGeom>
-          <a:noFill/>
-          <a:ln/>
-        </p:spPr>
-        <p:txBody>
-          <a:bodyPr wrap="square" rtlCol="0" anchor="ctr"/>
-          <a:lstStyle/>
-          <a:p>
-            <a:pPr marL="0" indent="0">
-              <a:buNone/>
-            </a:pPr>
-            <a:r>
-              <a:rPr lang="en-US" sz="1200" dirty="0">
-                <a:solidFill>
-                  <a:srgbClr val="333333"/>
-                </a:solidFill>
-              </a:rPr>
-              <a:t>• Освоена технология Blazor Server для создания интерактивных веб-приложений</a:t>
-            </a:r>
-            <a:endParaRPr lang="en-US" sz="1200" dirty="0"/>
-          </a:p>
-        </p:txBody>
-      </p:sp>
-      <p:sp>
-        <p:nvSpPr>
-          <p:cNvPr id="18" name="Text 16"/>
-          <p:cNvSpPr/>
-          <p:nvPr/>
-        </p:nvSpPr>
-        <p:spPr>
-          <a:xfrm>
-            <a:off x="1659437" y="4430221"/>
-            <a:ext cx="5825126" cy="159622"/>
-          </a:xfrm>
-          <a:prstGeom prst="rect">
-            <a:avLst/>
-          </a:prstGeom>
-          <a:noFill/>
-          <a:ln/>
-        </p:spPr>
-        <p:txBody>
-          <a:bodyPr wrap="square" rtlCol="0" anchor="ctr"/>
-          <a:lstStyle/>
-          <a:p>
-            <a:pPr marL="0" indent="0">
-              <a:buNone/>
-            </a:pPr>
-            <a:r>
-              <a:rPr lang="ru-RU" sz="1200" dirty="0"/>
-              <a:t>Применены принципы проектирования реляционных БД и оптимизации запросов</a:t>
-            </a:r>
-            <a:endParaRPr lang="en-US" sz="1200" dirty="0"/>
-          </a:p>
-        </p:txBody>
-      </p:sp>
-      <p:sp>
-        <p:nvSpPr>
-          <p:cNvPr id="19" name="Text 17"/>
-          <p:cNvSpPr/>
-          <p:nvPr/>
-        </p:nvSpPr>
-        <p:spPr>
-          <a:xfrm>
-            <a:off x="1659437" y="4629748"/>
-            <a:ext cx="5825126" cy="159622"/>
-          </a:xfrm>
-          <a:prstGeom prst="rect">
-            <a:avLst/>
-          </a:prstGeom>
-          <a:noFill/>
-          <a:ln/>
-        </p:spPr>
-        <p:txBody>
-          <a:bodyPr wrap="square" rtlCol="0" anchor="ctr"/>
-          <a:lstStyle/>
-          <a:p>
-            <a:pPr marL="0" indent="0">
-              <a:buNone/>
-            </a:pPr>
-            <a:r>
-              <a:rPr lang="en-US" sz="1200" dirty="0">
-                <a:solidFill>
-                  <a:srgbClr val="333333"/>
-                </a:solidFill>
-              </a:rPr>
-              <a:t>• </a:t>
-            </a:r>
-            <a:r>
-              <a:rPr lang="en-US" sz="1200" dirty="0" err="1">
-                <a:solidFill>
-                  <a:srgbClr val="333333"/>
-                </a:solidFill>
-              </a:rPr>
-              <a:t>Применены</a:t>
-            </a:r>
-            <a:r>
-              <a:rPr lang="en-US" sz="1200" dirty="0">
-                <a:solidFill>
-                  <a:srgbClr val="333333"/>
-                </a:solidFill>
-              </a:rPr>
-              <a:t> </a:t>
-            </a:r>
-            <a:r>
-              <a:rPr lang="en-US" sz="1200" dirty="0" err="1">
-                <a:solidFill>
-                  <a:srgbClr val="333333"/>
-                </a:solidFill>
-              </a:rPr>
-              <a:t>паттерны</a:t>
-            </a:r>
-            <a:r>
-              <a:rPr lang="en-US" sz="1200" dirty="0">
-                <a:solidFill>
-                  <a:srgbClr val="333333"/>
-                </a:solidFill>
-              </a:rPr>
-              <a:t> </a:t>
-            </a:r>
-            <a:r>
-              <a:rPr lang="en-US" sz="1200" dirty="0" err="1">
-                <a:solidFill>
-                  <a:srgbClr val="333333"/>
-                </a:solidFill>
-              </a:rPr>
-              <a:t>разработки</a:t>
-            </a:r>
-            <a:r>
-              <a:rPr lang="en-US" sz="1200" dirty="0">
-                <a:solidFill>
-                  <a:srgbClr val="333333"/>
-                </a:solidFill>
-              </a:rPr>
-              <a:t> и </a:t>
-            </a:r>
-            <a:r>
-              <a:rPr lang="en-US" sz="1200" dirty="0" err="1">
-                <a:solidFill>
-                  <a:srgbClr val="333333"/>
-                </a:solidFill>
-              </a:rPr>
-              <a:t>принципы</a:t>
-            </a:r>
-            <a:r>
-              <a:rPr lang="en-US" sz="1200" dirty="0">
-                <a:solidFill>
-                  <a:srgbClr val="333333"/>
-                </a:solidFill>
-              </a:rPr>
-              <a:t> SOLID</a:t>
-            </a:r>
-            <a:endParaRPr lang="en-US" sz="1200" dirty="0"/>
-          </a:p>
-        </p:txBody>
-      </p:sp>
-      <p:sp>
-        <p:nvSpPr>
-          <p:cNvPr id="23" name="Text 4">
-            <a:extLst>
-              <a:ext uri="{FF2B5EF4-FFF2-40B4-BE49-F238E27FC236}">
-                <a16:creationId xmlns:a16="http://schemas.microsoft.com/office/drawing/2014/main" id="{E7110B27-5969-2087-C625-ADB67950AFC2}"/>
-              </a:ext>
-            </a:extLst>
-          </p:cNvPr>
-          <p:cNvSpPr>
-            <a:spLocks noGrp="1" noRot="1" noMove="1" noResize="1" noEditPoints="1" noAdjustHandles="1" noChangeArrowheads="1" noChangeShapeType="1"/>
-          </p:cNvSpPr>
-          <p:nvPr/>
-        </p:nvSpPr>
-        <p:spPr>
-          <a:xfrm>
-            <a:off x="8229600" y="4869180"/>
-            <a:ext cx="914400" cy="274320"/>
-          </a:xfrm>
-          <a:prstGeom prst="rect">
-            <a:avLst/>
-          </a:prstGeom>
-          <a:noFill/>
-          <a:ln/>
-        </p:spPr>
-        <p:txBody>
-          <a:bodyPr wrap="square" rtlCol="0" anchor="ctr"/>
-          <a:lstStyle/>
-          <a:p>
-            <a:pPr marL="0" indent="0" algn="r">
-              <a:buNone/>
-            </a:pPr>
-            <a:r>
-              <a:rPr lang="ru-RU" sz="1400" dirty="0">
-                <a:solidFill>
-                  <a:srgbClr val="666666"/>
-                </a:solidFill>
-              </a:rPr>
-              <a:t>7</a:t>
-            </a:r>
-            <a:r>
-              <a:rPr lang="en-US" sz="1400" dirty="0">
-                <a:solidFill>
-                  <a:srgbClr val="666666"/>
-                </a:solidFill>
-              </a:rPr>
-              <a:t>/8</a:t>
-            </a:r>
-            <a:endParaRPr lang="en-US" sz="1400" dirty="0"/>
-          </a:p>
-        </p:txBody>
-      </p:sp>
-      <p:pic>
-        <p:nvPicPr>
-          <p:cNvPr id="26" name="Рисунок 25" descr="Изображение выглядит как часы, символ, круг, Графика&#10;&#10;Содержимое, созданное искусственным интеллектом, может быть неверным.">
-            <a:extLst>
-              <a:ext uri="{FF2B5EF4-FFF2-40B4-BE49-F238E27FC236}">
-                <a16:creationId xmlns:a16="http://schemas.microsoft.com/office/drawing/2014/main" id="{866895AA-23F6-A711-2D7B-F7C90261C615}"/>
-              </a:ext>
-            </a:extLst>
-          </p:cNvPr>
-          <p:cNvPicPr>
-            <a:picLocks noChangeAspect="1"/>
-          </p:cNvPicPr>
-          <p:nvPr/>
-        </p:nvPicPr>
-        <p:blipFill>
-          <a:blip r:embed="rId3"/>
-          <a:stretch>
-            <a:fillRect/>
-          </a:stretch>
-        </p:blipFill>
-        <p:spPr>
-          <a:xfrm>
-            <a:off x="1357105" y="532900"/>
-            <a:ext cx="1508015" cy="1508015"/>
-          </a:xfrm>
-          <a:prstGeom prst="rect">
-            <a:avLst/>
-          </a:prstGeom>
-        </p:spPr>
-      </p:pic>
-      <p:pic>
-        <p:nvPicPr>
-          <p:cNvPr id="28" name="Рисунок 27" descr="Изображение выглядит как символ, круг, Графика&#10;&#10;Содержимое, созданное искусственным интеллектом, может быть неверным.">
-            <a:extLst>
-              <a:ext uri="{FF2B5EF4-FFF2-40B4-BE49-F238E27FC236}">
-                <a16:creationId xmlns:a16="http://schemas.microsoft.com/office/drawing/2014/main" id="{7536C546-5259-B096-E4D3-84EEC1DAD0BF}"/>
-              </a:ext>
-            </a:extLst>
-          </p:cNvPr>
-          <p:cNvPicPr>
-            <a:picLocks noChangeAspect="1"/>
-          </p:cNvPicPr>
-          <p:nvPr/>
-        </p:nvPicPr>
-        <p:blipFill>
-          <a:blip r:embed="rId4"/>
-          <a:stretch>
-            <a:fillRect/>
-          </a:stretch>
-        </p:blipFill>
-        <p:spPr>
-          <a:xfrm>
-            <a:off x="6481140" y="798830"/>
-            <a:ext cx="952500" cy="952500"/>
-          </a:xfrm>
-          <a:prstGeom prst="rect">
-            <a:avLst/>
-          </a:prstGeom>
-        </p:spPr>
-      </p:pic>
-      <p:pic>
-        <p:nvPicPr>
-          <p:cNvPr id="30" name="Рисунок 29" descr="Изображение выглядит как снимок экрана, Красочность, линия, Графика&#10;&#10;Содержимое, созданное искусственным интеллектом, может быть неверным.">
-            <a:extLst>
-              <a:ext uri="{FF2B5EF4-FFF2-40B4-BE49-F238E27FC236}">
-                <a16:creationId xmlns:a16="http://schemas.microsoft.com/office/drawing/2014/main" id="{2148EF42-6273-6123-31EA-FABDCDFDBF50}"/>
-              </a:ext>
-            </a:extLst>
-          </p:cNvPr>
-          <p:cNvPicPr>
-            <a:picLocks noChangeAspect="1"/>
-          </p:cNvPicPr>
-          <p:nvPr/>
-        </p:nvPicPr>
-        <p:blipFill>
-          <a:blip r:embed="rId5"/>
-          <a:stretch>
-            <a:fillRect/>
-          </a:stretch>
-        </p:blipFill>
-        <p:spPr>
-          <a:xfrm>
-            <a:off x="6481140" y="2325123"/>
-            <a:ext cx="952500" cy="952500"/>
-          </a:xfrm>
-          <a:prstGeom prst="rect">
-            <a:avLst/>
-          </a:prstGeom>
-        </p:spPr>
-      </p:pic>
-      <p:pic>
-        <p:nvPicPr>
-          <p:cNvPr id="32" name="Рисунок 31" descr="Изображение выглядит как искусство&#10;&#10;Содержимое, созданное искусственным интеллектом, может быть неверным.">
-            <a:extLst>
-              <a:ext uri="{FF2B5EF4-FFF2-40B4-BE49-F238E27FC236}">
-                <a16:creationId xmlns:a16="http://schemas.microsoft.com/office/drawing/2014/main" id="{ABB957C5-F685-41EA-86B2-8FD30057D45F}"/>
-              </a:ext>
-            </a:extLst>
-          </p:cNvPr>
-          <p:cNvPicPr>
-            <a:picLocks noChangeAspect="1"/>
-          </p:cNvPicPr>
-          <p:nvPr/>
-        </p:nvPicPr>
-        <p:blipFill>
-          <a:blip r:embed="rId6"/>
-          <a:stretch>
-            <a:fillRect/>
-          </a:stretch>
-        </p:blipFill>
-        <p:spPr>
-          <a:xfrm>
-            <a:off x="1634862" y="2325123"/>
-            <a:ext cx="952500" cy="952500"/>
-          </a:xfrm>
-          <a:prstGeom prst="rect">
-            <a:avLst/>
-          </a:prstGeom>
-        </p:spPr>
-      </p:pic>
-      <p:pic>
-        <p:nvPicPr>
-          <p:cNvPr id="33" name="Рисунок 32" descr="Изображение выглядит как Графика, круг, снимок экрана, Красочность&#10;&#10;Содержимое, созданное искусственным интеллектом, может быть неверным.">
-            <a:extLst>
-              <a:ext uri="{FF2B5EF4-FFF2-40B4-BE49-F238E27FC236}">
-                <a16:creationId xmlns:a16="http://schemas.microsoft.com/office/drawing/2014/main" id="{9DAA3A94-2F53-C8B8-5666-008D3AA95312}"/>
-              </a:ext>
-            </a:extLst>
-          </p:cNvPr>
-          <p:cNvPicPr>
-            <a:picLocks noChangeAspect="1"/>
-          </p:cNvPicPr>
-          <p:nvPr/>
-        </p:nvPicPr>
-        <p:blipFill>
-          <a:blip r:embed="rId7"/>
-          <a:stretch>
-            <a:fillRect/>
-          </a:stretch>
-        </p:blipFill>
-        <p:spPr>
-          <a:xfrm>
-            <a:off x="1648388" y="4190788"/>
-            <a:ext cx="209240" cy="209240"/>
-          </a:xfrm>
-          <a:prstGeom prst="rect">
-            <a:avLst/>
-          </a:prstGeom>
-        </p:spPr>
-      </p:pic>
-      <p:pic>
-        <p:nvPicPr>
-          <p:cNvPr id="34" name="Рисунок 33" descr="Изображение выглядит как Графика, круг, снимок экрана, Красочность&#10;&#10;Содержимое, созданное искусственным интеллектом, может быть неверным.">
-            <a:extLst>
-              <a:ext uri="{FF2B5EF4-FFF2-40B4-BE49-F238E27FC236}">
-                <a16:creationId xmlns:a16="http://schemas.microsoft.com/office/drawing/2014/main" id="{C28D55DD-CF1C-334A-CD25-1E87D24B3B9A}"/>
-              </a:ext>
-            </a:extLst>
-          </p:cNvPr>
-          <p:cNvPicPr>
-            <a:picLocks noChangeAspect="1"/>
-          </p:cNvPicPr>
-          <p:nvPr/>
-        </p:nvPicPr>
-        <p:blipFill>
-          <a:blip r:embed="rId7"/>
-          <a:stretch>
-            <a:fillRect/>
-          </a:stretch>
-        </p:blipFill>
-        <p:spPr>
-          <a:xfrm>
-            <a:off x="1648388" y="4408494"/>
-            <a:ext cx="207882" cy="207882"/>
-          </a:xfrm>
-          <a:prstGeom prst="rect">
-            <a:avLst/>
-          </a:prstGeom>
-        </p:spPr>
-      </p:pic>
-      <p:pic>
-        <p:nvPicPr>
-          <p:cNvPr id="35" name="Рисунок 34" descr="Изображение выглядит как Графика, круг, снимок экрана, Красочность&#10;&#10;Содержимое, созданное искусственным интеллектом, может быть неверным.">
-            <a:extLst>
-              <a:ext uri="{FF2B5EF4-FFF2-40B4-BE49-F238E27FC236}">
-                <a16:creationId xmlns:a16="http://schemas.microsoft.com/office/drawing/2014/main" id="{2EA7C826-0B88-5814-25F8-437D0F267F86}"/>
-              </a:ext>
-            </a:extLst>
-          </p:cNvPr>
-          <p:cNvPicPr>
-            <a:picLocks noChangeAspect="1"/>
-          </p:cNvPicPr>
-          <p:nvPr/>
-        </p:nvPicPr>
-        <p:blipFill>
-          <a:blip r:embed="rId7"/>
-          <a:stretch>
-            <a:fillRect/>
-          </a:stretch>
-        </p:blipFill>
-        <p:spPr>
-          <a:xfrm>
-            <a:off x="1645665" y="4614285"/>
-            <a:ext cx="207882" cy="207882"/>
-          </a:xfrm>
-          <a:prstGeom prst="rect">
-            <a:avLst/>
-          </a:prstGeom>
-        </p:spPr>
-      </p:pic>
-    </p:spTree>
-  </p:cSld>
-  <p:clrMapOvr>
-    <a:masterClrMapping/>
-  </p:clrMapOvr>
-</p:sld>
-</file>
-
-<file path=ppt/slides/slide9.xml><?xml version="1.0" encoding="utf-8"?>
+<file path=ppt/slides/slide7.xml><?xml version="1.0" encoding="utf-8"?>
 <p:sld xmlns:a="http://schemas.openxmlformats.org/drawingml/2006/main" xmlns:r="http://schemas.openxmlformats.org/officeDocument/2006/relationships" xmlns:p="http://schemas.openxmlformats.org/presentationml/2006/main">
   <p:cSld name="Slide 9">
     <p:spTree>
@@ -17906,7 +12884,7 @@
               <a:prstDash val="solid"/>
               <a:extLst>
                 <a:ext uri="{C807C97D-BFC1-408E-A445-0C87EB9F89A2}">
-                  <ask:lineSketchStyleProps xmlns:ask="http://schemas.microsoft.com/office/drawing/2018/sketchyshapes" sd="1219033472">
+                  <ask:lineSketchStyleProps xmlns:ask="http://schemas.microsoft.com/office/drawing/2018/sketchyshapes" xmlns="" sd="1219033472">
                     <a:prstGeom prst="rect">
                       <a:avLst/>
                     </a:prstGeom>
@@ -18058,12 +13036,28 @@
               <a:buNone/>
             </a:pPr>
             <a:r>
-              <a:rPr lang="en-US" sz="1400" dirty="0">
+              <a:rPr lang="ru-RU" sz="1400" dirty="0">
                 <a:solidFill>
                   <a:srgbClr val="666666"/>
                 </a:solidFill>
               </a:rPr>
-              <a:t>8/8</a:t>
+              <a:t>6</a:t>
+            </a:r>
+            <a:r>
+              <a:rPr lang="en-US" sz="1400" dirty="0" smtClean="0">
+                <a:solidFill>
+                  <a:srgbClr val="666666"/>
+                </a:solidFill>
+              </a:rPr>
+              <a:t>/</a:t>
+            </a:r>
+            <a:r>
+              <a:rPr lang="ru-RU" sz="1400" dirty="0" smtClean="0">
+                <a:solidFill>
+                  <a:srgbClr val="666666"/>
+                </a:solidFill>
+              </a:rPr>
+              <a:t>6</a:t>
             </a:r>
             <a:endParaRPr lang="en-US" sz="1400" dirty="0"/>
           </a:p>
@@ -18100,6 +13094,458 @@
         </p:spPr>
       </p:pic>
     </p:spTree>
+  </p:cSld>
+  <p:clrMapOvr>
+    <a:masterClrMapping/>
+  </p:clrMapOvr>
+</p:sld>
+</file>
+
+<file path=ppt/slides/slide8.xml><?xml version="1.0" encoding="utf-8"?>
+<p:sld xmlns:a="http://schemas.openxmlformats.org/drawingml/2006/main" xmlns:r="http://schemas.openxmlformats.org/officeDocument/2006/relationships" xmlns:p="http://schemas.openxmlformats.org/presentationml/2006/main">
+  <p:cSld>
+    <p:spTree>
+      <p:nvGrpSpPr>
+        <p:cNvPr id="1" name=""/>
+        <p:cNvGrpSpPr/>
+        <p:nvPr/>
+      </p:nvGrpSpPr>
+      <p:grpSpPr>
+        <a:xfrm>
+          <a:off x="0" y="0"/>
+          <a:ext cx="0" cy="0"/>
+          <a:chOff x="0" y="0"/>
+          <a:chExt cx="0" cy="0"/>
+        </a:xfrm>
+      </p:grpSpPr>
+      <p:sp>
+        <p:nvSpPr>
+          <p:cNvPr id="2" name="Text 0"/>
+          <p:cNvSpPr/>
+          <p:nvPr/>
+        </p:nvSpPr>
+        <p:spPr>
+          <a:xfrm>
+            <a:off x="-914400" y="182880"/>
+            <a:ext cx="10972800" cy="1371600"/>
+          </a:xfrm>
+          <a:prstGeom prst="rect">
+            <a:avLst/>
+          </a:prstGeom>
+          <a:noFill/>
+          <a:ln/>
+        </p:spPr>
+        <p:txBody>
+          <a:bodyPr wrap="square" rtlCol="0" anchor="t"/>
+          <a:lstStyle/>
+          <a:p>
+            <a:pPr marL="0" indent="0" algn="ctr">
+              <a:buNone/>
+            </a:pPr>
+            <a:r>
+              <a:rPr lang="en-US" sz="1000" b="1" dirty="0">
+                <a:solidFill>
+                  <a:srgbClr val="000000"/>
+                </a:solidFill>
+              </a:rPr>
+              <a:t>ФЕДЕРАЛЬНОЕ ГОСУДАРСТВЕННОЕ БЮДЖЕТНОЕ ОБРАЗОВАТЕЛЬНОЕ</a:t>
+            </a:r>
+            <a:endParaRPr lang="en-US" sz="1000" dirty="0"/>
+          </a:p>
+          <a:p>
+            <a:pPr marL="0" indent="0" algn="ctr">
+              <a:buNone/>
+            </a:pPr>
+            <a:r>
+              <a:rPr lang="en-US" sz="1000" b="1" dirty="0">
+                <a:solidFill>
+                  <a:srgbClr val="000000"/>
+                </a:solidFill>
+              </a:rPr>
+              <a:t>УЧРЕЖДЕНИЕ ВЫСШЕГО ОБРАЗОВАНИЯ</a:t>
+            </a:r>
+            <a:endParaRPr lang="en-US" sz="1000" dirty="0"/>
+          </a:p>
+          <a:p>
+            <a:pPr marL="0" indent="0" algn="ctr">
+              <a:buNone/>
+            </a:pPr>
+            <a:r>
+              <a:rPr lang="en-US" sz="1000" b="1" dirty="0">
+                <a:solidFill>
+                  <a:srgbClr val="000000"/>
+                </a:solidFill>
+              </a:rPr>
+              <a:t>«САНКТ-ПЕТЕРБУРГСКИЙ ГОСУДАРСТВЕННЫЙ УНИВЕРСИТЕТ</a:t>
+            </a:r>
+            <a:endParaRPr lang="en-US" sz="1000" dirty="0"/>
+          </a:p>
+          <a:p>
+            <a:pPr marL="0" indent="0" algn="ctr">
+              <a:buNone/>
+            </a:pPr>
+            <a:r>
+              <a:rPr lang="en-US" sz="1000" b="1" dirty="0">
+                <a:solidFill>
+                  <a:srgbClr val="000000"/>
+                </a:solidFill>
+              </a:rPr>
+              <a:t>ТЕЛЕКОММУНИКАЦИЙ ИМ. ПРОФ. М.А. БОНЧ-БРУЕВИЧА»</a:t>
+            </a:r>
+            <a:endParaRPr lang="en-US" sz="1000" dirty="0"/>
+          </a:p>
+          <a:p>
+            <a:pPr marL="0" indent="0" algn="ctr">
+              <a:buNone/>
+            </a:pPr>
+            <a:r>
+              <a:rPr lang="en-US" sz="1000" b="1" dirty="0">
+                <a:solidFill>
+                  <a:srgbClr val="000000"/>
+                </a:solidFill>
+              </a:rPr>
+              <a:t>(СПбГУТ)</a:t>
+            </a:r>
+            <a:endParaRPr lang="en-US" sz="1000" dirty="0"/>
+          </a:p>
+          <a:p>
+            <a:pPr marL="0" indent="0" algn="ctr">
+              <a:buNone/>
+            </a:pPr>
+            <a:r>
+              <a:rPr lang="en-US" sz="1000" b="1" dirty="0">
+                <a:solidFill>
+                  <a:srgbClr val="000000"/>
+                </a:solidFill>
+              </a:rPr>
+              <a:t>АРХАНГЕЛЬСКИЙ КОЛЛЕДЖ ТЕЛЕКОММУНИКАЦИЙ</a:t>
+            </a:r>
+            <a:endParaRPr lang="en-US" sz="1000" dirty="0"/>
+          </a:p>
+          <a:p>
+            <a:pPr marL="0" indent="0" algn="ctr">
+              <a:buNone/>
+            </a:pPr>
+            <a:r>
+              <a:rPr lang="en-US" sz="1000" b="1" dirty="0">
+                <a:solidFill>
+                  <a:srgbClr val="000000"/>
+                </a:solidFill>
+              </a:rPr>
+              <a:t>ИМ. Б.Л. РОЗИНГА (ФИЛИАЛ) СПбГУТ</a:t>
+            </a:r>
+            <a:endParaRPr lang="en-US" sz="1000" dirty="0"/>
+          </a:p>
+          <a:p>
+            <a:pPr marL="0" indent="0" algn="ctr">
+              <a:buNone/>
+            </a:pPr>
+            <a:r>
+              <a:rPr lang="en-US" sz="1000" b="1" dirty="0">
+                <a:solidFill>
+                  <a:srgbClr val="000000"/>
+                </a:solidFill>
+              </a:rPr>
+              <a:t>(АКТ (ф) СПбГУТ)</a:t>
+            </a:r>
+            <a:endParaRPr lang="en-US" sz="1000" dirty="0"/>
+          </a:p>
+        </p:txBody>
+      </p:sp>
+      <p:sp>
+        <p:nvSpPr>
+          <p:cNvPr id="3" name="Text 1"/>
+          <p:cNvSpPr/>
+          <p:nvPr/>
+        </p:nvSpPr>
+        <p:spPr>
+          <a:xfrm>
+            <a:off x="0" y="2359489"/>
+            <a:ext cx="9144000" cy="457200"/>
+          </a:xfrm>
+          <a:prstGeom prst="rect">
+            <a:avLst/>
+          </a:prstGeom>
+          <a:noFill/>
+          <a:ln/>
+        </p:spPr>
+        <p:txBody>
+          <a:bodyPr wrap="square" rtlCol="0" anchor="ctr"/>
+          <a:lstStyle/>
+          <a:p>
+            <a:pPr marL="0" indent="0" algn="ctr">
+              <a:buNone/>
+            </a:pPr>
+            <a:r>
+              <a:rPr lang="ru-RU" sz="2400" b="1" dirty="0" smtClean="0">
+                <a:solidFill>
+                  <a:srgbClr val="006064"/>
+                </a:solidFill>
+              </a:rPr>
+              <a:t>Дипломный</a:t>
+            </a:r>
+            <a:r>
+              <a:rPr lang="en-US" sz="2400" b="1" dirty="0" smtClean="0">
+                <a:solidFill>
+                  <a:srgbClr val="006064"/>
+                </a:solidFill>
+              </a:rPr>
+              <a:t> </a:t>
+            </a:r>
+            <a:r>
+              <a:rPr lang="en-US" sz="2400" b="1" dirty="0">
+                <a:solidFill>
+                  <a:srgbClr val="006064"/>
+                </a:solidFill>
+              </a:rPr>
+              <a:t>проект</a:t>
+            </a:r>
+            <a:endParaRPr lang="en-US" sz="2400" dirty="0"/>
+          </a:p>
+        </p:txBody>
+      </p:sp>
+      <p:sp>
+        <p:nvSpPr>
+          <p:cNvPr id="4" name="Text 2"/>
+          <p:cNvSpPr/>
+          <p:nvPr/>
+        </p:nvSpPr>
+        <p:spPr>
+          <a:xfrm>
+            <a:off x="-914400" y="2781632"/>
+            <a:ext cx="10972800" cy="914400"/>
+          </a:xfrm>
+          <a:prstGeom prst="rect">
+            <a:avLst/>
+          </a:prstGeom>
+          <a:noFill/>
+          <a:ln/>
+        </p:spPr>
+        <p:txBody>
+          <a:bodyPr wrap="square" rtlCol="0" anchor="ctr"/>
+          <a:lstStyle/>
+          <a:p>
+            <a:pPr marL="0" indent="0" algn="ctr">
+              <a:buNone/>
+            </a:pPr>
+            <a:r>
+              <a:rPr lang="en-US" sz="2000" b="1" dirty="0">
+                <a:solidFill>
+                  <a:srgbClr val="00ACC1"/>
+                </a:solidFill>
+              </a:rPr>
+              <a:t>РАЗРАБОТКА </a:t>
+            </a:r>
+            <a:r>
+              <a:rPr lang="ru-RU" sz="2000" b="1" dirty="0" smtClean="0">
+                <a:solidFill>
+                  <a:srgbClr val="00ACC1"/>
+                </a:solidFill>
+              </a:rPr>
+              <a:t>ИНФОРМАЦИОННОЙ </a:t>
+            </a:r>
+            <a:r>
+              <a:rPr lang="en-US" sz="2000" b="1" dirty="0" smtClean="0">
+                <a:solidFill>
+                  <a:srgbClr val="00ACC1"/>
+                </a:solidFill>
+              </a:rPr>
+              <a:t>СИСТЕМЫ</a:t>
+            </a:r>
+            <a:endParaRPr lang="en-US" sz="2000" dirty="0"/>
+          </a:p>
+          <a:p>
+            <a:pPr marL="0" indent="0" algn="ctr">
+              <a:buNone/>
+            </a:pPr>
+            <a:r>
+              <a:rPr lang="en-US" sz="2000" b="1" dirty="0">
+                <a:solidFill>
+                  <a:srgbClr val="00ACC1"/>
+                </a:solidFill>
+              </a:rPr>
+              <a:t>АРХРЕЕСТР. ПОИСК НЕДВИЖИМОСТИ</a:t>
+            </a:r>
+            <a:endParaRPr lang="en-US" sz="2000" dirty="0"/>
+          </a:p>
+        </p:txBody>
+      </p:sp>
+      <p:sp>
+        <p:nvSpPr>
+          <p:cNvPr id="5" name="Text 3"/>
+          <p:cNvSpPr/>
+          <p:nvPr/>
+        </p:nvSpPr>
+        <p:spPr>
+          <a:xfrm>
+            <a:off x="0" y="3742261"/>
+            <a:ext cx="9144000" cy="365760"/>
+          </a:xfrm>
+          <a:prstGeom prst="rect">
+            <a:avLst/>
+          </a:prstGeom>
+          <a:noFill/>
+          <a:ln/>
+        </p:spPr>
+        <p:txBody>
+          <a:bodyPr wrap="square" rtlCol="0" anchor="ctr"/>
+          <a:lstStyle/>
+          <a:p>
+            <a:pPr marL="0" indent="0" algn="ctr">
+              <a:buNone/>
+            </a:pPr>
+            <a:r>
+              <a:rPr lang="en-US" sz="1400" dirty="0">
+                <a:solidFill>
+                  <a:srgbClr val="000000"/>
+                </a:solidFill>
+              </a:rPr>
+              <a:t>Студент группы ИСПП-21: Маратканов Андрей Алексеевич</a:t>
+            </a:r>
+            <a:endParaRPr lang="en-US" sz="1400" dirty="0"/>
+          </a:p>
+        </p:txBody>
+      </p:sp>
+      <p:sp>
+        <p:nvSpPr>
+          <p:cNvPr id="6" name="Text 4"/>
+          <p:cNvSpPr/>
+          <p:nvPr/>
+        </p:nvSpPr>
+        <p:spPr>
+          <a:xfrm>
+            <a:off x="0" y="4098960"/>
+            <a:ext cx="9144000" cy="365760"/>
+          </a:xfrm>
+          <a:prstGeom prst="rect">
+            <a:avLst/>
+          </a:prstGeom>
+          <a:noFill/>
+          <a:ln/>
+        </p:spPr>
+        <p:txBody>
+          <a:bodyPr wrap="square" rtlCol="0" anchor="ctr"/>
+          <a:lstStyle/>
+          <a:p>
+            <a:pPr marL="0" indent="0" algn="ctr">
+              <a:buNone/>
+            </a:pPr>
+            <a:r>
+              <a:rPr lang="en-US" sz="1400" dirty="0" err="1">
+                <a:solidFill>
+                  <a:srgbClr val="000000"/>
+                </a:solidFill>
+              </a:rPr>
+              <a:t>Руководитель</a:t>
+            </a:r>
+            <a:r>
+              <a:rPr lang="en-US" sz="1400" dirty="0" smtClean="0">
+                <a:solidFill>
+                  <a:srgbClr val="000000"/>
+                </a:solidFill>
+              </a:rPr>
+              <a:t>: </a:t>
+            </a:r>
+            <a:r>
+              <a:rPr lang="ru-RU" sz="1400" dirty="0" smtClean="0">
+                <a:solidFill>
+                  <a:srgbClr val="000000"/>
+                </a:solidFill>
+              </a:rPr>
+              <a:t>Садовский Роман Викторович</a:t>
+            </a:r>
+            <a:endParaRPr lang="en-US" sz="1400" dirty="0"/>
+          </a:p>
+        </p:txBody>
+      </p:sp>
+      <p:sp>
+        <p:nvSpPr>
+          <p:cNvPr id="7" name="Text 5"/>
+          <p:cNvSpPr/>
+          <p:nvPr/>
+        </p:nvSpPr>
+        <p:spPr>
+          <a:xfrm>
+            <a:off x="0" y="4604400"/>
+            <a:ext cx="9144000" cy="274320"/>
+          </a:xfrm>
+          <a:prstGeom prst="rect">
+            <a:avLst/>
+          </a:prstGeom>
+          <a:noFill/>
+          <a:ln/>
+        </p:spPr>
+        <p:txBody>
+          <a:bodyPr wrap="square" rtlCol="0" anchor="ctr"/>
+          <a:lstStyle/>
+          <a:p>
+            <a:pPr marL="0" indent="0" algn="ctr">
+              <a:buNone/>
+            </a:pPr>
+            <a:r>
+              <a:rPr lang="en-US" sz="1200" dirty="0">
+                <a:solidFill>
+                  <a:srgbClr val="666666"/>
+                </a:solidFill>
+              </a:rPr>
+              <a:t>Архангельск, </a:t>
+            </a:r>
+            <a:r>
+              <a:rPr lang="en-US" sz="1200" dirty="0" smtClean="0">
+                <a:solidFill>
+                  <a:srgbClr val="666666"/>
+                </a:solidFill>
+              </a:rPr>
+              <a:t>202</a:t>
+            </a:r>
+            <a:r>
+              <a:rPr lang="ru-RU" sz="1200" dirty="0" smtClean="0">
+                <a:solidFill>
+                  <a:srgbClr val="666666"/>
+                </a:solidFill>
+              </a:rPr>
+              <a:t>6</a:t>
+            </a:r>
+            <a:endParaRPr lang="en-US" sz="1200" dirty="0"/>
+          </a:p>
+        </p:txBody>
+      </p:sp>
+      <p:pic>
+        <p:nvPicPr>
+          <p:cNvPr id="9" name="Рисунок 8" descr="Изображение выглядит как логотип, Графика, символ, Шрифт&#10;&#10;Содержимое, созданное искусственным интеллектом, может быть неверным.">
+            <a:extLst>
+              <a:ext uri="{FF2B5EF4-FFF2-40B4-BE49-F238E27FC236}">
+                <a16:creationId xmlns:a16="http://schemas.microsoft.com/office/drawing/2014/main" id="{5874151E-875C-3F5B-64CF-13FDB55E7D83}"/>
+              </a:ext>
+            </a:extLst>
+          </p:cNvPr>
+          <p:cNvPicPr>
+            <a:picLocks noChangeAspect="1"/>
+          </p:cNvPicPr>
+          <p:nvPr/>
+        </p:nvPicPr>
+        <p:blipFill>
+          <a:blip r:embed="rId3"/>
+          <a:stretch>
+            <a:fillRect/>
+          </a:stretch>
+        </p:blipFill>
+        <p:spPr>
+          <a:xfrm>
+            <a:off x="4156960" y="1583221"/>
+            <a:ext cx="830080" cy="821861"/>
+          </a:xfrm>
+          <a:prstGeom prst="rect">
+            <a:avLst/>
+          </a:prstGeom>
+        </p:spPr>
+      </p:pic>
+    </p:spTree>
+    <p:extLst>
+      <p:ext uri="{BB962C8B-B14F-4D97-AF65-F5344CB8AC3E}">
+        <p14:creationId xmlns:p14="http://schemas.microsoft.com/office/powerpoint/2010/main" val="3508106833"/>
+      </p:ext>
+    </p:extLst>
   </p:cSld>
   <p:clrMapOvr>
     <a:masterClrMapping/>
